--- a/data/deep_dives/carteira_solfacil_00ce8693/exports/documentary_comparison.pptx
+++ b/data/deep_dives/carteira_solfacil_00ce8693/exports/documentary_comparison.pptx
@@ -8264,7 +8264,7 @@
                       <a:r>
                         <a:rPr sz="1300" b="1">
                           <a:solidFill>
-                            <a:srgbClr val="1F1F1F"/>
+                            <a:srgbClr val="FFFFFF"/>
                           </a:solidFill>
                           <a:latin typeface="Calibri"/>
                         </a:rPr>
@@ -8274,7 +8274,7 @@
                   </a:txBody>
                   <a:tcPr marL="91440" marR="91440" marT="41148" marB="41148" anchor="ctr">
                     <a:solidFill>
-                      <a:srgbClr val="EC7000"/>
+                      <a:srgbClr val="FF6200"/>
                     </a:solidFill>
                     <a:lnL>
                       <a:noFill/>
@@ -8313,7 +8313,7 @@
                       <a:r>
                         <a:rPr sz="1300" b="1">
                           <a:solidFill>
-                            <a:srgbClr val="1F1F1F"/>
+                            <a:srgbClr val="FFFFFF"/>
                           </a:solidFill>
                           <a:latin typeface="Calibri"/>
                         </a:rPr>
@@ -8323,7 +8323,7 @@
                   </a:txBody>
                   <a:tcPr marL="91440" marR="91440" marT="41148" marB="41148" anchor="ctr">
                     <a:solidFill>
-                      <a:srgbClr val="EC7000"/>
+                      <a:srgbClr val="FF6200"/>
                     </a:solidFill>
                     <a:lnL>
                       <a:noFill/>
@@ -8362,7 +8362,7 @@
                       <a:r>
                         <a:rPr sz="1300" b="1">
                           <a:solidFill>
-                            <a:srgbClr val="1F1F1F"/>
+                            <a:srgbClr val="FFFFFF"/>
                           </a:solidFill>
                           <a:latin typeface="Calibri"/>
                         </a:rPr>
@@ -8372,7 +8372,7 @@
                   </a:txBody>
                   <a:tcPr marL="91440" marR="91440" marT="41148" marB="41148" anchor="ctr">
                     <a:solidFill>
-                      <a:srgbClr val="EC7000"/>
+                      <a:srgbClr val="FF6200"/>
                     </a:solidFill>
                     <a:lnL>
                       <a:noFill/>
@@ -8411,7 +8411,7 @@
                       <a:r>
                         <a:rPr sz="1300" b="1">
                           <a:solidFill>
-                            <a:srgbClr val="1F1F1F"/>
+                            <a:srgbClr val="FFFFFF"/>
                           </a:solidFill>
                           <a:latin typeface="Calibri"/>
                         </a:rPr>
@@ -8421,7 +8421,7 @@
                   </a:txBody>
                   <a:tcPr marL="91440" marR="91440" marT="41148" marB="41148" anchor="ctr">
                     <a:solidFill>
-                      <a:srgbClr val="EC7000"/>
+                      <a:srgbClr val="FF6200"/>
                     </a:solidFill>
                     <a:lnL>
                       <a:noFill/>
@@ -8460,7 +8460,7 @@
                       <a:r>
                         <a:rPr sz="1300" b="1">
                           <a:solidFill>
-                            <a:srgbClr val="1F1F1F"/>
+                            <a:srgbClr val="FFFFFF"/>
                           </a:solidFill>
                           <a:latin typeface="Calibri"/>
                         </a:rPr>
@@ -8470,7 +8470,7 @@
                   </a:txBody>
                   <a:tcPr marL="91440" marR="91440" marT="41148" marB="41148" anchor="ctr">
                     <a:solidFill>
-                      <a:srgbClr val="EC7000"/>
+                      <a:srgbClr val="FF6200"/>
                     </a:solidFill>
                     <a:lnL>
                       <a:noFill/>
@@ -10169,7 +10169,7 @@
         </p:nvGraphicFramePr>
         <p:xfrm>
           <a:off x="438912" y="932688"/>
-          <a:ext cx="11313868" cy="4901182"/>
+          <a:ext cx="11313868" cy="3026662"/>
         </p:xfrm>
         <a:graphic>
           <a:graphicData uri="http://schemas.openxmlformats.org/drawingml/2006/table">
@@ -10206,7 +10206,7 @@
                       <a:r>
                         <a:rPr sz="1300" b="1">
                           <a:solidFill>
-                            <a:srgbClr val="1F1F1F"/>
+                            <a:srgbClr val="FFFFFF"/>
                           </a:solidFill>
                           <a:latin typeface="Calibri"/>
                         </a:rPr>
@@ -10216,7 +10216,7 @@
                   </a:txBody>
                   <a:tcPr marL="91440" marR="91440" marT="41148" marB="41148" anchor="ctr">
                     <a:solidFill>
-                      <a:srgbClr val="EC7000"/>
+                      <a:srgbClr val="FF6200"/>
                     </a:solidFill>
                     <a:lnL>
                       <a:noFill/>
@@ -10255,7 +10255,7 @@
                       <a:r>
                         <a:rPr sz="1300" b="1">
                           <a:solidFill>
-                            <a:srgbClr val="1F1F1F"/>
+                            <a:srgbClr val="FFFFFF"/>
                           </a:solidFill>
                           <a:latin typeface="Calibri"/>
                         </a:rPr>
@@ -10265,7 +10265,7 @@
                   </a:txBody>
                   <a:tcPr marL="91440" marR="91440" marT="41148" marB="41148" anchor="ctr">
                     <a:solidFill>
-                      <a:srgbClr val="EC7000"/>
+                      <a:srgbClr val="FF6200"/>
                     </a:solidFill>
                     <a:lnL>
                       <a:noFill/>
@@ -10304,7 +10304,7 @@
                       <a:r>
                         <a:rPr sz="1300" b="1">
                           <a:solidFill>
-                            <a:srgbClr val="1F1F1F"/>
+                            <a:srgbClr val="FFFFFF"/>
                           </a:solidFill>
                           <a:latin typeface="Calibri"/>
                         </a:rPr>
@@ -10314,7 +10314,7 @@
                   </a:txBody>
                   <a:tcPr marL="91440" marR="91440" marT="41148" marB="41148" anchor="ctr">
                     <a:solidFill>
-                      <a:srgbClr val="EC7000"/>
+                      <a:srgbClr val="FF6200"/>
                     </a:solidFill>
                     <a:lnL>
                       <a:noFill/>
@@ -10353,7 +10353,7 @@
                       <a:r>
                         <a:rPr sz="1300" b="1">
                           <a:solidFill>
-                            <a:srgbClr val="1F1F1F"/>
+                            <a:srgbClr val="FFFFFF"/>
                           </a:solidFill>
                           <a:latin typeface="Calibri"/>
                         </a:rPr>
@@ -10363,7 +10363,7 @@
                   </a:txBody>
                   <a:tcPr marL="91440" marR="91440" marT="41148" marB="41148" anchor="ctr">
                     <a:solidFill>
-                      <a:srgbClr val="EC7000"/>
+                      <a:srgbClr val="FF6200"/>
                     </a:solidFill>
                     <a:lnL>
                       <a:noFill/>
@@ -10402,7 +10402,7 @@
                       <a:r>
                         <a:rPr sz="1300" b="1">
                           <a:solidFill>
-                            <a:srgbClr val="1F1F1F"/>
+                            <a:srgbClr val="FFFFFF"/>
                           </a:solidFill>
                           <a:latin typeface="Calibri"/>
                         </a:rPr>
@@ -10412,7 +10412,7 @@
                   </a:txBody>
                   <a:tcPr marL="91440" marR="91440" marT="41148" marB="41148" anchor="ctr">
                     <a:solidFill>
-                      <a:srgbClr val="EC7000"/>
+                      <a:srgbClr val="FF6200"/>
                     </a:solidFill>
                     <a:lnL>
                       <a:noFill/>
@@ -11020,7 +11020,7 @@
                   </a:tcPr>
                 </a:tc>
               </a:tr>
-              <a:tr h="1033271">
+              <a:tr h="283464">
                 <a:tc>
                   <a:txBody>
                     <a:bodyPr wrap="square">
@@ -11093,95 +11093,7 @@
                           </a:solidFill>
                           <a:latin typeface="Calibri"/>
                         </a:rPr>
-                        <a:t>Spread final não</a:t>
-                      </a:r>
-                    </a:p>
-                    <a:p>
-                      <a:pPr algn="ctr">
-                        <a:lnSpc>
-                          <a:spcPct val="100000"/>
-                        </a:lnSpc>
-                        <a:spcBef>
-                          <a:spcPts val="0"/>
-                        </a:spcBef>
-                        <a:spcAft>
-                          <a:spcPts val="0"/>
-                        </a:spcAft>
-                      </a:pPr>
-                      <a:r>
-                        <a:rPr sz="1300" b="0">
-                          <a:solidFill>
-                            <a:srgbClr val="1F1F1F"/>
-                          </a:solidFill>
-                          <a:latin typeface="Calibri"/>
-                        </a:rPr>
-                        <a:t>localizado; taxa e</a:t>
-                      </a:r>
-                    </a:p>
-                    <a:p>
-                      <a:pPr algn="ctr">
-                        <a:lnSpc>
-                          <a:spcPct val="100000"/>
-                        </a:lnSpc>
-                        <a:spcBef>
-                          <a:spcPts val="0"/>
-                        </a:spcBef>
-                        <a:spcAft>
-                          <a:spcPts val="0"/>
-                        </a:spcAft>
-                      </a:pPr>
-                      <a:r>
-                        <a:rPr sz="1300" b="0">
-                          <a:solidFill>
-                            <a:srgbClr val="1F1F1F"/>
-                          </a:solidFill>
-                          <a:latin typeface="Calibri"/>
-                        </a:rPr>
-                        <a:t>benchmark remetidos ao</a:t>
-                      </a:r>
-                    </a:p>
-                    <a:p>
-                      <a:pPr algn="ctr">
-                        <a:lnSpc>
-                          <a:spcPct val="100000"/>
-                        </a:lnSpc>
-                        <a:spcBef>
-                          <a:spcPts val="0"/>
-                        </a:spcBef>
-                        <a:spcAft>
-                          <a:spcPts val="0"/>
-                        </a:spcAft>
-                      </a:pPr>
-                      <a:r>
-                        <a:rPr sz="1300" b="0">
-                          <a:solidFill>
-                            <a:srgbClr val="1F1F1F"/>
-                          </a:solidFill>
-                          <a:latin typeface="Calibri"/>
-                        </a:rPr>
-                        <a:t>apêndice/suplemento de</a:t>
-                      </a:r>
-                    </a:p>
-                    <a:p>
-                      <a:pPr algn="ctr">
-                        <a:lnSpc>
-                          <a:spcPct val="100000"/>
-                        </a:lnSpc>
-                        <a:spcBef>
-                          <a:spcPts val="0"/>
-                        </a:spcBef>
-                        <a:spcAft>
-                          <a:spcPts val="0"/>
-                        </a:spcAft>
-                      </a:pPr>
-                      <a:r>
-                        <a:rPr sz="1300" b="0">
-                          <a:solidFill>
-                            <a:srgbClr val="1F1F1F"/>
-                          </a:solidFill>
-                          <a:latin typeface="Calibri"/>
-                        </a:rPr>
-                        <a:t>cada série.</a:t>
+                        <a:t>-</a:t>
                       </a:r>
                     </a:p>
                   </a:txBody>
@@ -11228,95 +11140,7 @@
                           </a:solidFill>
                           <a:latin typeface="Calibri"/>
                         </a:rPr>
-                        <a:t>Spread final não</a:t>
-                      </a:r>
-                    </a:p>
-                    <a:p>
-                      <a:pPr algn="ctr">
-                        <a:lnSpc>
-                          <a:spcPct val="100000"/>
-                        </a:lnSpc>
-                        <a:spcBef>
-                          <a:spcPts val="0"/>
-                        </a:spcBef>
-                        <a:spcAft>
-                          <a:spcPts val="0"/>
-                        </a:spcAft>
-                      </a:pPr>
-                      <a:r>
-                        <a:rPr sz="1300" b="0">
-                          <a:solidFill>
-                            <a:srgbClr val="1F1F1F"/>
-                          </a:solidFill>
-                          <a:latin typeface="Calibri"/>
-                        </a:rPr>
-                        <a:t>localizado; taxa e</a:t>
-                      </a:r>
-                    </a:p>
-                    <a:p>
-                      <a:pPr algn="ctr">
-                        <a:lnSpc>
-                          <a:spcPct val="100000"/>
-                        </a:lnSpc>
-                        <a:spcBef>
-                          <a:spcPts val="0"/>
-                        </a:spcBef>
-                        <a:spcAft>
-                          <a:spcPts val="0"/>
-                        </a:spcAft>
-                      </a:pPr>
-                      <a:r>
-                        <a:rPr sz="1300" b="0">
-                          <a:solidFill>
-                            <a:srgbClr val="1F1F1F"/>
-                          </a:solidFill>
-                          <a:latin typeface="Calibri"/>
-                        </a:rPr>
-                        <a:t>benchmark remetidos ao</a:t>
-                      </a:r>
-                    </a:p>
-                    <a:p>
-                      <a:pPr algn="ctr">
-                        <a:lnSpc>
-                          <a:spcPct val="100000"/>
-                        </a:lnSpc>
-                        <a:spcBef>
-                          <a:spcPts val="0"/>
-                        </a:spcBef>
-                        <a:spcAft>
-                          <a:spcPts val="0"/>
-                        </a:spcAft>
-                      </a:pPr>
-                      <a:r>
-                        <a:rPr sz="1300" b="0">
-                          <a:solidFill>
-                            <a:srgbClr val="1F1F1F"/>
-                          </a:solidFill>
-                          <a:latin typeface="Calibri"/>
-                        </a:rPr>
-                        <a:t>apêndice/suplemento de</a:t>
-                      </a:r>
-                    </a:p>
-                    <a:p>
-                      <a:pPr algn="ctr">
-                        <a:lnSpc>
-                          <a:spcPct val="100000"/>
-                        </a:lnSpc>
-                        <a:spcBef>
-                          <a:spcPts val="0"/>
-                        </a:spcBef>
-                        <a:spcAft>
-                          <a:spcPts val="0"/>
-                        </a:spcAft>
-                      </a:pPr>
-                      <a:r>
-                        <a:rPr sz="1300" b="0">
-                          <a:solidFill>
-                            <a:srgbClr val="1F1F1F"/>
-                          </a:solidFill>
-                          <a:latin typeface="Calibri"/>
-                        </a:rPr>
-                        <a:t>cada série.</a:t>
+                        <a:t>-</a:t>
                       </a:r>
                     </a:p>
                   </a:txBody>
@@ -11363,95 +11187,7 @@
                           </a:solidFill>
                           <a:latin typeface="Calibri"/>
                         </a:rPr>
-                        <a:t>Spread final não</a:t>
-                      </a:r>
-                    </a:p>
-                    <a:p>
-                      <a:pPr algn="ctr">
-                        <a:lnSpc>
-                          <a:spcPct val="100000"/>
-                        </a:lnSpc>
-                        <a:spcBef>
-                          <a:spcPts val="0"/>
-                        </a:spcBef>
-                        <a:spcAft>
-                          <a:spcPts val="0"/>
-                        </a:spcAft>
-                      </a:pPr>
-                      <a:r>
-                        <a:rPr sz="1300" b="0">
-                          <a:solidFill>
-                            <a:srgbClr val="1F1F1F"/>
-                          </a:solidFill>
-                          <a:latin typeface="Calibri"/>
-                        </a:rPr>
-                        <a:t>localizado; taxa e</a:t>
-                      </a:r>
-                    </a:p>
-                    <a:p>
-                      <a:pPr algn="ctr">
-                        <a:lnSpc>
-                          <a:spcPct val="100000"/>
-                        </a:lnSpc>
-                        <a:spcBef>
-                          <a:spcPts val="0"/>
-                        </a:spcBef>
-                        <a:spcAft>
-                          <a:spcPts val="0"/>
-                        </a:spcAft>
-                      </a:pPr>
-                      <a:r>
-                        <a:rPr sz="1300" b="0">
-                          <a:solidFill>
-                            <a:srgbClr val="1F1F1F"/>
-                          </a:solidFill>
-                          <a:latin typeface="Calibri"/>
-                        </a:rPr>
-                        <a:t>benchmark remetidos ao</a:t>
-                      </a:r>
-                    </a:p>
-                    <a:p>
-                      <a:pPr algn="ctr">
-                        <a:lnSpc>
-                          <a:spcPct val="100000"/>
-                        </a:lnSpc>
-                        <a:spcBef>
-                          <a:spcPts val="0"/>
-                        </a:spcBef>
-                        <a:spcAft>
-                          <a:spcPts val="0"/>
-                        </a:spcAft>
-                      </a:pPr>
-                      <a:r>
-                        <a:rPr sz="1300" b="0">
-                          <a:solidFill>
-                            <a:srgbClr val="1F1F1F"/>
-                          </a:solidFill>
-                          <a:latin typeface="Calibri"/>
-                        </a:rPr>
-                        <a:t>apêndice/suplemento de</a:t>
-                      </a:r>
-                    </a:p>
-                    <a:p>
-                      <a:pPr algn="ctr">
-                        <a:lnSpc>
-                          <a:spcPct val="100000"/>
-                        </a:lnSpc>
-                        <a:spcBef>
-                          <a:spcPts val="0"/>
-                        </a:spcBef>
-                        <a:spcAft>
-                          <a:spcPts val="0"/>
-                        </a:spcAft>
-                      </a:pPr>
-                      <a:r>
-                        <a:rPr sz="1300" b="0">
-                          <a:solidFill>
-                            <a:srgbClr val="1F1F1F"/>
-                          </a:solidFill>
-                          <a:latin typeface="Calibri"/>
-                        </a:rPr>
-                        <a:t>cada série.</a:t>
+                        <a:t>-</a:t>
                       </a:r>
                     </a:p>
                   </a:txBody>
@@ -11498,95 +11234,7 @@
                           </a:solidFill>
                           <a:latin typeface="Calibri"/>
                         </a:rPr>
-                        <a:t>Spread final não</a:t>
-                      </a:r>
-                    </a:p>
-                    <a:p>
-                      <a:pPr algn="ctr">
-                        <a:lnSpc>
-                          <a:spcPct val="100000"/>
-                        </a:lnSpc>
-                        <a:spcBef>
-                          <a:spcPts val="0"/>
-                        </a:spcBef>
-                        <a:spcAft>
-                          <a:spcPts val="0"/>
-                        </a:spcAft>
-                      </a:pPr>
-                      <a:r>
-                        <a:rPr sz="1300" b="0">
-                          <a:solidFill>
-                            <a:srgbClr val="1F1F1F"/>
-                          </a:solidFill>
-                          <a:latin typeface="Calibri"/>
-                        </a:rPr>
-                        <a:t>localizado; taxa e</a:t>
-                      </a:r>
-                    </a:p>
-                    <a:p>
-                      <a:pPr algn="ctr">
-                        <a:lnSpc>
-                          <a:spcPct val="100000"/>
-                        </a:lnSpc>
-                        <a:spcBef>
-                          <a:spcPts val="0"/>
-                        </a:spcBef>
-                        <a:spcAft>
-                          <a:spcPts val="0"/>
-                        </a:spcAft>
-                      </a:pPr>
-                      <a:r>
-                        <a:rPr sz="1300" b="0">
-                          <a:solidFill>
-                            <a:srgbClr val="1F1F1F"/>
-                          </a:solidFill>
-                          <a:latin typeface="Calibri"/>
-                        </a:rPr>
-                        <a:t>benchmark remetidos ao</a:t>
-                      </a:r>
-                    </a:p>
-                    <a:p>
-                      <a:pPr algn="ctr">
-                        <a:lnSpc>
-                          <a:spcPct val="100000"/>
-                        </a:lnSpc>
-                        <a:spcBef>
-                          <a:spcPts val="0"/>
-                        </a:spcBef>
-                        <a:spcAft>
-                          <a:spcPts val="0"/>
-                        </a:spcAft>
-                      </a:pPr>
-                      <a:r>
-                        <a:rPr sz="1300" b="0">
-                          <a:solidFill>
-                            <a:srgbClr val="1F1F1F"/>
-                          </a:solidFill>
-                          <a:latin typeface="Calibri"/>
-                        </a:rPr>
-                        <a:t>apêndice/suplemento de</a:t>
-                      </a:r>
-                    </a:p>
-                    <a:p>
-                      <a:pPr algn="ctr">
-                        <a:lnSpc>
-                          <a:spcPct val="100000"/>
-                        </a:lnSpc>
-                        <a:spcBef>
-                          <a:spcPts val="0"/>
-                        </a:spcBef>
-                        <a:spcAft>
-                          <a:spcPts val="0"/>
-                        </a:spcAft>
-                      </a:pPr>
-                      <a:r>
-                        <a:rPr sz="1300" b="0">
-                          <a:solidFill>
-                            <a:srgbClr val="1F1F1F"/>
-                          </a:solidFill>
-                          <a:latin typeface="Calibri"/>
-                        </a:rPr>
-                        <a:t>cada série.</a:t>
+                        <a:t>-</a:t>
                       </a:r>
                     </a:p>
                   </a:txBody>
@@ -11609,7 +11257,7 @@
                   </a:tcPr>
                 </a:tc>
               </a:tr>
-              <a:tr h="1220724">
+              <a:tr h="283464">
                 <a:tc>
                   <a:txBody>
                     <a:bodyPr wrap="square">
@@ -11682,117 +11330,7 @@
                           </a:solidFill>
                           <a:latin typeface="Calibri"/>
                         </a:rPr>
-                        <a:t>Volume</a:t>
-                      </a:r>
-                    </a:p>
-                    <a:p>
-                      <a:pPr algn="ctr">
-                        <a:lnSpc>
-                          <a:spcPct val="100000"/>
-                        </a:lnSpc>
-                        <a:spcBef>
-                          <a:spcPts val="0"/>
-                        </a:spcBef>
-                        <a:spcAft>
-                          <a:spcPts val="0"/>
-                        </a:spcAft>
-                      </a:pPr>
-                      <a:r>
-                        <a:rPr sz="1300" b="0">
-                          <a:solidFill>
-                            <a:srgbClr val="1F1F1F"/>
-                          </a:solidFill>
-                          <a:latin typeface="Calibri"/>
-                        </a:rPr>
-                        <a:t>aprovado/distribuído</a:t>
-                      </a:r>
-                    </a:p>
-                    <a:p>
-                      <a:pPr algn="ctr">
-                        <a:lnSpc>
-                          <a:spcPct val="100000"/>
-                        </a:lnSpc>
-                        <a:spcBef>
-                          <a:spcPts val="0"/>
-                        </a:spcBef>
-                        <a:spcAft>
-                          <a:spcPts val="0"/>
-                        </a:spcAft>
-                      </a:pPr>
-                      <a:r>
-                        <a:rPr sz="1300" b="0">
-                          <a:solidFill>
-                            <a:srgbClr val="1F1F1F"/>
-                          </a:solidFill>
-                          <a:latin typeface="Calibri"/>
-                        </a:rPr>
-                        <a:t>por série não</a:t>
-                      </a:r>
-                    </a:p>
-                    <a:p>
-                      <a:pPr algn="ctr">
-                        <a:lnSpc>
-                          <a:spcPct val="100000"/>
-                        </a:lnSpc>
-                        <a:spcBef>
-                          <a:spcPts val="0"/>
-                        </a:spcBef>
-                        <a:spcAft>
-                          <a:spcPts val="0"/>
-                        </a:spcAft>
-                      </a:pPr>
-                      <a:r>
-                        <a:rPr sz="1300" b="0">
-                          <a:solidFill>
-                            <a:srgbClr val="1F1F1F"/>
-                          </a:solidFill>
-                          <a:latin typeface="Calibri"/>
-                        </a:rPr>
-                        <a:t>confirmado pelos</a:t>
-                      </a:r>
-                    </a:p>
-                    <a:p>
-                      <a:pPr algn="ctr">
-                        <a:lnSpc>
-                          <a:spcPct val="100000"/>
-                        </a:lnSpc>
-                        <a:spcBef>
-                          <a:spcPts val="0"/>
-                        </a:spcBef>
-                        <a:spcAft>
-                          <a:spcPts val="0"/>
-                        </a:spcAft>
-                      </a:pPr>
-                      <a:r>
-                        <a:rPr sz="1300" b="0">
-                          <a:solidFill>
-                            <a:srgbClr val="1F1F1F"/>
-                          </a:solidFill>
-                          <a:latin typeface="Calibri"/>
-                        </a:rPr>
-                        <a:t>modelos; VNU depende do</a:t>
-                      </a:r>
-                    </a:p>
-                    <a:p>
-                      <a:pPr algn="ctr">
-                        <a:lnSpc>
-                          <a:spcPct val="100000"/>
-                        </a:lnSpc>
-                        <a:spcBef>
-                          <a:spcPts val="0"/>
-                        </a:spcBef>
-                        <a:spcAft>
-                          <a:spcPts val="0"/>
-                        </a:spcAft>
-                      </a:pPr>
-                      <a:r>
-                        <a:rPr sz="1300" b="0">
-                          <a:solidFill>
-                            <a:srgbClr val="1F1F1F"/>
-                          </a:solidFill>
-                          <a:latin typeface="Calibri"/>
-                        </a:rPr>
-                        <a:t>suplemento preenchido.</a:t>
+                        <a:t>-</a:t>
                       </a:r>
                     </a:p>
                   </a:txBody>
@@ -11839,117 +11377,7 @@
                           </a:solidFill>
                           <a:latin typeface="Calibri"/>
                         </a:rPr>
-                        <a:t>Volume</a:t>
-                      </a:r>
-                    </a:p>
-                    <a:p>
-                      <a:pPr algn="ctr">
-                        <a:lnSpc>
-                          <a:spcPct val="100000"/>
-                        </a:lnSpc>
-                        <a:spcBef>
-                          <a:spcPts val="0"/>
-                        </a:spcBef>
-                        <a:spcAft>
-                          <a:spcPts val="0"/>
-                        </a:spcAft>
-                      </a:pPr>
-                      <a:r>
-                        <a:rPr sz="1300" b="0">
-                          <a:solidFill>
-                            <a:srgbClr val="1F1F1F"/>
-                          </a:solidFill>
-                          <a:latin typeface="Calibri"/>
-                        </a:rPr>
-                        <a:t>aprovado/distribuído</a:t>
-                      </a:r>
-                    </a:p>
-                    <a:p>
-                      <a:pPr algn="ctr">
-                        <a:lnSpc>
-                          <a:spcPct val="100000"/>
-                        </a:lnSpc>
-                        <a:spcBef>
-                          <a:spcPts val="0"/>
-                        </a:spcBef>
-                        <a:spcAft>
-                          <a:spcPts val="0"/>
-                        </a:spcAft>
-                      </a:pPr>
-                      <a:r>
-                        <a:rPr sz="1300" b="0">
-                          <a:solidFill>
-                            <a:srgbClr val="1F1F1F"/>
-                          </a:solidFill>
-                          <a:latin typeface="Calibri"/>
-                        </a:rPr>
-                        <a:t>por série não</a:t>
-                      </a:r>
-                    </a:p>
-                    <a:p>
-                      <a:pPr algn="ctr">
-                        <a:lnSpc>
-                          <a:spcPct val="100000"/>
-                        </a:lnSpc>
-                        <a:spcBef>
-                          <a:spcPts val="0"/>
-                        </a:spcBef>
-                        <a:spcAft>
-                          <a:spcPts val="0"/>
-                        </a:spcAft>
-                      </a:pPr>
-                      <a:r>
-                        <a:rPr sz="1300" b="0">
-                          <a:solidFill>
-                            <a:srgbClr val="1F1F1F"/>
-                          </a:solidFill>
-                          <a:latin typeface="Calibri"/>
-                        </a:rPr>
-                        <a:t>confirmado pelos</a:t>
-                      </a:r>
-                    </a:p>
-                    <a:p>
-                      <a:pPr algn="ctr">
-                        <a:lnSpc>
-                          <a:spcPct val="100000"/>
-                        </a:lnSpc>
-                        <a:spcBef>
-                          <a:spcPts val="0"/>
-                        </a:spcBef>
-                        <a:spcAft>
-                          <a:spcPts val="0"/>
-                        </a:spcAft>
-                      </a:pPr>
-                      <a:r>
-                        <a:rPr sz="1300" b="0">
-                          <a:solidFill>
-                            <a:srgbClr val="1F1F1F"/>
-                          </a:solidFill>
-                          <a:latin typeface="Calibri"/>
-                        </a:rPr>
-                        <a:t>modelos; VNU depende do</a:t>
-                      </a:r>
-                    </a:p>
-                    <a:p>
-                      <a:pPr algn="ctr">
-                        <a:lnSpc>
-                          <a:spcPct val="100000"/>
-                        </a:lnSpc>
-                        <a:spcBef>
-                          <a:spcPts val="0"/>
-                        </a:spcBef>
-                        <a:spcAft>
-                          <a:spcPts val="0"/>
-                        </a:spcAft>
-                      </a:pPr>
-                      <a:r>
-                        <a:rPr sz="1300" b="0">
-                          <a:solidFill>
-                            <a:srgbClr val="1F1F1F"/>
-                          </a:solidFill>
-                          <a:latin typeface="Calibri"/>
-                        </a:rPr>
-                        <a:t>suplemento preenchido.</a:t>
+                        <a:t>-</a:t>
                       </a:r>
                     </a:p>
                   </a:txBody>
@@ -11996,117 +11424,7 @@
                           </a:solidFill>
                           <a:latin typeface="Calibri"/>
                         </a:rPr>
-                        <a:t>Volume</a:t>
-                      </a:r>
-                    </a:p>
-                    <a:p>
-                      <a:pPr algn="ctr">
-                        <a:lnSpc>
-                          <a:spcPct val="100000"/>
-                        </a:lnSpc>
-                        <a:spcBef>
-                          <a:spcPts val="0"/>
-                        </a:spcBef>
-                        <a:spcAft>
-                          <a:spcPts val="0"/>
-                        </a:spcAft>
-                      </a:pPr>
-                      <a:r>
-                        <a:rPr sz="1300" b="0">
-                          <a:solidFill>
-                            <a:srgbClr val="1F1F1F"/>
-                          </a:solidFill>
-                          <a:latin typeface="Calibri"/>
-                        </a:rPr>
-                        <a:t>aprovado/distribuído</a:t>
-                      </a:r>
-                    </a:p>
-                    <a:p>
-                      <a:pPr algn="ctr">
-                        <a:lnSpc>
-                          <a:spcPct val="100000"/>
-                        </a:lnSpc>
-                        <a:spcBef>
-                          <a:spcPts val="0"/>
-                        </a:spcBef>
-                        <a:spcAft>
-                          <a:spcPts val="0"/>
-                        </a:spcAft>
-                      </a:pPr>
-                      <a:r>
-                        <a:rPr sz="1300" b="0">
-                          <a:solidFill>
-                            <a:srgbClr val="1F1F1F"/>
-                          </a:solidFill>
-                          <a:latin typeface="Calibri"/>
-                        </a:rPr>
-                        <a:t>por série não</a:t>
-                      </a:r>
-                    </a:p>
-                    <a:p>
-                      <a:pPr algn="ctr">
-                        <a:lnSpc>
-                          <a:spcPct val="100000"/>
-                        </a:lnSpc>
-                        <a:spcBef>
-                          <a:spcPts val="0"/>
-                        </a:spcBef>
-                        <a:spcAft>
-                          <a:spcPts val="0"/>
-                        </a:spcAft>
-                      </a:pPr>
-                      <a:r>
-                        <a:rPr sz="1300" b="0">
-                          <a:solidFill>
-                            <a:srgbClr val="1F1F1F"/>
-                          </a:solidFill>
-                          <a:latin typeface="Calibri"/>
-                        </a:rPr>
-                        <a:t>confirmado pelos</a:t>
-                      </a:r>
-                    </a:p>
-                    <a:p>
-                      <a:pPr algn="ctr">
-                        <a:lnSpc>
-                          <a:spcPct val="100000"/>
-                        </a:lnSpc>
-                        <a:spcBef>
-                          <a:spcPts val="0"/>
-                        </a:spcBef>
-                        <a:spcAft>
-                          <a:spcPts val="0"/>
-                        </a:spcAft>
-                      </a:pPr>
-                      <a:r>
-                        <a:rPr sz="1300" b="0">
-                          <a:solidFill>
-                            <a:srgbClr val="1F1F1F"/>
-                          </a:solidFill>
-                          <a:latin typeface="Calibri"/>
-                        </a:rPr>
-                        <a:t>modelos; VNU depende do</a:t>
-                      </a:r>
-                    </a:p>
-                    <a:p>
-                      <a:pPr algn="ctr">
-                        <a:lnSpc>
-                          <a:spcPct val="100000"/>
-                        </a:lnSpc>
-                        <a:spcBef>
-                          <a:spcPts val="0"/>
-                        </a:spcBef>
-                        <a:spcAft>
-                          <a:spcPts val="0"/>
-                        </a:spcAft>
-                      </a:pPr>
-                      <a:r>
-                        <a:rPr sz="1300" b="0">
-                          <a:solidFill>
-                            <a:srgbClr val="1F1F1F"/>
-                          </a:solidFill>
-                          <a:latin typeface="Calibri"/>
-                        </a:rPr>
-                        <a:t>suplemento preenchido.</a:t>
+                        <a:t>-</a:t>
                       </a:r>
                     </a:p>
                   </a:txBody>
@@ -12153,117 +11471,7 @@
                           </a:solidFill>
                           <a:latin typeface="Calibri"/>
                         </a:rPr>
-                        <a:t>Volume</a:t>
-                      </a:r>
-                    </a:p>
-                    <a:p>
-                      <a:pPr algn="ctr">
-                        <a:lnSpc>
-                          <a:spcPct val="100000"/>
-                        </a:lnSpc>
-                        <a:spcBef>
-                          <a:spcPts val="0"/>
-                        </a:spcBef>
-                        <a:spcAft>
-                          <a:spcPts val="0"/>
-                        </a:spcAft>
-                      </a:pPr>
-                      <a:r>
-                        <a:rPr sz="1300" b="0">
-                          <a:solidFill>
-                            <a:srgbClr val="1F1F1F"/>
-                          </a:solidFill>
-                          <a:latin typeface="Calibri"/>
-                        </a:rPr>
-                        <a:t>aprovado/distribuído</a:t>
-                      </a:r>
-                    </a:p>
-                    <a:p>
-                      <a:pPr algn="ctr">
-                        <a:lnSpc>
-                          <a:spcPct val="100000"/>
-                        </a:lnSpc>
-                        <a:spcBef>
-                          <a:spcPts val="0"/>
-                        </a:spcBef>
-                        <a:spcAft>
-                          <a:spcPts val="0"/>
-                        </a:spcAft>
-                      </a:pPr>
-                      <a:r>
-                        <a:rPr sz="1300" b="0">
-                          <a:solidFill>
-                            <a:srgbClr val="1F1F1F"/>
-                          </a:solidFill>
-                          <a:latin typeface="Calibri"/>
-                        </a:rPr>
-                        <a:t>por série não</a:t>
-                      </a:r>
-                    </a:p>
-                    <a:p>
-                      <a:pPr algn="ctr">
-                        <a:lnSpc>
-                          <a:spcPct val="100000"/>
-                        </a:lnSpc>
-                        <a:spcBef>
-                          <a:spcPts val="0"/>
-                        </a:spcBef>
-                        <a:spcAft>
-                          <a:spcPts val="0"/>
-                        </a:spcAft>
-                      </a:pPr>
-                      <a:r>
-                        <a:rPr sz="1300" b="0">
-                          <a:solidFill>
-                            <a:srgbClr val="1F1F1F"/>
-                          </a:solidFill>
-                          <a:latin typeface="Calibri"/>
-                        </a:rPr>
-                        <a:t>confirmado pelos</a:t>
-                      </a:r>
-                    </a:p>
-                    <a:p>
-                      <a:pPr algn="ctr">
-                        <a:lnSpc>
-                          <a:spcPct val="100000"/>
-                        </a:lnSpc>
-                        <a:spcBef>
-                          <a:spcPts val="0"/>
-                        </a:spcBef>
-                        <a:spcAft>
-                          <a:spcPts val="0"/>
-                        </a:spcAft>
-                      </a:pPr>
-                      <a:r>
-                        <a:rPr sz="1300" b="0">
-                          <a:solidFill>
-                            <a:srgbClr val="1F1F1F"/>
-                          </a:solidFill>
-                          <a:latin typeface="Calibri"/>
-                        </a:rPr>
-                        <a:t>modelos; VNU depende do</a:t>
-                      </a:r>
-                    </a:p>
-                    <a:p>
-                      <a:pPr algn="ctr">
-                        <a:lnSpc>
-                          <a:spcPct val="100000"/>
-                        </a:lnSpc>
-                        <a:spcBef>
-                          <a:spcPts val="0"/>
-                        </a:spcBef>
-                        <a:spcAft>
-                          <a:spcPts val="0"/>
-                        </a:spcAft>
-                      </a:pPr>
-                      <a:r>
-                        <a:rPr sz="1300" b="0">
-                          <a:solidFill>
-                            <a:srgbClr val="1F1F1F"/>
-                          </a:solidFill>
-                          <a:latin typeface="Calibri"/>
-                        </a:rPr>
-                        <a:t>suplemento preenchido.</a:t>
+                        <a:t>-</a:t>
                       </a:r>
                     </a:p>
                   </a:txBody>
@@ -12286,7 +11494,7 @@
                   </a:tcPr>
                 </a:tc>
               </a:tr>
-              <a:tr h="1220724">
+              <a:tr h="1033271">
                 <a:tc>
                   <a:txBody>
                     <a:bodyPr wrap="square">
@@ -12449,29 +11657,7 @@
                           </a:solidFill>
                           <a:latin typeface="Calibri"/>
                         </a:rPr>
-                        <a:t>anúncios; encerramentos</a:t>
-                      </a:r>
-                    </a:p>
-                    <a:p>
-                      <a:pPr algn="ctr">
-                        <a:lnSpc>
-                          <a:spcPct val="100000"/>
-                        </a:lnSpc>
-                        <a:spcBef>
-                          <a:spcPts val="0"/>
-                        </a:spcBef>
-                        <a:spcAft>
-                          <a:spcPts val="0"/>
-                        </a:spcAft>
-                      </a:pPr>
-                      <a:r>
-                        <a:rPr sz="1300" b="0">
-                          <a:solidFill>
-                            <a:srgbClr val="1F1F1F"/>
-                          </a:solidFill>
-                          <a:latin typeface="Calibri"/>
-                        </a:rPr>
-                        <a:t>não confirmados.</a:t>
+                        <a:t>anúncios</a:t>
                       </a:r>
                     </a:p>
                   </a:txBody>
@@ -12608,29 +11794,7 @@
                           </a:solidFill>
                           <a:latin typeface="Calibri"/>
                         </a:rPr>
-                        <a:t>anúncios; encerramentos</a:t>
-                      </a:r>
-                    </a:p>
-                    <a:p>
-                      <a:pPr algn="ctr">
-                        <a:lnSpc>
-                          <a:spcPct val="100000"/>
-                        </a:lnSpc>
-                        <a:spcBef>
-                          <a:spcPts val="0"/>
-                        </a:spcBef>
-                        <a:spcAft>
-                          <a:spcPts val="0"/>
-                        </a:spcAft>
-                      </a:pPr>
-                      <a:r>
-                        <a:rPr sz="1300" b="0">
-                          <a:solidFill>
-                            <a:srgbClr val="1F1F1F"/>
-                          </a:solidFill>
-                          <a:latin typeface="Calibri"/>
-                        </a:rPr>
-                        <a:t>não confirmados.</a:t>
+                        <a:t>anúncios</a:t>
                       </a:r>
                     </a:p>
                   </a:txBody>
@@ -12767,29 +11931,7 @@
                           </a:solidFill>
                           <a:latin typeface="Calibri"/>
                         </a:rPr>
-                        <a:t>anúncios; encerramentos</a:t>
-                      </a:r>
-                    </a:p>
-                    <a:p>
-                      <a:pPr algn="ctr">
-                        <a:lnSpc>
-                          <a:spcPct val="100000"/>
-                        </a:lnSpc>
-                        <a:spcBef>
-                          <a:spcPts val="0"/>
-                        </a:spcBef>
-                        <a:spcAft>
-                          <a:spcPts val="0"/>
-                        </a:spcAft>
-                      </a:pPr>
-                      <a:r>
-                        <a:rPr sz="1300" b="0">
-                          <a:solidFill>
-                            <a:srgbClr val="1F1F1F"/>
-                          </a:solidFill>
-                          <a:latin typeface="Calibri"/>
-                        </a:rPr>
-                        <a:t>não confirmados.</a:t>
+                        <a:t>anúncios</a:t>
                       </a:r>
                     </a:p>
                   </a:txBody>
@@ -12926,29 +12068,7 @@
                           </a:solidFill>
                           <a:latin typeface="Calibri"/>
                         </a:rPr>
-                        <a:t>anúncios; encerramentos</a:t>
-                      </a:r>
-                    </a:p>
-                    <a:p>
-                      <a:pPr algn="ctr">
-                        <a:lnSpc>
-                          <a:spcPct val="100000"/>
-                        </a:lnSpc>
-                        <a:spcBef>
-                          <a:spcPts val="0"/>
-                        </a:spcBef>
-                        <a:spcAft>
-                          <a:spcPts val="0"/>
-                        </a:spcAft>
-                      </a:pPr>
-                      <a:r>
-                        <a:rPr sz="1300" b="0">
-                          <a:solidFill>
-                            <a:srgbClr val="1F1F1F"/>
-                          </a:solidFill>
-                          <a:latin typeface="Calibri"/>
-                        </a:rPr>
-                        <a:t>não confirmados.</a:t>
+                        <a:t>anúncios</a:t>
                       </a:r>
                     </a:p>
                   </a:txBody>
@@ -13118,7 +12238,7 @@
         </p:nvGraphicFramePr>
         <p:xfrm>
           <a:off x="438912" y="932688"/>
-          <a:ext cx="11313870" cy="3776468"/>
+          <a:ext cx="11313870" cy="2651759"/>
         </p:xfrm>
         <a:graphic>
           <a:graphicData uri="http://schemas.openxmlformats.org/drawingml/2006/table">
@@ -13154,7 +12274,7 @@
                       <a:r>
                         <a:rPr sz="1300" b="1">
                           <a:solidFill>
-                            <a:srgbClr val="1F1F1F"/>
+                            <a:srgbClr val="FFFFFF"/>
                           </a:solidFill>
                           <a:latin typeface="Calibri"/>
                         </a:rPr>
@@ -13164,7 +12284,7 @@
                   </a:txBody>
                   <a:tcPr marL="91440" marR="91440" marT="41148" marB="41148" anchor="ctr">
                     <a:solidFill>
-                      <a:srgbClr val="EC7000"/>
+                      <a:srgbClr val="FF6200"/>
                     </a:solidFill>
                     <a:lnL>
                       <a:noFill/>
@@ -13203,7 +12323,7 @@
                       <a:r>
                         <a:rPr sz="1300" b="1">
                           <a:solidFill>
-                            <a:srgbClr val="1F1F1F"/>
+                            <a:srgbClr val="FFFFFF"/>
                           </a:solidFill>
                           <a:latin typeface="Calibri"/>
                         </a:rPr>
@@ -13213,7 +12333,7 @@
                   </a:txBody>
                   <a:tcPr marL="91440" marR="91440" marT="41148" marB="41148" anchor="ctr">
                     <a:solidFill>
-                      <a:srgbClr val="EC7000"/>
+                      <a:srgbClr val="FF6200"/>
                     </a:solidFill>
                     <a:lnL>
                       <a:noFill/>
@@ -13252,7 +12372,7 @@
                       <a:r>
                         <a:rPr sz="1300" b="1">
                           <a:solidFill>
-                            <a:srgbClr val="1F1F1F"/>
+                            <a:srgbClr val="FFFFFF"/>
                           </a:solidFill>
                           <a:latin typeface="Calibri"/>
                         </a:rPr>
@@ -13262,7 +12382,7 @@
                   </a:txBody>
                   <a:tcPr marL="91440" marR="91440" marT="41148" marB="41148" anchor="ctr">
                     <a:solidFill>
-                      <a:srgbClr val="EC7000"/>
+                      <a:srgbClr val="FF6200"/>
                     </a:solidFill>
                     <a:lnL>
                       <a:noFill/>
@@ -13301,7 +12421,7 @@
                       <a:r>
                         <a:rPr sz="1300" b="1">
                           <a:solidFill>
-                            <a:srgbClr val="1F1F1F"/>
+                            <a:srgbClr val="FFFFFF"/>
                           </a:solidFill>
                           <a:latin typeface="Calibri"/>
                         </a:rPr>
@@ -13311,7 +12431,7 @@
                   </a:txBody>
                   <a:tcPr marL="91440" marR="91440" marT="41148" marB="41148" anchor="ctr">
                     <a:solidFill>
-                      <a:srgbClr val="EC7000"/>
+                      <a:srgbClr val="FF6200"/>
                     </a:solidFill>
                     <a:lnL>
                       <a:noFill/>
@@ -13718,7 +12838,7 @@
                   </a:tcPr>
                 </a:tc>
               </a:tr>
-              <a:tr h="845819">
+              <a:tr h="470916">
                 <a:tc>
                   <a:txBody>
                     <a:bodyPr wrap="square">
@@ -13791,73 +12911,7 @@
                           </a:solidFill>
                           <a:latin typeface="Calibri"/>
                         </a:rPr>
-                        <a:t>Spread final não localizado;</a:t>
-                      </a:r>
-                    </a:p>
-                    <a:p>
-                      <a:pPr algn="ctr">
-                        <a:lnSpc>
-                          <a:spcPct val="100000"/>
-                        </a:lnSpc>
-                        <a:spcBef>
-                          <a:spcPts val="0"/>
-                        </a:spcBef>
-                        <a:spcAft>
-                          <a:spcPts val="0"/>
-                        </a:spcAft>
-                      </a:pPr>
-                      <a:r>
-                        <a:rPr sz="1300" b="0">
-                          <a:solidFill>
-                            <a:srgbClr val="1F1F1F"/>
-                          </a:solidFill>
-                          <a:latin typeface="Calibri"/>
-                        </a:rPr>
-                        <a:t>taxa e benchmark remetidos ao</a:t>
-                      </a:r>
-                    </a:p>
-                    <a:p>
-                      <a:pPr algn="ctr">
-                        <a:lnSpc>
-                          <a:spcPct val="100000"/>
-                        </a:lnSpc>
-                        <a:spcBef>
-                          <a:spcPts val="0"/>
-                        </a:spcBef>
-                        <a:spcAft>
-                          <a:spcPts val="0"/>
-                        </a:spcAft>
-                      </a:pPr>
-                      <a:r>
-                        <a:rPr sz="1300" b="0">
-                          <a:solidFill>
-                            <a:srgbClr val="1F1F1F"/>
-                          </a:solidFill>
-                          <a:latin typeface="Calibri"/>
-                        </a:rPr>
-                        <a:t>apêndice/suplemento de cada</a:t>
-                      </a:r>
-                    </a:p>
-                    <a:p>
-                      <a:pPr algn="ctr">
-                        <a:lnSpc>
-                          <a:spcPct val="100000"/>
-                        </a:lnSpc>
-                        <a:spcBef>
-                          <a:spcPts val="0"/>
-                        </a:spcBef>
-                        <a:spcAft>
-                          <a:spcPts val="0"/>
-                        </a:spcAft>
-                      </a:pPr>
-                      <a:r>
-                        <a:rPr sz="1300" b="0">
-                          <a:solidFill>
-                            <a:srgbClr val="1F1F1F"/>
-                          </a:solidFill>
-                          <a:latin typeface="Calibri"/>
-                        </a:rPr>
-                        <a:t>série.</a:t>
+                        <a:t>-</a:t>
                       </a:r>
                     </a:p>
                   </a:txBody>
@@ -13904,73 +12958,7 @@
                           </a:solidFill>
                           <a:latin typeface="Calibri"/>
                         </a:rPr>
-                        <a:t>Spread final não localizado;</a:t>
-                      </a:r>
-                    </a:p>
-                    <a:p>
-                      <a:pPr algn="ctr">
-                        <a:lnSpc>
-                          <a:spcPct val="100000"/>
-                        </a:lnSpc>
-                        <a:spcBef>
-                          <a:spcPts val="0"/>
-                        </a:spcBef>
-                        <a:spcAft>
-                          <a:spcPts val="0"/>
-                        </a:spcAft>
-                      </a:pPr>
-                      <a:r>
-                        <a:rPr sz="1300" b="0">
-                          <a:solidFill>
-                            <a:srgbClr val="1F1F1F"/>
-                          </a:solidFill>
-                          <a:latin typeface="Calibri"/>
-                        </a:rPr>
-                        <a:t>taxa e benchmark remetidos ao</a:t>
-                      </a:r>
-                    </a:p>
-                    <a:p>
-                      <a:pPr algn="ctr">
-                        <a:lnSpc>
-                          <a:spcPct val="100000"/>
-                        </a:lnSpc>
-                        <a:spcBef>
-                          <a:spcPts val="0"/>
-                        </a:spcBef>
-                        <a:spcAft>
-                          <a:spcPts val="0"/>
-                        </a:spcAft>
-                      </a:pPr>
-                      <a:r>
-                        <a:rPr sz="1300" b="0">
-                          <a:solidFill>
-                            <a:srgbClr val="1F1F1F"/>
-                          </a:solidFill>
-                          <a:latin typeface="Calibri"/>
-                        </a:rPr>
-                        <a:t>apêndice/suplemento de cada</a:t>
-                      </a:r>
-                    </a:p>
-                    <a:p>
-                      <a:pPr algn="ctr">
-                        <a:lnSpc>
-                          <a:spcPct val="100000"/>
-                        </a:lnSpc>
-                        <a:spcBef>
-                          <a:spcPts val="0"/>
-                        </a:spcBef>
-                        <a:spcAft>
-                          <a:spcPts val="0"/>
-                        </a:spcAft>
-                      </a:pPr>
-                      <a:r>
-                        <a:rPr sz="1300" b="0">
-                          <a:solidFill>
-                            <a:srgbClr val="1F1F1F"/>
-                          </a:solidFill>
-                          <a:latin typeface="Calibri"/>
-                        </a:rPr>
-                        <a:t>série.</a:t>
+                        <a:t>-</a:t>
                       </a:r>
                     </a:p>
                   </a:txBody>
@@ -14039,29 +13027,7 @@
                           </a:solidFill>
                           <a:latin typeface="Calibri"/>
                         </a:rPr>
-                        <a:t>cita DI + 6,65%; spread atual</a:t>
-                      </a:r>
-                    </a:p>
-                    <a:p>
-                      <a:pPr algn="ctr">
-                        <a:lnSpc>
-                          <a:spcPct val="100000"/>
-                        </a:lnSpc>
-                        <a:spcBef>
-                          <a:spcPts val="0"/>
-                        </a:spcBef>
-                        <a:spcAft>
-                          <a:spcPts val="0"/>
-                        </a:spcAft>
-                      </a:pPr>
-                      <a:r>
-                        <a:rPr sz="1300" b="0">
-                          <a:solidFill>
-                            <a:srgbClr val="1F1F1F"/>
-                          </a:solidFill>
-                          <a:latin typeface="Calibri"/>
-                        </a:rPr>
-                        <a:t>por série não confirmado.</a:t>
+                        <a:t>cita DI + 6,65%</a:t>
                       </a:r>
                     </a:p>
                   </a:txBody>
@@ -14084,7 +13050,7 @@
                   </a:tcPr>
                 </a:tc>
               </a:tr>
-              <a:tr h="845819">
+              <a:tr h="283464">
                 <a:tc>
                   <a:txBody>
                     <a:bodyPr wrap="square">
@@ -14157,73 +13123,7 @@
                           </a:solidFill>
                           <a:latin typeface="Calibri"/>
                         </a:rPr>
-                        <a:t>Volume aprovado/distribuído por</a:t>
-                      </a:r>
-                    </a:p>
-                    <a:p>
-                      <a:pPr algn="ctr">
-                        <a:lnSpc>
-                          <a:spcPct val="100000"/>
-                        </a:lnSpc>
-                        <a:spcBef>
-                          <a:spcPts val="0"/>
-                        </a:spcBef>
-                        <a:spcAft>
-                          <a:spcPts val="0"/>
-                        </a:spcAft>
-                      </a:pPr>
-                      <a:r>
-                        <a:rPr sz="1300" b="0">
-                          <a:solidFill>
-                            <a:srgbClr val="1F1F1F"/>
-                          </a:solidFill>
-                          <a:latin typeface="Calibri"/>
-                        </a:rPr>
-                        <a:t>série não confirmado pelos</a:t>
-                      </a:r>
-                    </a:p>
-                    <a:p>
-                      <a:pPr algn="ctr">
-                        <a:lnSpc>
-                          <a:spcPct val="100000"/>
-                        </a:lnSpc>
-                        <a:spcBef>
-                          <a:spcPts val="0"/>
-                        </a:spcBef>
-                        <a:spcAft>
-                          <a:spcPts val="0"/>
-                        </a:spcAft>
-                      </a:pPr>
-                      <a:r>
-                        <a:rPr sz="1300" b="0">
-                          <a:solidFill>
-                            <a:srgbClr val="1F1F1F"/>
-                          </a:solidFill>
-                          <a:latin typeface="Calibri"/>
-                        </a:rPr>
-                        <a:t>modelos; VNU depende do</a:t>
-                      </a:r>
-                    </a:p>
-                    <a:p>
-                      <a:pPr algn="ctr">
-                        <a:lnSpc>
-                          <a:spcPct val="100000"/>
-                        </a:lnSpc>
-                        <a:spcBef>
-                          <a:spcPts val="0"/>
-                        </a:spcBef>
-                        <a:spcAft>
-                          <a:spcPts val="0"/>
-                        </a:spcAft>
-                      </a:pPr>
-                      <a:r>
-                        <a:rPr sz="1300" b="0">
-                          <a:solidFill>
-                            <a:srgbClr val="1F1F1F"/>
-                          </a:solidFill>
-                          <a:latin typeface="Calibri"/>
-                        </a:rPr>
-                        <a:t>suplemento preenchido.</a:t>
+                        <a:t>-</a:t>
                       </a:r>
                     </a:p>
                   </a:txBody>
@@ -14270,73 +13170,7 @@
                           </a:solidFill>
                           <a:latin typeface="Calibri"/>
                         </a:rPr>
-                        <a:t>Volume aprovado/distribuído por</a:t>
-                      </a:r>
-                    </a:p>
-                    <a:p>
-                      <a:pPr algn="ctr">
-                        <a:lnSpc>
-                          <a:spcPct val="100000"/>
-                        </a:lnSpc>
-                        <a:spcBef>
-                          <a:spcPts val="0"/>
-                        </a:spcBef>
-                        <a:spcAft>
-                          <a:spcPts val="0"/>
-                        </a:spcAft>
-                      </a:pPr>
-                      <a:r>
-                        <a:rPr sz="1300" b="0">
-                          <a:solidFill>
-                            <a:srgbClr val="1F1F1F"/>
-                          </a:solidFill>
-                          <a:latin typeface="Calibri"/>
-                        </a:rPr>
-                        <a:t>série não confirmado pelos</a:t>
-                      </a:r>
-                    </a:p>
-                    <a:p>
-                      <a:pPr algn="ctr">
-                        <a:lnSpc>
-                          <a:spcPct val="100000"/>
-                        </a:lnSpc>
-                        <a:spcBef>
-                          <a:spcPts val="0"/>
-                        </a:spcBef>
-                        <a:spcAft>
-                          <a:spcPts val="0"/>
-                        </a:spcAft>
-                      </a:pPr>
-                      <a:r>
-                        <a:rPr sz="1300" b="0">
-                          <a:solidFill>
-                            <a:srgbClr val="1F1F1F"/>
-                          </a:solidFill>
-                          <a:latin typeface="Calibri"/>
-                        </a:rPr>
-                        <a:t>modelos; VNU depende do</a:t>
-                      </a:r>
-                    </a:p>
-                    <a:p>
-                      <a:pPr algn="ctr">
-                        <a:lnSpc>
-                          <a:spcPct val="100000"/>
-                        </a:lnSpc>
-                        <a:spcBef>
-                          <a:spcPts val="0"/>
-                        </a:spcBef>
-                        <a:spcAft>
-                          <a:spcPts val="0"/>
-                        </a:spcAft>
-                      </a:pPr>
-                      <a:r>
-                        <a:rPr sz="1300" b="0">
-                          <a:solidFill>
-                            <a:srgbClr val="1F1F1F"/>
-                          </a:solidFill>
-                          <a:latin typeface="Calibri"/>
-                        </a:rPr>
-                        <a:t>suplemento preenchido.</a:t>
+                        <a:t>-</a:t>
                       </a:r>
                     </a:p>
                   </a:txBody>
@@ -14383,73 +13217,7 @@
                           </a:solidFill>
                           <a:latin typeface="Calibri"/>
                         </a:rPr>
-                        <a:t>Volume aprovado/distribuído por</a:t>
-                      </a:r>
-                    </a:p>
-                    <a:p>
-                      <a:pPr algn="ctr">
-                        <a:lnSpc>
-                          <a:spcPct val="100000"/>
-                        </a:lnSpc>
-                        <a:spcBef>
-                          <a:spcPts val="0"/>
-                        </a:spcBef>
-                        <a:spcAft>
-                          <a:spcPts val="0"/>
-                        </a:spcAft>
-                      </a:pPr>
-                      <a:r>
-                        <a:rPr sz="1300" b="0">
-                          <a:solidFill>
-                            <a:srgbClr val="1F1F1F"/>
-                          </a:solidFill>
-                          <a:latin typeface="Calibri"/>
-                        </a:rPr>
-                        <a:t>série não confirmado pelos</a:t>
-                      </a:r>
-                    </a:p>
-                    <a:p>
-                      <a:pPr algn="ctr">
-                        <a:lnSpc>
-                          <a:spcPct val="100000"/>
-                        </a:lnSpc>
-                        <a:spcBef>
-                          <a:spcPts val="0"/>
-                        </a:spcBef>
-                        <a:spcAft>
-                          <a:spcPts val="0"/>
-                        </a:spcAft>
-                      </a:pPr>
-                      <a:r>
-                        <a:rPr sz="1300" b="0">
-                          <a:solidFill>
-                            <a:srgbClr val="1F1F1F"/>
-                          </a:solidFill>
-                          <a:latin typeface="Calibri"/>
-                        </a:rPr>
-                        <a:t>modelos; VNU depende do</a:t>
-                      </a:r>
-                    </a:p>
-                    <a:p>
-                      <a:pPr algn="ctr">
-                        <a:lnSpc>
-                          <a:spcPct val="100000"/>
-                        </a:lnSpc>
-                        <a:spcBef>
-                          <a:spcPts val="0"/>
-                        </a:spcBef>
-                        <a:spcAft>
-                          <a:spcPts val="0"/>
-                        </a:spcAft>
-                      </a:pPr>
-                      <a:r>
-                        <a:rPr sz="1300" b="0">
-                          <a:solidFill>
-                            <a:srgbClr val="1F1F1F"/>
-                          </a:solidFill>
-                          <a:latin typeface="Calibri"/>
-                        </a:rPr>
-                        <a:t>suplemento preenchido.</a:t>
+                        <a:t>-</a:t>
                       </a:r>
                     </a:p>
                   </a:txBody>
@@ -14472,7 +13240,7 @@
                   </a:tcPr>
                 </a:tc>
               </a:tr>
-              <a:tr h="845819">
+              <a:tr h="658368">
                 <a:tc>
                   <a:txBody>
                     <a:bodyPr wrap="square">
@@ -14591,29 +13359,7 @@
                           </a:solidFill>
                           <a:latin typeface="Calibri"/>
                         </a:rPr>
-                        <a:t>respectivos atos e anúncios;</a:t>
-                      </a:r>
-                    </a:p>
-                    <a:p>
-                      <a:pPr algn="ctr">
-                        <a:lnSpc>
-                          <a:spcPct val="100000"/>
-                        </a:lnSpc>
-                        <a:spcBef>
-                          <a:spcPts val="0"/>
-                        </a:spcBef>
-                        <a:spcAft>
-                          <a:spcPts val="0"/>
-                        </a:spcAft>
-                      </a:pPr>
-                      <a:r>
-                        <a:rPr sz="1300" b="0">
-                          <a:solidFill>
-                            <a:srgbClr val="1F1F1F"/>
-                          </a:solidFill>
-                          <a:latin typeface="Calibri"/>
-                        </a:rPr>
-                        <a:t>encerramentos não confirmados.</a:t>
+                        <a:t>respectivos atos e anúncios</a:t>
                       </a:r>
                     </a:p>
                   </a:txBody>
@@ -14706,29 +13452,7 @@
                           </a:solidFill>
                           <a:latin typeface="Calibri"/>
                         </a:rPr>
-                        <a:t>respectivos atos e anúncios;</a:t>
-                      </a:r>
-                    </a:p>
-                    <a:p>
-                      <a:pPr algn="ctr">
-                        <a:lnSpc>
-                          <a:spcPct val="100000"/>
-                        </a:lnSpc>
-                        <a:spcBef>
-                          <a:spcPts val="0"/>
-                        </a:spcBef>
-                        <a:spcAft>
-                          <a:spcPts val="0"/>
-                        </a:spcAft>
-                      </a:pPr>
-                      <a:r>
-                        <a:rPr sz="1300" b="0">
-                          <a:solidFill>
-                            <a:srgbClr val="1F1F1F"/>
-                          </a:solidFill>
-                          <a:latin typeface="Calibri"/>
-                        </a:rPr>
-                        <a:t>encerramentos não confirmados.</a:t>
+                        <a:t>respectivos atos e anúncios</a:t>
                       </a:r>
                     </a:p>
                   </a:txBody>
@@ -14821,29 +13545,7 @@
                           </a:solidFill>
                           <a:latin typeface="Calibri"/>
                         </a:rPr>
-                        <a:t>respectivos atos e anúncios;</a:t>
-                      </a:r>
-                    </a:p>
-                    <a:p>
-                      <a:pPr algn="ctr">
-                        <a:lnSpc>
-                          <a:spcPct val="100000"/>
-                        </a:lnSpc>
-                        <a:spcBef>
-                          <a:spcPts val="0"/>
-                        </a:spcBef>
-                        <a:spcAft>
-                          <a:spcPts val="0"/>
-                        </a:spcAft>
-                      </a:pPr>
-                      <a:r>
-                        <a:rPr sz="1300" b="0">
-                          <a:solidFill>
-                            <a:srgbClr val="1F1F1F"/>
-                          </a:solidFill>
-                          <a:latin typeface="Calibri"/>
-                        </a:rPr>
-                        <a:t>encerramentos não confirmados.</a:t>
+                        <a:t>respectivos atos e anúncios</a:t>
                       </a:r>
                     </a:p>
                   </a:txBody>
@@ -15013,7 +13715,7 @@
         </p:nvGraphicFramePr>
         <p:xfrm>
           <a:off x="438912" y="932688"/>
-          <a:ext cx="11313868" cy="3118101"/>
+          <a:ext cx="11313868" cy="1618488"/>
         </p:xfrm>
         <a:graphic>
           <a:graphicData uri="http://schemas.openxmlformats.org/drawingml/2006/table">
@@ -15050,7 +13752,7 @@
                       <a:r>
                         <a:rPr sz="1300" b="1">
                           <a:solidFill>
-                            <a:srgbClr val="1F1F1F"/>
+                            <a:srgbClr val="FFFFFF"/>
                           </a:solidFill>
                           <a:latin typeface="Calibri"/>
                         </a:rPr>
@@ -15060,7 +13762,7 @@
                   </a:txBody>
                   <a:tcPr marL="91440" marR="91440" marT="41148" marB="41148" anchor="ctr">
                     <a:solidFill>
-                      <a:srgbClr val="EC7000"/>
+                      <a:srgbClr val="FF6200"/>
                     </a:solidFill>
                     <a:lnL>
                       <a:noFill/>
@@ -15099,7 +13801,7 @@
                       <a:r>
                         <a:rPr sz="1300" b="1">
                           <a:solidFill>
-                            <a:srgbClr val="1F1F1F"/>
+                            <a:srgbClr val="FFFFFF"/>
                           </a:solidFill>
                           <a:latin typeface="Calibri"/>
                         </a:rPr>
@@ -15109,7 +13811,7 @@
                   </a:txBody>
                   <a:tcPr marL="91440" marR="91440" marT="41148" marB="41148" anchor="ctr">
                     <a:solidFill>
-                      <a:srgbClr val="EC7000"/>
+                      <a:srgbClr val="FF6200"/>
                     </a:solidFill>
                     <a:lnL>
                       <a:noFill/>
@@ -15148,7 +13850,7 @@
                       <a:r>
                         <a:rPr sz="1300" b="1">
                           <a:solidFill>
-                            <a:srgbClr val="1F1F1F"/>
+                            <a:srgbClr val="FFFFFF"/>
                           </a:solidFill>
                           <a:latin typeface="Calibri"/>
                         </a:rPr>
@@ -15158,7 +13860,7 @@
                   </a:txBody>
                   <a:tcPr marL="91440" marR="91440" marT="41148" marB="41148" anchor="ctr">
                     <a:solidFill>
-                      <a:srgbClr val="EC7000"/>
+                      <a:srgbClr val="FF6200"/>
                     </a:solidFill>
                     <a:lnL>
                       <a:noFill/>
@@ -15197,7 +13899,7 @@
                       <a:r>
                         <a:rPr sz="1300" b="1">
                           <a:solidFill>
-                            <a:srgbClr val="1F1F1F"/>
+                            <a:srgbClr val="FFFFFF"/>
                           </a:solidFill>
                           <a:latin typeface="Calibri"/>
                         </a:rPr>
@@ -15207,7 +13909,7 @@
                   </a:txBody>
                   <a:tcPr marL="91440" marR="91440" marT="41148" marB="41148" anchor="ctr">
                     <a:solidFill>
-                      <a:srgbClr val="EC7000"/>
+                      <a:srgbClr val="FF6200"/>
                     </a:solidFill>
                     <a:lnL>
                       <a:noFill/>
@@ -15246,7 +13948,7 @@
                       <a:r>
                         <a:rPr sz="1300" b="1">
                           <a:solidFill>
-                            <a:srgbClr val="1F1F1F"/>
+                            <a:srgbClr val="FFFFFF"/>
                           </a:solidFill>
                           <a:latin typeface="Calibri"/>
                         </a:rPr>
@@ -15256,7 +13958,7 @@
                   </a:txBody>
                   <a:tcPr marL="91440" marR="91440" marT="41148" marB="41148" anchor="ctr">
                     <a:solidFill>
-                      <a:srgbClr val="EC7000"/>
+                      <a:srgbClr val="FF6200"/>
                     </a:solidFill>
                     <a:lnL>
                       <a:noFill/>
@@ -15275,7 +13977,7 @@
                   </a:tcPr>
                 </a:tc>
               </a:tr>
-              <a:tr h="845819">
+              <a:tr h="283464">
                 <a:tc>
                   <a:txBody>
                     <a:bodyPr wrap="square">
@@ -15348,73 +14050,7 @@
                           </a:solidFill>
                           <a:latin typeface="Calibri"/>
                         </a:rPr>
-                        <a:t>Prazo remetido ao</a:t>
-                      </a:r>
-                    </a:p>
-                    <a:p>
-                      <a:pPr algn="ctr">
-                        <a:lnSpc>
-                          <a:spcPct val="100000"/>
-                        </a:lnSpc>
-                        <a:spcBef>
-                          <a:spcPts val="0"/>
-                        </a:spcBef>
-                        <a:spcAft>
-                          <a:spcPts val="0"/>
-                        </a:spcAft>
-                      </a:pPr>
-                      <a:r>
-                        <a:rPr sz="1300" b="0">
-                          <a:solidFill>
-                            <a:srgbClr val="1F1F1F"/>
-                          </a:solidFill>
-                          <a:latin typeface="Calibri"/>
-                        </a:rPr>
-                        <a:t>suplemento; carência</a:t>
-                      </a:r>
-                    </a:p>
-                    <a:p>
-                      <a:pPr algn="ctr">
-                        <a:lnSpc>
-                          <a:spcPct val="100000"/>
-                        </a:lnSpc>
-                        <a:spcBef>
-                          <a:spcPts val="0"/>
-                        </a:spcBef>
-                        <a:spcAft>
-                          <a:spcPts val="0"/>
-                        </a:spcAft>
-                      </a:pPr>
-                      <a:r>
-                        <a:rPr sz="1300" b="0">
-                          <a:solidFill>
-                            <a:srgbClr val="1F1F1F"/>
-                          </a:solidFill>
-                          <a:latin typeface="Calibri"/>
-                        </a:rPr>
-                        <a:t>efetiva por série não</a:t>
-                      </a:r>
-                    </a:p>
-                    <a:p>
-                      <a:pPr algn="ctr">
-                        <a:lnSpc>
-                          <a:spcPct val="100000"/>
-                        </a:lnSpc>
-                        <a:spcBef>
-                          <a:spcPts val="0"/>
-                        </a:spcBef>
-                        <a:spcAft>
-                          <a:spcPts val="0"/>
-                        </a:spcAft>
-                      </a:pPr>
-                      <a:r>
-                        <a:rPr sz="1300" b="0">
-                          <a:solidFill>
-                            <a:srgbClr val="1F1F1F"/>
-                          </a:solidFill>
-                          <a:latin typeface="Calibri"/>
-                        </a:rPr>
-                        <a:t>confirmada.</a:t>
+                        <a:t>-</a:t>
                       </a:r>
                     </a:p>
                   </a:txBody>
@@ -15461,73 +14097,7 @@
                           </a:solidFill>
                           <a:latin typeface="Calibri"/>
                         </a:rPr>
-                        <a:t>Prazo remetido ao</a:t>
-                      </a:r>
-                    </a:p>
-                    <a:p>
-                      <a:pPr algn="ctr">
-                        <a:lnSpc>
-                          <a:spcPct val="100000"/>
-                        </a:lnSpc>
-                        <a:spcBef>
-                          <a:spcPts val="0"/>
-                        </a:spcBef>
-                        <a:spcAft>
-                          <a:spcPts val="0"/>
-                        </a:spcAft>
-                      </a:pPr>
-                      <a:r>
-                        <a:rPr sz="1300" b="0">
-                          <a:solidFill>
-                            <a:srgbClr val="1F1F1F"/>
-                          </a:solidFill>
-                          <a:latin typeface="Calibri"/>
-                        </a:rPr>
-                        <a:t>suplemento; carência</a:t>
-                      </a:r>
-                    </a:p>
-                    <a:p>
-                      <a:pPr algn="ctr">
-                        <a:lnSpc>
-                          <a:spcPct val="100000"/>
-                        </a:lnSpc>
-                        <a:spcBef>
-                          <a:spcPts val="0"/>
-                        </a:spcBef>
-                        <a:spcAft>
-                          <a:spcPts val="0"/>
-                        </a:spcAft>
-                      </a:pPr>
-                      <a:r>
-                        <a:rPr sz="1300" b="0">
-                          <a:solidFill>
-                            <a:srgbClr val="1F1F1F"/>
-                          </a:solidFill>
-                          <a:latin typeface="Calibri"/>
-                        </a:rPr>
-                        <a:t>efetiva por série não</a:t>
-                      </a:r>
-                    </a:p>
-                    <a:p>
-                      <a:pPr algn="ctr">
-                        <a:lnSpc>
-                          <a:spcPct val="100000"/>
-                        </a:lnSpc>
-                        <a:spcBef>
-                          <a:spcPts val="0"/>
-                        </a:spcBef>
-                        <a:spcAft>
-                          <a:spcPts val="0"/>
-                        </a:spcAft>
-                      </a:pPr>
-                      <a:r>
-                        <a:rPr sz="1300" b="0">
-                          <a:solidFill>
-                            <a:srgbClr val="1F1F1F"/>
-                          </a:solidFill>
-                          <a:latin typeface="Calibri"/>
-                        </a:rPr>
-                        <a:t>confirmada.</a:t>
+                        <a:t>-</a:t>
                       </a:r>
                     </a:p>
                   </a:txBody>
@@ -15574,73 +14144,7 @@
                           </a:solidFill>
                           <a:latin typeface="Calibri"/>
                         </a:rPr>
-                        <a:t>Prazo remetido ao</a:t>
-                      </a:r>
-                    </a:p>
-                    <a:p>
-                      <a:pPr algn="ctr">
-                        <a:lnSpc>
-                          <a:spcPct val="100000"/>
-                        </a:lnSpc>
-                        <a:spcBef>
-                          <a:spcPts val="0"/>
-                        </a:spcBef>
-                        <a:spcAft>
-                          <a:spcPts val="0"/>
-                        </a:spcAft>
-                      </a:pPr>
-                      <a:r>
-                        <a:rPr sz="1300" b="0">
-                          <a:solidFill>
-                            <a:srgbClr val="1F1F1F"/>
-                          </a:solidFill>
-                          <a:latin typeface="Calibri"/>
-                        </a:rPr>
-                        <a:t>suplemento; carência</a:t>
-                      </a:r>
-                    </a:p>
-                    <a:p>
-                      <a:pPr algn="ctr">
-                        <a:lnSpc>
-                          <a:spcPct val="100000"/>
-                        </a:lnSpc>
-                        <a:spcBef>
-                          <a:spcPts val="0"/>
-                        </a:spcBef>
-                        <a:spcAft>
-                          <a:spcPts val="0"/>
-                        </a:spcAft>
-                      </a:pPr>
-                      <a:r>
-                        <a:rPr sz="1300" b="0">
-                          <a:solidFill>
-                            <a:srgbClr val="1F1F1F"/>
-                          </a:solidFill>
-                          <a:latin typeface="Calibri"/>
-                        </a:rPr>
-                        <a:t>efetiva por série não</a:t>
-                      </a:r>
-                    </a:p>
-                    <a:p>
-                      <a:pPr algn="ctr">
-                        <a:lnSpc>
-                          <a:spcPct val="100000"/>
-                        </a:lnSpc>
-                        <a:spcBef>
-                          <a:spcPts val="0"/>
-                        </a:spcBef>
-                        <a:spcAft>
-                          <a:spcPts val="0"/>
-                        </a:spcAft>
-                      </a:pPr>
-                      <a:r>
-                        <a:rPr sz="1300" b="0">
-                          <a:solidFill>
-                            <a:srgbClr val="1F1F1F"/>
-                          </a:solidFill>
-                          <a:latin typeface="Calibri"/>
-                        </a:rPr>
-                        <a:t>confirmada.</a:t>
+                        <a:t>-</a:t>
                       </a:r>
                     </a:p>
                   </a:txBody>
@@ -15687,73 +14191,7 @@
                           </a:solidFill>
                           <a:latin typeface="Calibri"/>
                         </a:rPr>
-                        <a:t>Prazo remetido ao</a:t>
-                      </a:r>
-                    </a:p>
-                    <a:p>
-                      <a:pPr algn="ctr">
-                        <a:lnSpc>
-                          <a:spcPct val="100000"/>
-                        </a:lnSpc>
-                        <a:spcBef>
-                          <a:spcPts val="0"/>
-                        </a:spcBef>
-                        <a:spcAft>
-                          <a:spcPts val="0"/>
-                        </a:spcAft>
-                      </a:pPr>
-                      <a:r>
-                        <a:rPr sz="1300" b="0">
-                          <a:solidFill>
-                            <a:srgbClr val="1F1F1F"/>
-                          </a:solidFill>
-                          <a:latin typeface="Calibri"/>
-                        </a:rPr>
-                        <a:t>suplemento; carência</a:t>
-                      </a:r>
-                    </a:p>
-                    <a:p>
-                      <a:pPr algn="ctr">
-                        <a:lnSpc>
-                          <a:spcPct val="100000"/>
-                        </a:lnSpc>
-                        <a:spcBef>
-                          <a:spcPts val="0"/>
-                        </a:spcBef>
-                        <a:spcAft>
-                          <a:spcPts val="0"/>
-                        </a:spcAft>
-                      </a:pPr>
-                      <a:r>
-                        <a:rPr sz="1300" b="0">
-                          <a:solidFill>
-                            <a:srgbClr val="1F1F1F"/>
-                          </a:solidFill>
-                          <a:latin typeface="Calibri"/>
-                        </a:rPr>
-                        <a:t>efetiva por série não</a:t>
-                      </a:r>
-                    </a:p>
-                    <a:p>
-                      <a:pPr algn="ctr">
-                        <a:lnSpc>
-                          <a:spcPct val="100000"/>
-                        </a:lnSpc>
-                        <a:spcBef>
-                          <a:spcPts val="0"/>
-                        </a:spcBef>
-                        <a:spcAft>
-                          <a:spcPts val="0"/>
-                        </a:spcAft>
-                      </a:pPr>
-                      <a:r>
-                        <a:rPr sz="1300" b="0">
-                          <a:solidFill>
-                            <a:srgbClr val="1F1F1F"/>
-                          </a:solidFill>
-                          <a:latin typeface="Calibri"/>
-                        </a:rPr>
-                        <a:t>confirmada.</a:t>
+                        <a:t>-</a:t>
                       </a:r>
                     </a:p>
                   </a:txBody>
@@ -15776,7 +14214,7 @@
                   </a:tcPr>
                 </a:tc>
               </a:tr>
-              <a:tr h="1033271">
+              <a:tr h="658368">
                 <a:tc>
                   <a:txBody>
                     <a:bodyPr wrap="square">
@@ -15893,51 +14331,7 @@
                           </a:solidFill>
                           <a:latin typeface="Calibri"/>
                         </a:rPr>
-                        <a:t>caixa e waterfall;</a:t>
-                      </a:r>
-                    </a:p>
-                    <a:p>
-                      <a:pPr algn="ctr">
-                        <a:lnSpc>
-                          <a:spcPct val="100000"/>
-                        </a:lnSpc>
-                        <a:spcBef>
-                          <a:spcPts val="0"/>
-                        </a:spcBef>
-                        <a:spcAft>
-                          <a:spcPts val="0"/>
-                        </a:spcAft>
-                      </a:pPr>
-                      <a:r>
-                        <a:rPr sz="1300" b="0">
-                          <a:solidFill>
-                            <a:srgbClr val="1F1F1F"/>
-                          </a:solidFill>
-                          <a:latin typeface="Calibri"/>
-                        </a:rPr>
-                        <a:t>cronograma fechado não</a:t>
-                      </a:r>
-                    </a:p>
-                    <a:p>
-                      <a:pPr algn="ctr">
-                        <a:lnSpc>
-                          <a:spcPct val="100000"/>
-                        </a:lnSpc>
-                        <a:spcBef>
-                          <a:spcPts val="0"/>
-                        </a:spcBef>
-                        <a:spcAft>
-                          <a:spcPts val="0"/>
-                        </a:spcAft>
-                      </a:pPr>
-                      <a:r>
-                        <a:rPr sz="1300" b="0">
-                          <a:solidFill>
-                            <a:srgbClr val="1F1F1F"/>
-                          </a:solidFill>
-                          <a:latin typeface="Calibri"/>
-                        </a:rPr>
-                        <a:t>identificado.</a:t>
+                        <a:t>caixa e waterfall</a:t>
                       </a:r>
                     </a:p>
                   </a:txBody>
@@ -16028,51 +14422,7 @@
                           </a:solidFill>
                           <a:latin typeface="Calibri"/>
                         </a:rPr>
-                        <a:t>caixa e waterfall;</a:t>
-                      </a:r>
-                    </a:p>
-                    <a:p>
-                      <a:pPr algn="ctr">
-                        <a:lnSpc>
-                          <a:spcPct val="100000"/>
-                        </a:lnSpc>
-                        <a:spcBef>
-                          <a:spcPts val="0"/>
-                        </a:spcBef>
-                        <a:spcAft>
-                          <a:spcPts val="0"/>
-                        </a:spcAft>
-                      </a:pPr>
-                      <a:r>
-                        <a:rPr sz="1300" b="0">
-                          <a:solidFill>
-                            <a:srgbClr val="1F1F1F"/>
-                          </a:solidFill>
-                          <a:latin typeface="Calibri"/>
-                        </a:rPr>
-                        <a:t>cronograma fechado não</a:t>
-                      </a:r>
-                    </a:p>
-                    <a:p>
-                      <a:pPr algn="ctr">
-                        <a:lnSpc>
-                          <a:spcPct val="100000"/>
-                        </a:lnSpc>
-                        <a:spcBef>
-                          <a:spcPts val="0"/>
-                        </a:spcBef>
-                        <a:spcAft>
-                          <a:spcPts val="0"/>
-                        </a:spcAft>
-                      </a:pPr>
-                      <a:r>
-                        <a:rPr sz="1300" b="0">
-                          <a:solidFill>
-                            <a:srgbClr val="1F1F1F"/>
-                          </a:solidFill>
-                          <a:latin typeface="Calibri"/>
-                        </a:rPr>
-                        <a:t>identificado.</a:t>
+                        <a:t>caixa e waterfall</a:t>
                       </a:r>
                     </a:p>
                   </a:txBody>
@@ -16163,51 +14513,7 @@
                           </a:solidFill>
                           <a:latin typeface="Calibri"/>
                         </a:rPr>
-                        <a:t>caixa e waterfall;</a:t>
-                      </a:r>
-                    </a:p>
-                    <a:p>
-                      <a:pPr algn="ctr">
-                        <a:lnSpc>
-                          <a:spcPct val="100000"/>
-                        </a:lnSpc>
-                        <a:spcBef>
-                          <a:spcPts val="0"/>
-                        </a:spcBef>
-                        <a:spcAft>
-                          <a:spcPts val="0"/>
-                        </a:spcAft>
-                      </a:pPr>
-                      <a:r>
-                        <a:rPr sz="1300" b="0">
-                          <a:solidFill>
-                            <a:srgbClr val="1F1F1F"/>
-                          </a:solidFill>
-                          <a:latin typeface="Calibri"/>
-                        </a:rPr>
-                        <a:t>cronograma fechado não</a:t>
-                      </a:r>
-                    </a:p>
-                    <a:p>
-                      <a:pPr algn="ctr">
-                        <a:lnSpc>
-                          <a:spcPct val="100000"/>
-                        </a:lnSpc>
-                        <a:spcBef>
-                          <a:spcPts val="0"/>
-                        </a:spcBef>
-                        <a:spcAft>
-                          <a:spcPts val="0"/>
-                        </a:spcAft>
-                      </a:pPr>
-                      <a:r>
-                        <a:rPr sz="1300" b="0">
-                          <a:solidFill>
-                            <a:srgbClr val="1F1F1F"/>
-                          </a:solidFill>
-                          <a:latin typeface="Calibri"/>
-                        </a:rPr>
-                        <a:t>identificado.</a:t>
+                        <a:t>caixa e waterfall</a:t>
                       </a:r>
                     </a:p>
                   </a:txBody>
@@ -16298,51 +14604,7 @@
                           </a:solidFill>
                           <a:latin typeface="Calibri"/>
                         </a:rPr>
-                        <a:t>caixa e waterfall;</a:t>
-                      </a:r>
-                    </a:p>
-                    <a:p>
-                      <a:pPr algn="ctr">
-                        <a:lnSpc>
-                          <a:spcPct val="100000"/>
-                        </a:lnSpc>
-                        <a:spcBef>
-                          <a:spcPts val="0"/>
-                        </a:spcBef>
-                        <a:spcAft>
-                          <a:spcPts val="0"/>
-                        </a:spcAft>
-                      </a:pPr>
-                      <a:r>
-                        <a:rPr sz="1300" b="0">
-                          <a:solidFill>
-                            <a:srgbClr val="1F1F1F"/>
-                          </a:solidFill>
-                          <a:latin typeface="Calibri"/>
-                        </a:rPr>
-                        <a:t>cronograma fechado não</a:t>
-                      </a:r>
-                    </a:p>
-                    <a:p>
-                      <a:pPr algn="ctr">
-                        <a:lnSpc>
-                          <a:spcPct val="100000"/>
-                        </a:lnSpc>
-                        <a:spcBef>
-                          <a:spcPts val="0"/>
-                        </a:spcBef>
-                        <a:spcAft>
-                          <a:spcPts val="0"/>
-                        </a:spcAft>
-                      </a:pPr>
-                      <a:r>
-                        <a:rPr sz="1300" b="0">
-                          <a:solidFill>
-                            <a:srgbClr val="1F1F1F"/>
-                          </a:solidFill>
-                          <a:latin typeface="Calibri"/>
-                        </a:rPr>
-                        <a:t>identificado.</a:t>
+                        <a:t>caixa e waterfall</a:t>
                       </a:r>
                     </a:p>
                   </a:txBody>
@@ -16365,7 +14627,7 @@
                   </a:tcPr>
                 </a:tc>
               </a:tr>
-              <a:tr h="845819">
+              <a:tr h="283464">
                 <a:tc>
                   <a:txBody>
                     <a:bodyPr wrap="square">
@@ -16440,73 +14702,7 @@
                           </a:solidFill>
                           <a:latin typeface="Calibri"/>
                         </a:rPr>
-                        <a:t>Data final por série</a:t>
-                      </a:r>
-                    </a:p>
-                    <a:p>
-                      <a:pPr algn="ctr">
-                        <a:lnSpc>
-                          <a:spcPct val="100000"/>
-                        </a:lnSpc>
-                        <a:spcBef>
-                          <a:spcPts val="0"/>
-                        </a:spcBef>
-                        <a:spcAft>
-                          <a:spcPts val="0"/>
-                        </a:spcAft>
-                      </a:pPr>
-                      <a:r>
-                        <a:rPr sz="1300" b="0">
-                          <a:solidFill>
-                            <a:srgbClr val="1F1F1F"/>
-                          </a:solidFill>
-                          <a:latin typeface="Calibri"/>
-                        </a:rPr>
-                        <a:t>remetida ao suplemento;</a:t>
-                      </a:r>
-                    </a:p>
-                    <a:p>
-                      <a:pPr algn="ctr">
-                        <a:lnSpc>
-                          <a:spcPct val="100000"/>
-                        </a:lnSpc>
-                        <a:spcBef>
-                          <a:spcPts val="0"/>
-                        </a:spcBef>
-                        <a:spcAft>
-                          <a:spcPts val="0"/>
-                        </a:spcAft>
-                      </a:pPr>
-                      <a:r>
-                        <a:rPr sz="1300" b="0">
-                          <a:solidFill>
-                            <a:srgbClr val="1F1F1F"/>
-                          </a:solidFill>
-                          <a:latin typeface="Calibri"/>
-                        </a:rPr>
-                        <a:t>primeira integralização</a:t>
-                      </a:r>
-                    </a:p>
-                    <a:p>
-                      <a:pPr algn="ctr">
-                        <a:lnSpc>
-                          <a:spcPct val="100000"/>
-                        </a:lnSpc>
-                        <a:spcBef>
-                          <a:spcPts val="0"/>
-                        </a:spcBef>
-                        <a:spcAft>
-                          <a:spcPts val="0"/>
-                        </a:spcAft>
-                      </a:pPr>
-                      <a:r>
-                        <a:rPr sz="1300" b="0">
-                          <a:solidFill>
-                            <a:srgbClr val="1F1F1F"/>
-                          </a:solidFill>
-                          <a:latin typeface="Calibri"/>
-                        </a:rPr>
-                        <a:t>efetiva não confirmada.</a:t>
+                        <a:t>-</a:t>
                       </a:r>
                     </a:p>
                   </a:txBody>
@@ -16555,73 +14751,7 @@
                           </a:solidFill>
                           <a:latin typeface="Calibri"/>
                         </a:rPr>
-                        <a:t>Data final por série</a:t>
-                      </a:r>
-                    </a:p>
-                    <a:p>
-                      <a:pPr algn="ctr">
-                        <a:lnSpc>
-                          <a:spcPct val="100000"/>
-                        </a:lnSpc>
-                        <a:spcBef>
-                          <a:spcPts val="0"/>
-                        </a:spcBef>
-                        <a:spcAft>
-                          <a:spcPts val="0"/>
-                        </a:spcAft>
-                      </a:pPr>
-                      <a:r>
-                        <a:rPr sz="1300" b="0">
-                          <a:solidFill>
-                            <a:srgbClr val="1F1F1F"/>
-                          </a:solidFill>
-                          <a:latin typeface="Calibri"/>
-                        </a:rPr>
-                        <a:t>remetida ao suplemento;</a:t>
-                      </a:r>
-                    </a:p>
-                    <a:p>
-                      <a:pPr algn="ctr">
-                        <a:lnSpc>
-                          <a:spcPct val="100000"/>
-                        </a:lnSpc>
-                        <a:spcBef>
-                          <a:spcPts val="0"/>
-                        </a:spcBef>
-                        <a:spcAft>
-                          <a:spcPts val="0"/>
-                        </a:spcAft>
-                      </a:pPr>
-                      <a:r>
-                        <a:rPr sz="1300" b="0">
-                          <a:solidFill>
-                            <a:srgbClr val="1F1F1F"/>
-                          </a:solidFill>
-                          <a:latin typeface="Calibri"/>
-                        </a:rPr>
-                        <a:t>primeira integralização</a:t>
-                      </a:r>
-                    </a:p>
-                    <a:p>
-                      <a:pPr algn="ctr">
-                        <a:lnSpc>
-                          <a:spcPct val="100000"/>
-                        </a:lnSpc>
-                        <a:spcBef>
-                          <a:spcPts val="0"/>
-                        </a:spcBef>
-                        <a:spcAft>
-                          <a:spcPts val="0"/>
-                        </a:spcAft>
-                      </a:pPr>
-                      <a:r>
-                        <a:rPr sz="1300" b="0">
-                          <a:solidFill>
-                            <a:srgbClr val="1F1F1F"/>
-                          </a:solidFill>
-                          <a:latin typeface="Calibri"/>
-                        </a:rPr>
-                        <a:t>efetiva não confirmada.</a:t>
+                        <a:t>-</a:t>
                       </a:r>
                     </a:p>
                   </a:txBody>
@@ -16670,73 +14800,7 @@
                           </a:solidFill>
                           <a:latin typeface="Calibri"/>
                         </a:rPr>
-                        <a:t>Data final por série</a:t>
-                      </a:r>
-                    </a:p>
-                    <a:p>
-                      <a:pPr algn="ctr">
-                        <a:lnSpc>
-                          <a:spcPct val="100000"/>
-                        </a:lnSpc>
-                        <a:spcBef>
-                          <a:spcPts val="0"/>
-                        </a:spcBef>
-                        <a:spcAft>
-                          <a:spcPts val="0"/>
-                        </a:spcAft>
-                      </a:pPr>
-                      <a:r>
-                        <a:rPr sz="1300" b="0">
-                          <a:solidFill>
-                            <a:srgbClr val="1F1F1F"/>
-                          </a:solidFill>
-                          <a:latin typeface="Calibri"/>
-                        </a:rPr>
-                        <a:t>remetida ao suplemento;</a:t>
-                      </a:r>
-                    </a:p>
-                    <a:p>
-                      <a:pPr algn="ctr">
-                        <a:lnSpc>
-                          <a:spcPct val="100000"/>
-                        </a:lnSpc>
-                        <a:spcBef>
-                          <a:spcPts val="0"/>
-                        </a:spcBef>
-                        <a:spcAft>
-                          <a:spcPts val="0"/>
-                        </a:spcAft>
-                      </a:pPr>
-                      <a:r>
-                        <a:rPr sz="1300" b="0">
-                          <a:solidFill>
-                            <a:srgbClr val="1F1F1F"/>
-                          </a:solidFill>
-                          <a:latin typeface="Calibri"/>
-                        </a:rPr>
-                        <a:t>primeira integralização</a:t>
-                      </a:r>
-                    </a:p>
-                    <a:p>
-                      <a:pPr algn="ctr">
-                        <a:lnSpc>
-                          <a:spcPct val="100000"/>
-                        </a:lnSpc>
-                        <a:spcBef>
-                          <a:spcPts val="0"/>
-                        </a:spcBef>
-                        <a:spcAft>
-                          <a:spcPts val="0"/>
-                        </a:spcAft>
-                      </a:pPr>
-                      <a:r>
-                        <a:rPr sz="1300" b="0">
-                          <a:solidFill>
-                            <a:srgbClr val="1F1F1F"/>
-                          </a:solidFill>
-                          <a:latin typeface="Calibri"/>
-                        </a:rPr>
-                        <a:t>efetiva não confirmada.</a:t>
+                        <a:t>-</a:t>
                       </a:r>
                     </a:p>
                   </a:txBody>
@@ -16785,73 +14849,7 @@
                           </a:solidFill>
                           <a:latin typeface="Calibri"/>
                         </a:rPr>
-                        <a:t>Data final por série</a:t>
-                      </a:r>
-                    </a:p>
-                    <a:p>
-                      <a:pPr algn="ctr">
-                        <a:lnSpc>
-                          <a:spcPct val="100000"/>
-                        </a:lnSpc>
-                        <a:spcBef>
-                          <a:spcPts val="0"/>
-                        </a:spcBef>
-                        <a:spcAft>
-                          <a:spcPts val="0"/>
-                        </a:spcAft>
-                      </a:pPr>
-                      <a:r>
-                        <a:rPr sz="1300" b="0">
-                          <a:solidFill>
-                            <a:srgbClr val="1F1F1F"/>
-                          </a:solidFill>
-                          <a:latin typeface="Calibri"/>
-                        </a:rPr>
-                        <a:t>remetida ao suplemento;</a:t>
-                      </a:r>
-                    </a:p>
-                    <a:p>
-                      <a:pPr algn="ctr">
-                        <a:lnSpc>
-                          <a:spcPct val="100000"/>
-                        </a:lnSpc>
-                        <a:spcBef>
-                          <a:spcPts val="0"/>
-                        </a:spcBef>
-                        <a:spcAft>
-                          <a:spcPts val="0"/>
-                        </a:spcAft>
-                      </a:pPr>
-                      <a:r>
-                        <a:rPr sz="1300" b="0">
-                          <a:solidFill>
-                            <a:srgbClr val="1F1F1F"/>
-                          </a:solidFill>
-                          <a:latin typeface="Calibri"/>
-                        </a:rPr>
-                        <a:t>primeira integralização</a:t>
-                      </a:r>
-                    </a:p>
-                    <a:p>
-                      <a:pPr algn="ctr">
-                        <a:lnSpc>
-                          <a:spcPct val="100000"/>
-                        </a:lnSpc>
-                        <a:spcBef>
-                          <a:spcPts val="0"/>
-                        </a:spcBef>
-                        <a:spcAft>
-                          <a:spcPts val="0"/>
-                        </a:spcAft>
-                      </a:pPr>
-                      <a:r>
-                        <a:rPr sz="1300" b="0">
-                          <a:solidFill>
-                            <a:srgbClr val="1F1F1F"/>
-                          </a:solidFill>
-                          <a:latin typeface="Calibri"/>
-                        </a:rPr>
-                        <a:t>efetiva não confirmada.</a:t>
+                        <a:t>-</a:t>
                       </a:r>
                     </a:p>
                   </a:txBody>
@@ -17021,7 +15019,7 @@
         </p:nvGraphicFramePr>
         <p:xfrm>
           <a:off x="438912" y="932688"/>
-          <a:ext cx="11313870" cy="2743198"/>
+          <a:ext cx="11313870" cy="1618488"/>
         </p:xfrm>
         <a:graphic>
           <a:graphicData uri="http://schemas.openxmlformats.org/drawingml/2006/table">
@@ -17057,7 +15055,7 @@
                       <a:r>
                         <a:rPr sz="1300" b="1">
                           <a:solidFill>
-                            <a:srgbClr val="1F1F1F"/>
+                            <a:srgbClr val="FFFFFF"/>
                           </a:solidFill>
                           <a:latin typeface="Calibri"/>
                         </a:rPr>
@@ -17067,7 +15065,7 @@
                   </a:txBody>
                   <a:tcPr marL="91440" marR="91440" marT="41148" marB="41148" anchor="ctr">
                     <a:solidFill>
-                      <a:srgbClr val="EC7000"/>
+                      <a:srgbClr val="FF6200"/>
                     </a:solidFill>
                     <a:lnL>
                       <a:noFill/>
@@ -17106,7 +15104,7 @@
                       <a:r>
                         <a:rPr sz="1300" b="1">
                           <a:solidFill>
-                            <a:srgbClr val="1F1F1F"/>
+                            <a:srgbClr val="FFFFFF"/>
                           </a:solidFill>
                           <a:latin typeface="Calibri"/>
                         </a:rPr>
@@ -17116,7 +15114,7 @@
                   </a:txBody>
                   <a:tcPr marL="91440" marR="91440" marT="41148" marB="41148" anchor="ctr">
                     <a:solidFill>
-                      <a:srgbClr val="EC7000"/>
+                      <a:srgbClr val="FF6200"/>
                     </a:solidFill>
                     <a:lnL>
                       <a:noFill/>
@@ -17155,7 +15153,7 @@
                       <a:r>
                         <a:rPr sz="1300" b="1">
                           <a:solidFill>
-                            <a:srgbClr val="1F1F1F"/>
+                            <a:srgbClr val="FFFFFF"/>
                           </a:solidFill>
                           <a:latin typeface="Calibri"/>
                         </a:rPr>
@@ -17165,7 +15163,7 @@
                   </a:txBody>
                   <a:tcPr marL="91440" marR="91440" marT="41148" marB="41148" anchor="ctr">
                     <a:solidFill>
-                      <a:srgbClr val="EC7000"/>
+                      <a:srgbClr val="FF6200"/>
                     </a:solidFill>
                     <a:lnL>
                       <a:noFill/>
@@ -17204,7 +15202,7 @@
                       <a:r>
                         <a:rPr sz="1300" b="1">
                           <a:solidFill>
-                            <a:srgbClr val="1F1F1F"/>
+                            <a:srgbClr val="FFFFFF"/>
                           </a:solidFill>
                           <a:latin typeface="Calibri"/>
                         </a:rPr>
@@ -17214,7 +15212,7 @@
                   </a:txBody>
                   <a:tcPr marL="91440" marR="91440" marT="41148" marB="41148" anchor="ctr">
                     <a:solidFill>
-                      <a:srgbClr val="EC7000"/>
+                      <a:srgbClr val="FF6200"/>
                     </a:solidFill>
                     <a:lnL>
                       <a:noFill/>
@@ -17229,6 +15227,196 @@
                       <a:solidFill>
                         <a:srgbClr val="D9DEE5"/>
                       </a:solidFill>
+                    </a:lnB>
+                  </a:tcPr>
+                </a:tc>
+              </a:tr>
+              <a:tr h="283464">
+                <a:tc>
+                  <a:txBody>
+                    <a:bodyPr wrap="square">
+                      <a:noAutofit/>
+                    </a:bodyPr>
+                    <a:lstStyle/>
+                    <a:p>
+                      <a:pPr algn="l">
+                        <a:lnSpc>
+                          <a:spcPct val="100000"/>
+                        </a:lnSpc>
+                        <a:spcBef>
+                          <a:spcPts val="0"/>
+                        </a:spcBef>
+                        <a:spcAft>
+                          <a:spcPts val="0"/>
+                        </a:spcAft>
+                      </a:pPr>
+                      <a:r>
+                        <a:rPr sz="1300" b="1">
+                          <a:solidFill>
+                            <a:srgbClr val="1F1F1F"/>
+                          </a:solidFill>
+                          <a:latin typeface="Calibri"/>
+                        </a:rPr>
+                        <a:t>Carência</a:t>
+                      </a:r>
+                    </a:p>
+                  </a:txBody>
+                  <a:tcPr marL="91440" marR="91440" marT="41148" marB="41148" anchor="ctr">
+                    <a:solidFill>
+                      <a:srgbClr val="FFFFFF"/>
+                    </a:solidFill>
+                    <a:lnL>
+                      <a:noFill/>
+                    </a:lnL>
+                    <a:lnR>
+                      <a:noFill/>
+                    </a:lnR>
+                    <a:lnT>
+                      <a:noFill/>
+                    </a:lnT>
+                    <a:lnB>
+                      <a:noFill/>
+                    </a:lnB>
+                  </a:tcPr>
+                </a:tc>
+                <a:tc>
+                  <a:txBody>
+                    <a:bodyPr wrap="square">
+                      <a:noAutofit/>
+                    </a:bodyPr>
+                    <a:lstStyle/>
+                    <a:p>
+                      <a:pPr algn="ctr">
+                        <a:lnSpc>
+                          <a:spcPct val="100000"/>
+                        </a:lnSpc>
+                        <a:spcBef>
+                          <a:spcPts val="0"/>
+                        </a:spcBef>
+                        <a:spcAft>
+                          <a:spcPts val="0"/>
+                        </a:spcAft>
+                      </a:pPr>
+                      <a:r>
+                        <a:rPr sz="1300" b="0">
+                          <a:solidFill>
+                            <a:srgbClr val="1F1F1F"/>
+                          </a:solidFill>
+                          <a:latin typeface="Calibri"/>
+                        </a:rPr>
+                        <a:t>-</a:t>
+                      </a:r>
+                    </a:p>
+                  </a:txBody>
+                  <a:tcPr marL="91440" marR="91440" marT="41148" marB="41148" anchor="ctr">
+                    <a:solidFill>
+                      <a:srgbClr val="FFFFFF"/>
+                    </a:solidFill>
+                    <a:lnL>
+                      <a:noFill/>
+                    </a:lnL>
+                    <a:lnR>
+                      <a:noFill/>
+                    </a:lnR>
+                    <a:lnT>
+                      <a:noFill/>
+                    </a:lnT>
+                    <a:lnB>
+                      <a:noFill/>
+                    </a:lnB>
+                  </a:tcPr>
+                </a:tc>
+                <a:tc>
+                  <a:txBody>
+                    <a:bodyPr wrap="square">
+                      <a:noAutofit/>
+                    </a:bodyPr>
+                    <a:lstStyle/>
+                    <a:p>
+                      <a:pPr algn="ctr">
+                        <a:lnSpc>
+                          <a:spcPct val="100000"/>
+                        </a:lnSpc>
+                        <a:spcBef>
+                          <a:spcPts val="0"/>
+                        </a:spcBef>
+                        <a:spcAft>
+                          <a:spcPts val="0"/>
+                        </a:spcAft>
+                      </a:pPr>
+                      <a:r>
+                        <a:rPr sz="1300" b="0">
+                          <a:solidFill>
+                            <a:srgbClr val="1F1F1F"/>
+                          </a:solidFill>
+                          <a:latin typeface="Calibri"/>
+                        </a:rPr>
+                        <a:t>-</a:t>
+                      </a:r>
+                    </a:p>
+                  </a:txBody>
+                  <a:tcPr marL="91440" marR="91440" marT="41148" marB="41148" anchor="ctr">
+                    <a:solidFill>
+                      <a:srgbClr val="FFFFFF"/>
+                    </a:solidFill>
+                    <a:lnL>
+                      <a:noFill/>
+                    </a:lnL>
+                    <a:lnR>
+                      <a:noFill/>
+                    </a:lnR>
+                    <a:lnT>
+                      <a:noFill/>
+                    </a:lnT>
+                    <a:lnB>
+                      <a:noFill/>
+                    </a:lnB>
+                  </a:tcPr>
+                </a:tc>
+                <a:tc>
+                  <a:txBody>
+                    <a:bodyPr wrap="square">
+                      <a:noAutofit/>
+                    </a:bodyPr>
+                    <a:lstStyle/>
+                    <a:p>
+                      <a:pPr algn="ctr">
+                        <a:lnSpc>
+                          <a:spcPct val="100000"/>
+                        </a:lnSpc>
+                        <a:spcBef>
+                          <a:spcPts val="0"/>
+                        </a:spcBef>
+                        <a:spcAft>
+                          <a:spcPts val="0"/>
+                        </a:spcAft>
+                      </a:pPr>
+                      <a:r>
+                        <a:rPr sz="1300" b="0">
+                          <a:solidFill>
+                            <a:srgbClr val="1F1F1F"/>
+                          </a:solidFill>
+                          <a:latin typeface="Calibri"/>
+                        </a:rPr>
+                        <a:t>-</a:t>
+                      </a:r>
+                    </a:p>
+                  </a:txBody>
+                  <a:tcPr marL="91440" marR="91440" marT="41148" marB="41148" anchor="ctr">
+                    <a:solidFill>
+                      <a:srgbClr val="FFFFFF"/>
+                    </a:solidFill>
+                    <a:lnL>
+                      <a:noFill/>
+                    </a:lnL>
+                    <a:lnR>
+                      <a:noFill/>
+                    </a:lnR>
+                    <a:lnT>
+                      <a:noFill/>
+                    </a:lnT>
+                    <a:lnB>
+                      <a:noFill/>
                     </a:lnB>
                   </a:tcPr>
                 </a:tc>
@@ -17259,7 +15447,7 @@
                           </a:solidFill>
                           <a:latin typeface="Calibri"/>
                         </a:rPr>
-                        <a:t>Carência</a:t>
+                        <a:t>Juros/amortização</a:t>
                       </a:r>
                     </a:p>
                   </a:txBody>
@@ -17306,51 +15494,51 @@
                           </a:solidFill>
                           <a:latin typeface="Calibri"/>
                         </a:rPr>
-                        <a:t>Prazo remetido ao suplemento;</a:t>
-                      </a:r>
-                    </a:p>
-                    <a:p>
-                      <a:pPr algn="ctr">
-                        <a:lnSpc>
-                          <a:spcPct val="100000"/>
-                        </a:lnSpc>
-                        <a:spcBef>
-                          <a:spcPts val="0"/>
-                        </a:spcBef>
-                        <a:spcAft>
-                          <a:spcPts val="0"/>
-                        </a:spcAft>
-                      </a:pPr>
-                      <a:r>
-                        <a:rPr sz="1300" b="0">
-                          <a:solidFill>
-                            <a:srgbClr val="1F1F1F"/>
-                          </a:solidFill>
-                          <a:latin typeface="Calibri"/>
-                        </a:rPr>
-                        <a:t>carência efetiva por série não</a:t>
-                      </a:r>
-                    </a:p>
-                    <a:p>
-                      <a:pPr algn="ctr">
-                        <a:lnSpc>
-                          <a:spcPct val="100000"/>
-                        </a:lnSpc>
-                        <a:spcBef>
-                          <a:spcPts val="0"/>
-                        </a:spcBef>
-                        <a:spcAft>
-                          <a:spcPts val="0"/>
-                        </a:spcAft>
-                      </a:pPr>
-                      <a:r>
-                        <a:rPr sz="1300" b="0">
-                          <a:solidFill>
-                            <a:srgbClr val="1F1F1F"/>
-                          </a:solidFill>
-                          <a:latin typeface="Calibri"/>
-                        </a:rPr>
-                        <a:t>confirmada.</a:t>
+                        <a:t>Pagamentos sujeitos à</a:t>
+                      </a:r>
+                    </a:p>
+                    <a:p>
+                      <a:pPr algn="ctr">
+                        <a:lnSpc>
+                          <a:spcPct val="100000"/>
+                        </a:lnSpc>
+                        <a:spcBef>
+                          <a:spcPts val="0"/>
+                        </a:spcBef>
+                        <a:spcAft>
+                          <a:spcPts val="0"/>
+                        </a:spcAft>
+                      </a:pPr>
+                      <a:r>
+                        <a:rPr sz="1300" b="0">
+                          <a:solidFill>
+                            <a:srgbClr val="1F1F1F"/>
+                          </a:solidFill>
+                          <a:latin typeface="Calibri"/>
+                        </a:rPr>
+                        <a:t>disponibilidade de caixa e</a:t>
+                      </a:r>
+                    </a:p>
+                    <a:p>
+                      <a:pPr algn="ctr">
+                        <a:lnSpc>
+                          <a:spcPct val="100000"/>
+                        </a:lnSpc>
+                        <a:spcBef>
+                          <a:spcPts val="0"/>
+                        </a:spcBef>
+                        <a:spcAft>
+                          <a:spcPts val="0"/>
+                        </a:spcAft>
+                      </a:pPr>
+                      <a:r>
+                        <a:rPr sz="1300" b="0">
+                          <a:solidFill>
+                            <a:srgbClr val="1F1F1F"/>
+                          </a:solidFill>
+                          <a:latin typeface="Calibri"/>
+                        </a:rPr>
+                        <a:t>waterfall</a:t>
                       </a:r>
                     </a:p>
                   </a:txBody>
@@ -17397,51 +15585,51 @@
                           </a:solidFill>
                           <a:latin typeface="Calibri"/>
                         </a:rPr>
-                        <a:t>Prazo remetido ao suplemento;</a:t>
-                      </a:r>
-                    </a:p>
-                    <a:p>
-                      <a:pPr algn="ctr">
-                        <a:lnSpc>
-                          <a:spcPct val="100000"/>
-                        </a:lnSpc>
-                        <a:spcBef>
-                          <a:spcPts val="0"/>
-                        </a:spcBef>
-                        <a:spcAft>
-                          <a:spcPts val="0"/>
-                        </a:spcAft>
-                      </a:pPr>
-                      <a:r>
-                        <a:rPr sz="1300" b="0">
-                          <a:solidFill>
-                            <a:srgbClr val="1F1F1F"/>
-                          </a:solidFill>
-                          <a:latin typeface="Calibri"/>
-                        </a:rPr>
-                        <a:t>carência efetiva por série não</a:t>
-                      </a:r>
-                    </a:p>
-                    <a:p>
-                      <a:pPr algn="ctr">
-                        <a:lnSpc>
-                          <a:spcPct val="100000"/>
-                        </a:lnSpc>
-                        <a:spcBef>
-                          <a:spcPts val="0"/>
-                        </a:spcBef>
-                        <a:spcAft>
-                          <a:spcPts val="0"/>
-                        </a:spcAft>
-                      </a:pPr>
-                      <a:r>
-                        <a:rPr sz="1300" b="0">
-                          <a:solidFill>
-                            <a:srgbClr val="1F1F1F"/>
-                          </a:solidFill>
-                          <a:latin typeface="Calibri"/>
-                        </a:rPr>
-                        <a:t>confirmada.</a:t>
+                        <a:t>Pagamentos sujeitos à</a:t>
+                      </a:r>
+                    </a:p>
+                    <a:p>
+                      <a:pPr algn="ctr">
+                        <a:lnSpc>
+                          <a:spcPct val="100000"/>
+                        </a:lnSpc>
+                        <a:spcBef>
+                          <a:spcPts val="0"/>
+                        </a:spcBef>
+                        <a:spcAft>
+                          <a:spcPts val="0"/>
+                        </a:spcAft>
+                      </a:pPr>
+                      <a:r>
+                        <a:rPr sz="1300" b="0">
+                          <a:solidFill>
+                            <a:srgbClr val="1F1F1F"/>
+                          </a:solidFill>
+                          <a:latin typeface="Calibri"/>
+                        </a:rPr>
+                        <a:t>disponibilidade de caixa e</a:t>
+                      </a:r>
+                    </a:p>
+                    <a:p>
+                      <a:pPr algn="ctr">
+                        <a:lnSpc>
+                          <a:spcPct val="100000"/>
+                        </a:lnSpc>
+                        <a:spcBef>
+                          <a:spcPts val="0"/>
+                        </a:spcBef>
+                        <a:spcAft>
+                          <a:spcPts val="0"/>
+                        </a:spcAft>
+                      </a:pPr>
+                      <a:r>
+                        <a:rPr sz="1300" b="0">
+                          <a:solidFill>
+                            <a:srgbClr val="1F1F1F"/>
+                          </a:solidFill>
+                          <a:latin typeface="Calibri"/>
+                        </a:rPr>
+                        <a:t>waterfall</a:t>
                       </a:r>
                     </a:p>
                   </a:txBody>
@@ -17488,51 +15676,51 @@
                           </a:solidFill>
                           <a:latin typeface="Calibri"/>
                         </a:rPr>
-                        <a:t>Prazo remetido ao suplemento;</a:t>
-                      </a:r>
-                    </a:p>
-                    <a:p>
-                      <a:pPr algn="ctr">
-                        <a:lnSpc>
-                          <a:spcPct val="100000"/>
-                        </a:lnSpc>
-                        <a:spcBef>
-                          <a:spcPts val="0"/>
-                        </a:spcBef>
-                        <a:spcAft>
-                          <a:spcPts val="0"/>
-                        </a:spcAft>
-                      </a:pPr>
-                      <a:r>
-                        <a:rPr sz="1300" b="0">
-                          <a:solidFill>
-                            <a:srgbClr val="1F1F1F"/>
-                          </a:solidFill>
-                          <a:latin typeface="Calibri"/>
-                        </a:rPr>
-                        <a:t>carência efetiva por série não</a:t>
-                      </a:r>
-                    </a:p>
-                    <a:p>
-                      <a:pPr algn="ctr">
-                        <a:lnSpc>
-                          <a:spcPct val="100000"/>
-                        </a:lnSpc>
-                        <a:spcBef>
-                          <a:spcPts val="0"/>
-                        </a:spcBef>
-                        <a:spcAft>
-                          <a:spcPts val="0"/>
-                        </a:spcAft>
-                      </a:pPr>
-                      <a:r>
-                        <a:rPr sz="1300" b="0">
-                          <a:solidFill>
-                            <a:srgbClr val="1F1F1F"/>
-                          </a:solidFill>
-                          <a:latin typeface="Calibri"/>
-                        </a:rPr>
-                        <a:t>confirmada.</a:t>
+                        <a:t>Pagamentos sujeitos à</a:t>
+                      </a:r>
+                    </a:p>
+                    <a:p>
+                      <a:pPr algn="ctr">
+                        <a:lnSpc>
+                          <a:spcPct val="100000"/>
+                        </a:lnSpc>
+                        <a:spcBef>
+                          <a:spcPts val="0"/>
+                        </a:spcBef>
+                        <a:spcAft>
+                          <a:spcPts val="0"/>
+                        </a:spcAft>
+                      </a:pPr>
+                      <a:r>
+                        <a:rPr sz="1300" b="0">
+                          <a:solidFill>
+                            <a:srgbClr val="1F1F1F"/>
+                          </a:solidFill>
+                          <a:latin typeface="Calibri"/>
+                        </a:rPr>
+                        <a:t>disponibilidade de caixa e</a:t>
+                      </a:r>
+                    </a:p>
+                    <a:p>
+                      <a:pPr algn="ctr">
+                        <a:lnSpc>
+                          <a:spcPct val="100000"/>
+                        </a:lnSpc>
+                        <a:spcBef>
+                          <a:spcPts val="0"/>
+                        </a:spcBef>
+                        <a:spcAft>
+                          <a:spcPts val="0"/>
+                        </a:spcAft>
+                      </a:pPr>
+                      <a:r>
+                        <a:rPr sz="1300" b="0">
+                          <a:solidFill>
+                            <a:srgbClr val="1F1F1F"/>
+                          </a:solidFill>
+                          <a:latin typeface="Calibri"/>
+                        </a:rPr>
+                        <a:t>waterfall</a:t>
                       </a:r>
                     </a:p>
                   </a:txBody>
@@ -17555,395 +15743,7 @@
                   </a:tcPr>
                 </a:tc>
               </a:tr>
-              <a:tr h="845819">
-                <a:tc>
-                  <a:txBody>
-                    <a:bodyPr wrap="square">
-                      <a:noAutofit/>
-                    </a:bodyPr>
-                    <a:lstStyle/>
-                    <a:p>
-                      <a:pPr algn="l">
-                        <a:lnSpc>
-                          <a:spcPct val="100000"/>
-                        </a:lnSpc>
-                        <a:spcBef>
-                          <a:spcPts val="0"/>
-                        </a:spcBef>
-                        <a:spcAft>
-                          <a:spcPts val="0"/>
-                        </a:spcAft>
-                      </a:pPr>
-                      <a:r>
-                        <a:rPr sz="1300" b="1">
-                          <a:solidFill>
-                            <a:srgbClr val="1F1F1F"/>
-                          </a:solidFill>
-                          <a:latin typeface="Calibri"/>
-                        </a:rPr>
-                        <a:t>Juros/amortização</a:t>
-                      </a:r>
-                    </a:p>
-                  </a:txBody>
-                  <a:tcPr marL="91440" marR="91440" marT="41148" marB="41148" anchor="ctr">
-                    <a:solidFill>
-                      <a:srgbClr val="FFFFFF"/>
-                    </a:solidFill>
-                    <a:lnL>
-                      <a:noFill/>
-                    </a:lnL>
-                    <a:lnR>
-                      <a:noFill/>
-                    </a:lnR>
-                    <a:lnT>
-                      <a:noFill/>
-                    </a:lnT>
-                    <a:lnB>
-                      <a:noFill/>
-                    </a:lnB>
-                  </a:tcPr>
-                </a:tc>
-                <a:tc>
-                  <a:txBody>
-                    <a:bodyPr wrap="square">
-                      <a:noAutofit/>
-                    </a:bodyPr>
-                    <a:lstStyle/>
-                    <a:p>
-                      <a:pPr algn="ctr">
-                        <a:lnSpc>
-                          <a:spcPct val="100000"/>
-                        </a:lnSpc>
-                        <a:spcBef>
-                          <a:spcPts val="0"/>
-                        </a:spcBef>
-                        <a:spcAft>
-                          <a:spcPts val="0"/>
-                        </a:spcAft>
-                      </a:pPr>
-                      <a:r>
-                        <a:rPr sz="1300" b="0">
-                          <a:solidFill>
-                            <a:srgbClr val="1F1F1F"/>
-                          </a:solidFill>
-                          <a:latin typeface="Calibri"/>
-                        </a:rPr>
-                        <a:t>Pagamentos sujeitos à</a:t>
-                      </a:r>
-                    </a:p>
-                    <a:p>
-                      <a:pPr algn="ctr">
-                        <a:lnSpc>
-                          <a:spcPct val="100000"/>
-                        </a:lnSpc>
-                        <a:spcBef>
-                          <a:spcPts val="0"/>
-                        </a:spcBef>
-                        <a:spcAft>
-                          <a:spcPts val="0"/>
-                        </a:spcAft>
-                      </a:pPr>
-                      <a:r>
-                        <a:rPr sz="1300" b="0">
-                          <a:solidFill>
-                            <a:srgbClr val="1F1F1F"/>
-                          </a:solidFill>
-                          <a:latin typeface="Calibri"/>
-                        </a:rPr>
-                        <a:t>disponibilidade de caixa e</a:t>
-                      </a:r>
-                    </a:p>
-                    <a:p>
-                      <a:pPr algn="ctr">
-                        <a:lnSpc>
-                          <a:spcPct val="100000"/>
-                        </a:lnSpc>
-                        <a:spcBef>
-                          <a:spcPts val="0"/>
-                        </a:spcBef>
-                        <a:spcAft>
-                          <a:spcPts val="0"/>
-                        </a:spcAft>
-                      </a:pPr>
-                      <a:r>
-                        <a:rPr sz="1300" b="0">
-                          <a:solidFill>
-                            <a:srgbClr val="1F1F1F"/>
-                          </a:solidFill>
-                          <a:latin typeface="Calibri"/>
-                        </a:rPr>
-                        <a:t>waterfall; cronograma fechado</a:t>
-                      </a:r>
-                    </a:p>
-                    <a:p>
-                      <a:pPr algn="ctr">
-                        <a:lnSpc>
-                          <a:spcPct val="100000"/>
-                        </a:lnSpc>
-                        <a:spcBef>
-                          <a:spcPts val="0"/>
-                        </a:spcBef>
-                        <a:spcAft>
-                          <a:spcPts val="0"/>
-                        </a:spcAft>
-                      </a:pPr>
-                      <a:r>
-                        <a:rPr sz="1300" b="0">
-                          <a:solidFill>
-                            <a:srgbClr val="1F1F1F"/>
-                          </a:solidFill>
-                          <a:latin typeface="Calibri"/>
-                        </a:rPr>
-                        <a:t>não identificado.</a:t>
-                      </a:r>
-                    </a:p>
-                  </a:txBody>
-                  <a:tcPr marL="91440" marR="91440" marT="41148" marB="41148" anchor="ctr">
-                    <a:solidFill>
-                      <a:srgbClr val="FFFFFF"/>
-                    </a:solidFill>
-                    <a:lnL>
-                      <a:noFill/>
-                    </a:lnL>
-                    <a:lnR>
-                      <a:noFill/>
-                    </a:lnR>
-                    <a:lnT>
-                      <a:noFill/>
-                    </a:lnT>
-                    <a:lnB>
-                      <a:noFill/>
-                    </a:lnB>
-                  </a:tcPr>
-                </a:tc>
-                <a:tc>
-                  <a:txBody>
-                    <a:bodyPr wrap="square">
-                      <a:noAutofit/>
-                    </a:bodyPr>
-                    <a:lstStyle/>
-                    <a:p>
-                      <a:pPr algn="ctr">
-                        <a:lnSpc>
-                          <a:spcPct val="100000"/>
-                        </a:lnSpc>
-                        <a:spcBef>
-                          <a:spcPts val="0"/>
-                        </a:spcBef>
-                        <a:spcAft>
-                          <a:spcPts val="0"/>
-                        </a:spcAft>
-                      </a:pPr>
-                      <a:r>
-                        <a:rPr sz="1300" b="0">
-                          <a:solidFill>
-                            <a:srgbClr val="1F1F1F"/>
-                          </a:solidFill>
-                          <a:latin typeface="Calibri"/>
-                        </a:rPr>
-                        <a:t>Pagamentos sujeitos à</a:t>
-                      </a:r>
-                    </a:p>
-                    <a:p>
-                      <a:pPr algn="ctr">
-                        <a:lnSpc>
-                          <a:spcPct val="100000"/>
-                        </a:lnSpc>
-                        <a:spcBef>
-                          <a:spcPts val="0"/>
-                        </a:spcBef>
-                        <a:spcAft>
-                          <a:spcPts val="0"/>
-                        </a:spcAft>
-                      </a:pPr>
-                      <a:r>
-                        <a:rPr sz="1300" b="0">
-                          <a:solidFill>
-                            <a:srgbClr val="1F1F1F"/>
-                          </a:solidFill>
-                          <a:latin typeface="Calibri"/>
-                        </a:rPr>
-                        <a:t>disponibilidade de caixa e</a:t>
-                      </a:r>
-                    </a:p>
-                    <a:p>
-                      <a:pPr algn="ctr">
-                        <a:lnSpc>
-                          <a:spcPct val="100000"/>
-                        </a:lnSpc>
-                        <a:spcBef>
-                          <a:spcPts val="0"/>
-                        </a:spcBef>
-                        <a:spcAft>
-                          <a:spcPts val="0"/>
-                        </a:spcAft>
-                      </a:pPr>
-                      <a:r>
-                        <a:rPr sz="1300" b="0">
-                          <a:solidFill>
-                            <a:srgbClr val="1F1F1F"/>
-                          </a:solidFill>
-                          <a:latin typeface="Calibri"/>
-                        </a:rPr>
-                        <a:t>waterfall; cronograma fechado</a:t>
-                      </a:r>
-                    </a:p>
-                    <a:p>
-                      <a:pPr algn="ctr">
-                        <a:lnSpc>
-                          <a:spcPct val="100000"/>
-                        </a:lnSpc>
-                        <a:spcBef>
-                          <a:spcPts val="0"/>
-                        </a:spcBef>
-                        <a:spcAft>
-                          <a:spcPts val="0"/>
-                        </a:spcAft>
-                      </a:pPr>
-                      <a:r>
-                        <a:rPr sz="1300" b="0">
-                          <a:solidFill>
-                            <a:srgbClr val="1F1F1F"/>
-                          </a:solidFill>
-                          <a:latin typeface="Calibri"/>
-                        </a:rPr>
-                        <a:t>não identificado.</a:t>
-                      </a:r>
-                    </a:p>
-                  </a:txBody>
-                  <a:tcPr marL="91440" marR="91440" marT="41148" marB="41148" anchor="ctr">
-                    <a:solidFill>
-                      <a:srgbClr val="FFFFFF"/>
-                    </a:solidFill>
-                    <a:lnL>
-                      <a:noFill/>
-                    </a:lnL>
-                    <a:lnR>
-                      <a:noFill/>
-                    </a:lnR>
-                    <a:lnT>
-                      <a:noFill/>
-                    </a:lnT>
-                    <a:lnB>
-                      <a:noFill/>
-                    </a:lnB>
-                  </a:tcPr>
-                </a:tc>
-                <a:tc>
-                  <a:txBody>
-                    <a:bodyPr wrap="square">
-                      <a:noAutofit/>
-                    </a:bodyPr>
-                    <a:lstStyle/>
-                    <a:p>
-                      <a:pPr algn="ctr">
-                        <a:lnSpc>
-                          <a:spcPct val="100000"/>
-                        </a:lnSpc>
-                        <a:spcBef>
-                          <a:spcPts val="0"/>
-                        </a:spcBef>
-                        <a:spcAft>
-                          <a:spcPts val="0"/>
-                        </a:spcAft>
-                      </a:pPr>
-                      <a:r>
-                        <a:rPr sz="1300" b="0">
-                          <a:solidFill>
-                            <a:srgbClr val="1F1F1F"/>
-                          </a:solidFill>
-                          <a:latin typeface="Calibri"/>
-                        </a:rPr>
-                        <a:t>Pagamentos sujeitos à</a:t>
-                      </a:r>
-                    </a:p>
-                    <a:p>
-                      <a:pPr algn="ctr">
-                        <a:lnSpc>
-                          <a:spcPct val="100000"/>
-                        </a:lnSpc>
-                        <a:spcBef>
-                          <a:spcPts val="0"/>
-                        </a:spcBef>
-                        <a:spcAft>
-                          <a:spcPts val="0"/>
-                        </a:spcAft>
-                      </a:pPr>
-                      <a:r>
-                        <a:rPr sz="1300" b="0">
-                          <a:solidFill>
-                            <a:srgbClr val="1F1F1F"/>
-                          </a:solidFill>
-                          <a:latin typeface="Calibri"/>
-                        </a:rPr>
-                        <a:t>disponibilidade de caixa e</a:t>
-                      </a:r>
-                    </a:p>
-                    <a:p>
-                      <a:pPr algn="ctr">
-                        <a:lnSpc>
-                          <a:spcPct val="100000"/>
-                        </a:lnSpc>
-                        <a:spcBef>
-                          <a:spcPts val="0"/>
-                        </a:spcBef>
-                        <a:spcAft>
-                          <a:spcPts val="0"/>
-                        </a:spcAft>
-                      </a:pPr>
-                      <a:r>
-                        <a:rPr sz="1300" b="0">
-                          <a:solidFill>
-                            <a:srgbClr val="1F1F1F"/>
-                          </a:solidFill>
-                          <a:latin typeface="Calibri"/>
-                        </a:rPr>
-                        <a:t>waterfall; cronograma fechado</a:t>
-                      </a:r>
-                    </a:p>
-                    <a:p>
-                      <a:pPr algn="ctr">
-                        <a:lnSpc>
-                          <a:spcPct val="100000"/>
-                        </a:lnSpc>
-                        <a:spcBef>
-                          <a:spcPts val="0"/>
-                        </a:spcBef>
-                        <a:spcAft>
-                          <a:spcPts val="0"/>
-                        </a:spcAft>
-                      </a:pPr>
-                      <a:r>
-                        <a:rPr sz="1300" b="0">
-                          <a:solidFill>
-                            <a:srgbClr val="1F1F1F"/>
-                          </a:solidFill>
-                          <a:latin typeface="Calibri"/>
-                        </a:rPr>
-                        <a:t>não identificado.</a:t>
-                      </a:r>
-                    </a:p>
-                  </a:txBody>
-                  <a:tcPr marL="91440" marR="91440" marT="41148" marB="41148" anchor="ctr">
-                    <a:solidFill>
-                      <a:srgbClr val="FFFFFF"/>
-                    </a:solidFill>
-                    <a:lnL>
-                      <a:noFill/>
-                    </a:lnL>
-                    <a:lnR>
-                      <a:noFill/>
-                    </a:lnR>
-                    <a:lnT>
-                      <a:noFill/>
-                    </a:lnT>
-                    <a:lnB>
-                      <a:noFill/>
-                    </a:lnB>
-                  </a:tcPr>
-                </a:tc>
-              </a:tr>
-              <a:tr h="845819">
+              <a:tr h="283464">
                 <a:tc>
                   <a:txBody>
                     <a:bodyPr wrap="square">
@@ -18018,73 +15818,7 @@
                           </a:solidFill>
                           <a:latin typeface="Calibri"/>
                         </a:rPr>
-                        <a:t>Data final por série remetida ao</a:t>
-                      </a:r>
-                    </a:p>
-                    <a:p>
-                      <a:pPr algn="ctr">
-                        <a:lnSpc>
-                          <a:spcPct val="100000"/>
-                        </a:lnSpc>
-                        <a:spcBef>
-                          <a:spcPts val="0"/>
-                        </a:spcBef>
-                        <a:spcAft>
-                          <a:spcPts val="0"/>
-                        </a:spcAft>
-                      </a:pPr>
-                      <a:r>
-                        <a:rPr sz="1300" b="0">
-                          <a:solidFill>
-                            <a:srgbClr val="1F1F1F"/>
-                          </a:solidFill>
-                          <a:latin typeface="Calibri"/>
-                        </a:rPr>
-                        <a:t>suplemento; primeira</a:t>
-                      </a:r>
-                    </a:p>
-                    <a:p>
-                      <a:pPr algn="ctr">
-                        <a:lnSpc>
-                          <a:spcPct val="100000"/>
-                        </a:lnSpc>
-                        <a:spcBef>
-                          <a:spcPts val="0"/>
-                        </a:spcBef>
-                        <a:spcAft>
-                          <a:spcPts val="0"/>
-                        </a:spcAft>
-                      </a:pPr>
-                      <a:r>
-                        <a:rPr sz="1300" b="0">
-                          <a:solidFill>
-                            <a:srgbClr val="1F1F1F"/>
-                          </a:solidFill>
-                          <a:latin typeface="Calibri"/>
-                        </a:rPr>
-                        <a:t>integralização efetiva não</a:t>
-                      </a:r>
-                    </a:p>
-                    <a:p>
-                      <a:pPr algn="ctr">
-                        <a:lnSpc>
-                          <a:spcPct val="100000"/>
-                        </a:lnSpc>
-                        <a:spcBef>
-                          <a:spcPts val="0"/>
-                        </a:spcBef>
-                        <a:spcAft>
-                          <a:spcPts val="0"/>
-                        </a:spcAft>
-                      </a:pPr>
-                      <a:r>
-                        <a:rPr sz="1300" b="0">
-                          <a:solidFill>
-                            <a:srgbClr val="1F1F1F"/>
-                          </a:solidFill>
-                          <a:latin typeface="Calibri"/>
-                        </a:rPr>
-                        <a:t>confirmada.</a:t>
+                        <a:t>-</a:t>
                       </a:r>
                     </a:p>
                   </a:txBody>
@@ -18133,73 +15867,7 @@
                           </a:solidFill>
                           <a:latin typeface="Calibri"/>
                         </a:rPr>
-                        <a:t>Data final por série remetida ao</a:t>
-                      </a:r>
-                    </a:p>
-                    <a:p>
-                      <a:pPr algn="ctr">
-                        <a:lnSpc>
-                          <a:spcPct val="100000"/>
-                        </a:lnSpc>
-                        <a:spcBef>
-                          <a:spcPts val="0"/>
-                        </a:spcBef>
-                        <a:spcAft>
-                          <a:spcPts val="0"/>
-                        </a:spcAft>
-                      </a:pPr>
-                      <a:r>
-                        <a:rPr sz="1300" b="0">
-                          <a:solidFill>
-                            <a:srgbClr val="1F1F1F"/>
-                          </a:solidFill>
-                          <a:latin typeface="Calibri"/>
-                        </a:rPr>
-                        <a:t>suplemento; primeira</a:t>
-                      </a:r>
-                    </a:p>
-                    <a:p>
-                      <a:pPr algn="ctr">
-                        <a:lnSpc>
-                          <a:spcPct val="100000"/>
-                        </a:lnSpc>
-                        <a:spcBef>
-                          <a:spcPts val="0"/>
-                        </a:spcBef>
-                        <a:spcAft>
-                          <a:spcPts val="0"/>
-                        </a:spcAft>
-                      </a:pPr>
-                      <a:r>
-                        <a:rPr sz="1300" b="0">
-                          <a:solidFill>
-                            <a:srgbClr val="1F1F1F"/>
-                          </a:solidFill>
-                          <a:latin typeface="Calibri"/>
-                        </a:rPr>
-                        <a:t>integralização efetiva não</a:t>
-                      </a:r>
-                    </a:p>
-                    <a:p>
-                      <a:pPr algn="ctr">
-                        <a:lnSpc>
-                          <a:spcPct val="100000"/>
-                        </a:lnSpc>
-                        <a:spcBef>
-                          <a:spcPts val="0"/>
-                        </a:spcBef>
-                        <a:spcAft>
-                          <a:spcPts val="0"/>
-                        </a:spcAft>
-                      </a:pPr>
-                      <a:r>
-                        <a:rPr sz="1300" b="0">
-                          <a:solidFill>
-                            <a:srgbClr val="1F1F1F"/>
-                          </a:solidFill>
-                          <a:latin typeface="Calibri"/>
-                        </a:rPr>
-                        <a:t>confirmada.</a:t>
+                        <a:t>-</a:t>
                       </a:r>
                     </a:p>
                   </a:txBody>
@@ -18248,73 +15916,7 @@
                           </a:solidFill>
                           <a:latin typeface="Calibri"/>
                         </a:rPr>
-                        <a:t>Data final por série remetida ao</a:t>
-                      </a:r>
-                    </a:p>
-                    <a:p>
-                      <a:pPr algn="ctr">
-                        <a:lnSpc>
-                          <a:spcPct val="100000"/>
-                        </a:lnSpc>
-                        <a:spcBef>
-                          <a:spcPts val="0"/>
-                        </a:spcBef>
-                        <a:spcAft>
-                          <a:spcPts val="0"/>
-                        </a:spcAft>
-                      </a:pPr>
-                      <a:r>
-                        <a:rPr sz="1300" b="0">
-                          <a:solidFill>
-                            <a:srgbClr val="1F1F1F"/>
-                          </a:solidFill>
-                          <a:latin typeface="Calibri"/>
-                        </a:rPr>
-                        <a:t>suplemento; primeira</a:t>
-                      </a:r>
-                    </a:p>
-                    <a:p>
-                      <a:pPr algn="ctr">
-                        <a:lnSpc>
-                          <a:spcPct val="100000"/>
-                        </a:lnSpc>
-                        <a:spcBef>
-                          <a:spcPts val="0"/>
-                        </a:spcBef>
-                        <a:spcAft>
-                          <a:spcPts val="0"/>
-                        </a:spcAft>
-                      </a:pPr>
-                      <a:r>
-                        <a:rPr sz="1300" b="0">
-                          <a:solidFill>
-                            <a:srgbClr val="1F1F1F"/>
-                          </a:solidFill>
-                          <a:latin typeface="Calibri"/>
-                        </a:rPr>
-                        <a:t>integralização efetiva não</a:t>
-                      </a:r>
-                    </a:p>
-                    <a:p>
-                      <a:pPr algn="ctr">
-                        <a:lnSpc>
-                          <a:spcPct val="100000"/>
-                        </a:lnSpc>
-                        <a:spcBef>
-                          <a:spcPts val="0"/>
-                        </a:spcBef>
-                        <a:spcAft>
-                          <a:spcPts val="0"/>
-                        </a:spcAft>
-                      </a:pPr>
-                      <a:r>
-                        <a:rPr sz="1300" b="0">
-                          <a:solidFill>
-                            <a:srgbClr val="1F1F1F"/>
-                          </a:solidFill>
-                          <a:latin typeface="Calibri"/>
-                        </a:rPr>
-                        <a:t>confirmada.</a:t>
+                        <a:t>-</a:t>
                       </a:r>
                     </a:p>
                   </a:txBody>
@@ -18521,7 +16123,7 @@
                       <a:r>
                         <a:rPr sz="1300" b="1">
                           <a:solidFill>
-                            <a:srgbClr val="1F1F1F"/>
+                            <a:srgbClr val="FFFFFF"/>
                           </a:solidFill>
                           <a:latin typeface="Calibri"/>
                         </a:rPr>
@@ -18531,7 +16133,7 @@
                   </a:txBody>
                   <a:tcPr marL="91440" marR="91440" marT="41148" marB="41148" anchor="ctr">
                     <a:solidFill>
-                      <a:srgbClr val="EC7000"/>
+                      <a:srgbClr val="FF6200"/>
                     </a:solidFill>
                     <a:lnL>
                       <a:noFill/>
@@ -18570,7 +16172,7 @@
                       <a:r>
                         <a:rPr sz="1300" b="1">
                           <a:solidFill>
-                            <a:srgbClr val="1F1F1F"/>
+                            <a:srgbClr val="FFFFFF"/>
                           </a:solidFill>
                           <a:latin typeface="Calibri"/>
                         </a:rPr>
@@ -18580,7 +16182,7 @@
                   </a:txBody>
                   <a:tcPr marL="91440" marR="91440" marT="41148" marB="41148" anchor="ctr">
                     <a:solidFill>
-                      <a:srgbClr val="EC7000"/>
+                      <a:srgbClr val="FF6200"/>
                     </a:solidFill>
                     <a:lnL>
                       <a:noFill/>
@@ -18619,7 +16221,7 @@
                       <a:r>
                         <a:rPr sz="1300" b="1">
                           <a:solidFill>
-                            <a:srgbClr val="1F1F1F"/>
+                            <a:srgbClr val="FFFFFF"/>
                           </a:solidFill>
                           <a:latin typeface="Calibri"/>
                         </a:rPr>
@@ -18629,7 +16231,7 @@
                   </a:txBody>
                   <a:tcPr marL="91440" marR="91440" marT="41148" marB="41148" anchor="ctr">
                     <a:solidFill>
-                      <a:srgbClr val="EC7000"/>
+                      <a:srgbClr val="FF6200"/>
                     </a:solidFill>
                     <a:lnL>
                       <a:noFill/>
@@ -18668,7 +16270,7 @@
                       <a:r>
                         <a:rPr sz="1300" b="1">
                           <a:solidFill>
-                            <a:srgbClr val="1F1F1F"/>
+                            <a:srgbClr val="FFFFFF"/>
                           </a:solidFill>
                           <a:latin typeface="Calibri"/>
                         </a:rPr>
@@ -18678,7 +16280,7 @@
                   </a:txBody>
                   <a:tcPr marL="91440" marR="91440" marT="41148" marB="41148" anchor="ctr">
                     <a:solidFill>
-                      <a:srgbClr val="EC7000"/>
+                      <a:srgbClr val="FF6200"/>
                     </a:solidFill>
                     <a:lnL>
                       <a:noFill/>
@@ -18717,7 +16319,7 @@
                       <a:r>
                         <a:rPr sz="1300" b="1">
                           <a:solidFill>
-                            <a:srgbClr val="1F1F1F"/>
+                            <a:srgbClr val="FFFFFF"/>
                           </a:solidFill>
                           <a:latin typeface="Calibri"/>
                         </a:rPr>
@@ -18727,7 +16329,7 @@
                   </a:txBody>
                   <a:tcPr marL="91440" marR="91440" marT="41148" marB="41148" anchor="ctr">
                     <a:solidFill>
-                      <a:srgbClr val="EC7000"/>
+                      <a:srgbClr val="FF6200"/>
                     </a:solidFill>
                     <a:lnL>
                       <a:noFill/>
@@ -20418,7 +18020,7 @@
                       <a:r>
                         <a:rPr sz="1300" b="1">
                           <a:solidFill>
-                            <a:srgbClr val="1F1F1F"/>
+                            <a:srgbClr val="FFFFFF"/>
                           </a:solidFill>
                           <a:latin typeface="Calibri"/>
                         </a:rPr>
@@ -20428,7 +18030,7 @@
                   </a:txBody>
                   <a:tcPr marL="91440" marR="91440" marT="41148" marB="41148" anchor="ctr">
                     <a:solidFill>
-                      <a:srgbClr val="EC7000"/>
+                      <a:srgbClr val="FF6200"/>
                     </a:solidFill>
                     <a:lnL>
                       <a:noFill/>
@@ -20467,7 +18069,7 @@
                       <a:r>
                         <a:rPr sz="1300" b="1">
                           <a:solidFill>
-                            <a:srgbClr val="1F1F1F"/>
+                            <a:srgbClr val="FFFFFF"/>
                           </a:solidFill>
                           <a:latin typeface="Calibri"/>
                         </a:rPr>
@@ -20477,7 +18079,7 @@
                   </a:txBody>
                   <a:tcPr marL="91440" marR="91440" marT="41148" marB="41148" anchor="ctr">
                     <a:solidFill>
-                      <a:srgbClr val="EC7000"/>
+                      <a:srgbClr val="FF6200"/>
                     </a:solidFill>
                     <a:lnL>
                       <a:noFill/>
@@ -20516,7 +18118,7 @@
                       <a:r>
                         <a:rPr sz="1300" b="1">
                           <a:solidFill>
-                            <a:srgbClr val="1F1F1F"/>
+                            <a:srgbClr val="FFFFFF"/>
                           </a:solidFill>
                           <a:latin typeface="Calibri"/>
                         </a:rPr>
@@ -20526,7 +18128,7 @@
                   </a:txBody>
                   <a:tcPr marL="91440" marR="91440" marT="41148" marB="41148" anchor="ctr">
                     <a:solidFill>
-                      <a:srgbClr val="EC7000"/>
+                      <a:srgbClr val="FF6200"/>
                     </a:solidFill>
                     <a:lnL>
                       <a:noFill/>
@@ -20565,7 +18167,7 @@
                       <a:r>
                         <a:rPr sz="1300" b="1">
                           <a:solidFill>
-                            <a:srgbClr val="1F1F1F"/>
+                            <a:srgbClr val="FFFFFF"/>
                           </a:solidFill>
                           <a:latin typeface="Calibri"/>
                         </a:rPr>
@@ -20575,7 +18177,7 @@
                   </a:txBody>
                   <a:tcPr marL="91440" marR="91440" marT="41148" marB="41148" anchor="ctr">
                     <a:solidFill>
-                      <a:srgbClr val="EC7000"/>
+                      <a:srgbClr val="FF6200"/>
                     </a:solidFill>
                     <a:lnL>
                       <a:noFill/>
@@ -21603,7 +19205,7 @@
         </p:nvGraphicFramePr>
         <p:xfrm>
           <a:off x="438912" y="932688"/>
-          <a:ext cx="11313868" cy="4713730"/>
+          <a:ext cx="11313868" cy="4338826"/>
         </p:xfrm>
         <a:graphic>
           <a:graphicData uri="http://schemas.openxmlformats.org/drawingml/2006/table">
@@ -21640,7 +19242,7 @@
                       <a:r>
                         <a:rPr sz="1300" b="1">
                           <a:solidFill>
-                            <a:srgbClr val="1F1F1F"/>
+                            <a:srgbClr val="FFFFFF"/>
                           </a:solidFill>
                           <a:latin typeface="Calibri"/>
                         </a:rPr>
@@ -21650,7 +19252,7 @@
                   </a:txBody>
                   <a:tcPr marL="91440" marR="91440" marT="41148" marB="41148" anchor="ctr">
                     <a:solidFill>
-                      <a:srgbClr val="EC7000"/>
+                      <a:srgbClr val="FF6200"/>
                     </a:solidFill>
                     <a:lnL>
                       <a:noFill/>
@@ -21689,7 +19291,7 @@
                       <a:r>
                         <a:rPr sz="1300" b="1">
                           <a:solidFill>
-                            <a:srgbClr val="1F1F1F"/>
+                            <a:srgbClr val="FFFFFF"/>
                           </a:solidFill>
                           <a:latin typeface="Calibri"/>
                         </a:rPr>
@@ -21699,7 +19301,7 @@
                   </a:txBody>
                   <a:tcPr marL="91440" marR="91440" marT="41148" marB="41148" anchor="ctr">
                     <a:solidFill>
-                      <a:srgbClr val="EC7000"/>
+                      <a:srgbClr val="FF6200"/>
                     </a:solidFill>
                     <a:lnL>
                       <a:noFill/>
@@ -21738,7 +19340,7 @@
                       <a:r>
                         <a:rPr sz="1300" b="1">
                           <a:solidFill>
-                            <a:srgbClr val="1F1F1F"/>
+                            <a:srgbClr val="FFFFFF"/>
                           </a:solidFill>
                           <a:latin typeface="Calibri"/>
                         </a:rPr>
@@ -21748,7 +19350,7 @@
                   </a:txBody>
                   <a:tcPr marL="91440" marR="91440" marT="41148" marB="41148" anchor="ctr">
                     <a:solidFill>
-                      <a:srgbClr val="EC7000"/>
+                      <a:srgbClr val="FF6200"/>
                     </a:solidFill>
                     <a:lnL>
                       <a:noFill/>
@@ -21787,7 +19389,7 @@
                       <a:r>
                         <a:rPr sz="1300" b="1">
                           <a:solidFill>
-                            <a:srgbClr val="1F1F1F"/>
+                            <a:srgbClr val="FFFFFF"/>
                           </a:solidFill>
                           <a:latin typeface="Calibri"/>
                         </a:rPr>
@@ -21797,7 +19399,7 @@
                   </a:txBody>
                   <a:tcPr marL="91440" marR="91440" marT="41148" marB="41148" anchor="ctr">
                     <a:solidFill>
-                      <a:srgbClr val="EC7000"/>
+                      <a:srgbClr val="FF6200"/>
                     </a:solidFill>
                     <a:lnL>
                       <a:noFill/>
@@ -21836,7 +19438,7 @@
                       <a:r>
                         <a:rPr sz="1300" b="1">
                           <a:solidFill>
-                            <a:srgbClr val="1F1F1F"/>
+                            <a:srgbClr val="FFFFFF"/>
                           </a:solidFill>
                           <a:latin typeface="Calibri"/>
                         </a:rPr>
@@ -21846,7 +19448,7 @@
                   </a:txBody>
                   <a:tcPr marL="91440" marR="91440" marT="41148" marB="41148" anchor="ctr">
                     <a:solidFill>
-                      <a:srgbClr val="EC7000"/>
+                      <a:srgbClr val="FF6200"/>
                     </a:solidFill>
                     <a:lnL>
                       <a:noFill/>
@@ -23918,7 +21520,7 @@
                   </a:tcPr>
                 </a:tc>
               </a:tr>
-              <a:tr h="658368">
+              <a:tr h="283464">
                 <a:tc>
                   <a:txBody>
                     <a:bodyPr wrap="square">
@@ -23993,51 +21595,7 @@
                           </a:solidFill>
                           <a:latin typeface="Calibri"/>
                         </a:rPr>
-                        <a:t>Sem competência IME</a:t>
-                      </a:r>
-                    </a:p>
-                    <a:p>
-                      <a:pPr algn="ctr">
-                        <a:lnSpc>
-                          <a:spcPct val="100000"/>
-                        </a:lnSpc>
-                        <a:spcBef>
-                          <a:spcPts val="0"/>
-                        </a:spcBef>
-                        <a:spcAft>
-                          <a:spcPts val="0"/>
-                        </a:spcAft>
-                      </a:pPr>
-                      <a:r>
-                        <a:rPr sz="1300" b="0">
-                          <a:solidFill>
-                            <a:srgbClr val="1F1F1F"/>
-                          </a:solidFill>
-                          <a:latin typeface="Calibri"/>
-                        </a:rPr>
-                        <a:t>carregada em cache</a:t>
-                      </a:r>
-                    </a:p>
-                    <a:p>
-                      <a:pPr algn="ctr">
-                        <a:lnSpc>
-                          <a:spcPct val="100000"/>
-                        </a:lnSpc>
-                        <a:spcBef>
-                          <a:spcPts val="0"/>
-                        </a:spcBef>
-                        <a:spcAft>
-                          <a:spcPts val="0"/>
-                        </a:spcAft>
-                      </a:pPr>
-                      <a:r>
-                        <a:rPr sz="1300" b="0">
-                          <a:solidFill>
-                            <a:srgbClr val="1F1F1F"/>
-                          </a:solidFill>
-                          <a:latin typeface="Calibri"/>
-                        </a:rPr>
-                        <a:t>local</a:t>
+                        <a:t>-</a:t>
                       </a:r>
                     </a:p>
                   </a:txBody>
@@ -24086,51 +21644,7 @@
                           </a:solidFill>
                           <a:latin typeface="Calibri"/>
                         </a:rPr>
-                        <a:t>Sem competência IME</a:t>
-                      </a:r>
-                    </a:p>
-                    <a:p>
-                      <a:pPr algn="ctr">
-                        <a:lnSpc>
-                          <a:spcPct val="100000"/>
-                        </a:lnSpc>
-                        <a:spcBef>
-                          <a:spcPts val="0"/>
-                        </a:spcBef>
-                        <a:spcAft>
-                          <a:spcPts val="0"/>
-                        </a:spcAft>
-                      </a:pPr>
-                      <a:r>
-                        <a:rPr sz="1300" b="0">
-                          <a:solidFill>
-                            <a:srgbClr val="1F1F1F"/>
-                          </a:solidFill>
-                          <a:latin typeface="Calibri"/>
-                        </a:rPr>
-                        <a:t>carregada em cache</a:t>
-                      </a:r>
-                    </a:p>
-                    <a:p>
-                      <a:pPr algn="ctr">
-                        <a:lnSpc>
-                          <a:spcPct val="100000"/>
-                        </a:lnSpc>
-                        <a:spcBef>
-                          <a:spcPts val="0"/>
-                        </a:spcBef>
-                        <a:spcAft>
-                          <a:spcPts val="0"/>
-                        </a:spcAft>
-                      </a:pPr>
-                      <a:r>
-                        <a:rPr sz="1300" b="0">
-                          <a:solidFill>
-                            <a:srgbClr val="1F1F1F"/>
-                          </a:solidFill>
-                          <a:latin typeface="Calibri"/>
-                        </a:rPr>
-                        <a:t>local</a:t>
+                        <a:t>-</a:t>
                       </a:r>
                     </a:p>
                   </a:txBody>
@@ -24179,51 +21693,7 @@
                           </a:solidFill>
                           <a:latin typeface="Calibri"/>
                         </a:rPr>
-                        <a:t>Sem competência IME</a:t>
-                      </a:r>
-                    </a:p>
-                    <a:p>
-                      <a:pPr algn="ctr">
-                        <a:lnSpc>
-                          <a:spcPct val="100000"/>
-                        </a:lnSpc>
-                        <a:spcBef>
-                          <a:spcPts val="0"/>
-                        </a:spcBef>
-                        <a:spcAft>
-                          <a:spcPts val="0"/>
-                        </a:spcAft>
-                      </a:pPr>
-                      <a:r>
-                        <a:rPr sz="1300" b="0">
-                          <a:solidFill>
-                            <a:srgbClr val="1F1F1F"/>
-                          </a:solidFill>
-                          <a:latin typeface="Calibri"/>
-                        </a:rPr>
-                        <a:t>carregada em cache</a:t>
-                      </a:r>
-                    </a:p>
-                    <a:p>
-                      <a:pPr algn="ctr">
-                        <a:lnSpc>
-                          <a:spcPct val="100000"/>
-                        </a:lnSpc>
-                        <a:spcBef>
-                          <a:spcPts val="0"/>
-                        </a:spcBef>
-                        <a:spcAft>
-                          <a:spcPts val="0"/>
-                        </a:spcAft>
-                      </a:pPr>
-                      <a:r>
-                        <a:rPr sz="1300" b="0">
-                          <a:solidFill>
-                            <a:srgbClr val="1F1F1F"/>
-                          </a:solidFill>
-                          <a:latin typeface="Calibri"/>
-                        </a:rPr>
-                        <a:t>local</a:t>
+                        <a:t>-</a:t>
                       </a:r>
                     </a:p>
                   </a:txBody>
@@ -24272,51 +21742,7 @@
                           </a:solidFill>
                           <a:latin typeface="Calibri"/>
                         </a:rPr>
-                        <a:t>Sem competência IME</a:t>
-                      </a:r>
-                    </a:p>
-                    <a:p>
-                      <a:pPr algn="ctr">
-                        <a:lnSpc>
-                          <a:spcPct val="100000"/>
-                        </a:lnSpc>
-                        <a:spcBef>
-                          <a:spcPts val="0"/>
-                        </a:spcBef>
-                        <a:spcAft>
-                          <a:spcPts val="0"/>
-                        </a:spcAft>
-                      </a:pPr>
-                      <a:r>
-                        <a:rPr sz="1300" b="0">
-                          <a:solidFill>
-                            <a:srgbClr val="1F1F1F"/>
-                          </a:solidFill>
-                          <a:latin typeface="Calibri"/>
-                        </a:rPr>
-                        <a:t>carregada em cache</a:t>
-                      </a:r>
-                    </a:p>
-                    <a:p>
-                      <a:pPr algn="ctr">
-                        <a:lnSpc>
-                          <a:spcPct val="100000"/>
-                        </a:lnSpc>
-                        <a:spcBef>
-                          <a:spcPts val="0"/>
-                        </a:spcBef>
-                        <a:spcAft>
-                          <a:spcPts val="0"/>
-                        </a:spcAft>
-                      </a:pPr>
-                      <a:r>
-                        <a:rPr sz="1300" b="0">
-                          <a:solidFill>
-                            <a:srgbClr val="1F1F1F"/>
-                          </a:solidFill>
-                          <a:latin typeface="Calibri"/>
-                        </a:rPr>
-                        <a:t>local</a:t>
+                        <a:t>-</a:t>
                       </a:r>
                     </a:p>
                   </a:txBody>
@@ -24486,7 +21912,7 @@
         </p:nvGraphicFramePr>
         <p:xfrm>
           <a:off x="438912" y="932688"/>
-          <a:ext cx="11313870" cy="3214114"/>
+          <a:ext cx="11313870" cy="3026662"/>
         </p:xfrm>
         <a:graphic>
           <a:graphicData uri="http://schemas.openxmlformats.org/drawingml/2006/table">
@@ -24522,7 +21948,7 @@
                       <a:r>
                         <a:rPr sz="1300" b="1">
                           <a:solidFill>
-                            <a:srgbClr val="1F1F1F"/>
+                            <a:srgbClr val="FFFFFF"/>
                           </a:solidFill>
                           <a:latin typeface="Calibri"/>
                         </a:rPr>
@@ -24532,7 +21958,7 @@
                   </a:txBody>
                   <a:tcPr marL="91440" marR="91440" marT="41148" marB="41148" anchor="ctr">
                     <a:solidFill>
-                      <a:srgbClr val="EC7000"/>
+                      <a:srgbClr val="FF6200"/>
                     </a:solidFill>
                     <a:lnL>
                       <a:noFill/>
@@ -24571,7 +21997,7 @@
                       <a:r>
                         <a:rPr sz="1300" b="1">
                           <a:solidFill>
-                            <a:srgbClr val="1F1F1F"/>
+                            <a:srgbClr val="FFFFFF"/>
                           </a:solidFill>
                           <a:latin typeface="Calibri"/>
                         </a:rPr>
@@ -24581,7 +22007,7 @@
                   </a:txBody>
                   <a:tcPr marL="91440" marR="91440" marT="41148" marB="41148" anchor="ctr">
                     <a:solidFill>
-                      <a:srgbClr val="EC7000"/>
+                      <a:srgbClr val="FF6200"/>
                     </a:solidFill>
                     <a:lnL>
                       <a:noFill/>
@@ -24620,7 +22046,7 @@
                       <a:r>
                         <a:rPr sz="1300" b="1">
                           <a:solidFill>
-                            <a:srgbClr val="1F1F1F"/>
+                            <a:srgbClr val="FFFFFF"/>
                           </a:solidFill>
                           <a:latin typeface="Calibri"/>
                         </a:rPr>
@@ -24630,7 +22056,7 @@
                   </a:txBody>
                   <a:tcPr marL="91440" marR="91440" marT="41148" marB="41148" anchor="ctr">
                     <a:solidFill>
-                      <a:srgbClr val="EC7000"/>
+                      <a:srgbClr val="FF6200"/>
                     </a:solidFill>
                     <a:lnL>
                       <a:noFill/>
@@ -24669,7 +22095,7 @@
                       <a:r>
                         <a:rPr sz="1300" b="1">
                           <a:solidFill>
-                            <a:srgbClr val="1F1F1F"/>
+                            <a:srgbClr val="FFFFFF"/>
                           </a:solidFill>
                           <a:latin typeface="Calibri"/>
                         </a:rPr>
@@ -24679,7 +22105,7 @@
                   </a:txBody>
                   <a:tcPr marL="91440" marR="91440" marT="41148" marB="41148" anchor="ctr">
                     <a:solidFill>
-                      <a:srgbClr val="EC7000"/>
+                      <a:srgbClr val="FF6200"/>
                     </a:solidFill>
                     <a:lnL>
                       <a:noFill/>
@@ -25818,7 +23244,7 @@
                   </a:tcPr>
                 </a:tc>
               </a:tr>
-              <a:tr h="470916">
+              <a:tr h="283464">
                 <a:tc>
                   <a:txBody>
                     <a:bodyPr wrap="square">
@@ -25893,29 +23319,7 @@
                           </a:solidFill>
                           <a:latin typeface="Calibri"/>
                         </a:rPr>
-                        <a:t>Sem competência IME carregada em</a:t>
-                      </a:r>
-                    </a:p>
-                    <a:p>
-                      <a:pPr algn="ctr">
-                        <a:lnSpc>
-                          <a:spcPct val="100000"/>
-                        </a:lnSpc>
-                        <a:spcBef>
-                          <a:spcPts val="0"/>
-                        </a:spcBef>
-                        <a:spcAft>
-                          <a:spcPts val="0"/>
-                        </a:spcAft>
-                      </a:pPr>
-                      <a:r>
-                        <a:rPr sz="1300" b="0">
-                          <a:solidFill>
-                            <a:srgbClr val="1F1F1F"/>
-                          </a:solidFill>
-                          <a:latin typeface="Calibri"/>
-                        </a:rPr>
-                        <a:t>cache local</a:t>
+                        <a:t>-</a:t>
                       </a:r>
                     </a:p>
                   </a:txBody>
@@ -25964,29 +23368,7 @@
                           </a:solidFill>
                           <a:latin typeface="Calibri"/>
                         </a:rPr>
-                        <a:t>Sem competência IME carregada em</a:t>
-                      </a:r>
-                    </a:p>
-                    <a:p>
-                      <a:pPr algn="ctr">
-                        <a:lnSpc>
-                          <a:spcPct val="100000"/>
-                        </a:lnSpc>
-                        <a:spcBef>
-                          <a:spcPts val="0"/>
-                        </a:spcBef>
-                        <a:spcAft>
-                          <a:spcPts val="0"/>
-                        </a:spcAft>
-                      </a:pPr>
-                      <a:r>
-                        <a:rPr sz="1300" b="0">
-                          <a:solidFill>
-                            <a:srgbClr val="1F1F1F"/>
-                          </a:solidFill>
-                          <a:latin typeface="Calibri"/>
-                        </a:rPr>
-                        <a:t>cache local</a:t>
+                        <a:t>-</a:t>
                       </a:r>
                     </a:p>
                   </a:txBody>
@@ -26035,29 +23417,7 @@
                           </a:solidFill>
                           <a:latin typeface="Calibri"/>
                         </a:rPr>
-                        <a:t>Sem competência IME carregada em</a:t>
-                      </a:r>
-                    </a:p>
-                    <a:p>
-                      <a:pPr algn="ctr">
-                        <a:lnSpc>
-                          <a:spcPct val="100000"/>
-                        </a:lnSpc>
-                        <a:spcBef>
-                          <a:spcPts val="0"/>
-                        </a:spcBef>
-                        <a:spcAft>
-                          <a:spcPts val="0"/>
-                        </a:spcAft>
-                      </a:pPr>
-                      <a:r>
-                        <a:rPr sz="1300" b="0">
-                          <a:solidFill>
-                            <a:srgbClr val="1F1F1F"/>
-                          </a:solidFill>
-                          <a:latin typeface="Calibri"/>
-                        </a:rPr>
-                        <a:t>cache local</a:t>
+                        <a:t>-</a:t>
                       </a:r>
                     </a:p>
                   </a:txBody>
@@ -26264,7 +23624,7 @@
                       <a:r>
                         <a:rPr sz="1300" b="1">
                           <a:solidFill>
-                            <a:srgbClr val="1F1F1F"/>
+                            <a:srgbClr val="FFFFFF"/>
                           </a:solidFill>
                           <a:latin typeface="Calibri"/>
                         </a:rPr>
@@ -26274,7 +23634,7 @@
                   </a:txBody>
                   <a:tcPr marL="91440" marR="91440" marT="41148" marB="41148" anchor="ctr">
                     <a:solidFill>
-                      <a:srgbClr val="EC7000"/>
+                      <a:srgbClr val="FF6200"/>
                     </a:solidFill>
                     <a:lnL>
                       <a:noFill/>
@@ -26313,7 +23673,7 @@
                       <a:r>
                         <a:rPr sz="1300" b="1">
                           <a:solidFill>
-                            <a:srgbClr val="1F1F1F"/>
+                            <a:srgbClr val="FFFFFF"/>
                           </a:solidFill>
                           <a:latin typeface="Calibri"/>
                         </a:rPr>
@@ -26323,7 +23683,7 @@
                   </a:txBody>
                   <a:tcPr marL="91440" marR="91440" marT="41148" marB="41148" anchor="ctr">
                     <a:solidFill>
-                      <a:srgbClr val="EC7000"/>
+                      <a:srgbClr val="FF6200"/>
                     </a:solidFill>
                     <a:lnL>
                       <a:noFill/>
@@ -26362,7 +23722,7 @@
                       <a:r>
                         <a:rPr sz="1300" b="1">
                           <a:solidFill>
-                            <a:srgbClr val="1F1F1F"/>
+                            <a:srgbClr val="FFFFFF"/>
                           </a:solidFill>
                           <a:latin typeface="Calibri"/>
                         </a:rPr>
@@ -26372,7 +23732,7 @@
                   </a:txBody>
                   <a:tcPr marL="91440" marR="91440" marT="41148" marB="41148" anchor="ctr">
                     <a:solidFill>
-                      <a:srgbClr val="EC7000"/>
+                      <a:srgbClr val="FF6200"/>
                     </a:solidFill>
                     <a:lnL>
                       <a:noFill/>
@@ -26411,7 +23771,7 @@
                       <a:r>
                         <a:rPr sz="1300" b="1">
                           <a:solidFill>
-                            <a:srgbClr val="1F1F1F"/>
+                            <a:srgbClr val="FFFFFF"/>
                           </a:solidFill>
                           <a:latin typeface="Calibri"/>
                         </a:rPr>
@@ -26421,7 +23781,7 @@
                   </a:txBody>
                   <a:tcPr marL="91440" marR="91440" marT="41148" marB="41148" anchor="ctr">
                     <a:solidFill>
-                      <a:srgbClr val="EC7000"/>
+                      <a:srgbClr val="FF6200"/>
                     </a:solidFill>
                     <a:lnL>
                       <a:noFill/>
@@ -26460,7 +23820,7 @@
                       <a:r>
                         <a:rPr sz="1300" b="1">
                           <a:solidFill>
-                            <a:srgbClr val="1F1F1F"/>
+                            <a:srgbClr val="FFFFFF"/>
                           </a:solidFill>
                           <a:latin typeface="Calibri"/>
                         </a:rPr>
@@ -26470,7 +23830,7 @@
                   </a:txBody>
                   <a:tcPr marL="91440" marR="91440" marT="41148" marB="41148" anchor="ctr">
                     <a:solidFill>
-                      <a:srgbClr val="EC7000"/>
+                      <a:srgbClr val="FF6200"/>
                     </a:solidFill>
                     <a:lnL>
                       <a:noFill/>
@@ -28491,7 +25851,7 @@
                       <a:r>
                         <a:rPr sz="1300" b="1">
                           <a:solidFill>
-                            <a:srgbClr val="1F1F1F"/>
+                            <a:srgbClr val="FFFFFF"/>
                           </a:solidFill>
                           <a:latin typeface="Calibri"/>
                         </a:rPr>
@@ -28501,7 +25861,7 @@
                   </a:txBody>
                   <a:tcPr marL="91440" marR="91440" marT="41148" marB="41148" anchor="ctr">
                     <a:solidFill>
-                      <a:srgbClr val="EC7000"/>
+                      <a:srgbClr val="FF6200"/>
                     </a:solidFill>
                     <a:lnL>
                       <a:noFill/>
@@ -28540,7 +25900,7 @@
                       <a:r>
                         <a:rPr sz="1300" b="1">
                           <a:solidFill>
-                            <a:srgbClr val="1F1F1F"/>
+                            <a:srgbClr val="FFFFFF"/>
                           </a:solidFill>
                           <a:latin typeface="Calibri"/>
                         </a:rPr>
@@ -28550,7 +25910,7 @@
                   </a:txBody>
                   <a:tcPr marL="91440" marR="91440" marT="41148" marB="41148" anchor="ctr">
                     <a:solidFill>
-                      <a:srgbClr val="EC7000"/>
+                      <a:srgbClr val="FF6200"/>
                     </a:solidFill>
                     <a:lnL>
                       <a:noFill/>
@@ -28589,7 +25949,7 @@
                       <a:r>
                         <a:rPr sz="1300" b="1">
                           <a:solidFill>
-                            <a:srgbClr val="1F1F1F"/>
+                            <a:srgbClr val="FFFFFF"/>
                           </a:solidFill>
                           <a:latin typeface="Calibri"/>
                         </a:rPr>
@@ -28599,7 +25959,7 @@
                   </a:txBody>
                   <a:tcPr marL="91440" marR="91440" marT="41148" marB="41148" anchor="ctr">
                     <a:solidFill>
-                      <a:srgbClr val="EC7000"/>
+                      <a:srgbClr val="FF6200"/>
                     </a:solidFill>
                     <a:lnL>
                       <a:noFill/>
@@ -28638,7 +25998,7 @@
                       <a:r>
                         <a:rPr sz="1300" b="1">
                           <a:solidFill>
-                            <a:srgbClr val="1F1F1F"/>
+                            <a:srgbClr val="FFFFFF"/>
                           </a:solidFill>
                           <a:latin typeface="Calibri"/>
                         </a:rPr>
@@ -28648,7 +26008,7 @@
                   </a:txBody>
                   <a:tcPr marL="91440" marR="91440" marT="41148" marB="41148" anchor="ctr">
                     <a:solidFill>
-                      <a:srgbClr val="EC7000"/>
+                      <a:srgbClr val="FF6200"/>
                     </a:solidFill>
                     <a:lnL>
                       <a:noFill/>
@@ -30298,73 +27658,7 @@
                           </a:solidFill>
                           <a:latin typeface="Calibri"/>
                         </a:rPr>
-                        <a:t>CCBs para sistemas solares;</a:t>
-                      </a:r>
-                    </a:p>
-                    <a:p>
-                      <a:pPr algn="ctr">
-                        <a:lnSpc>
-                          <a:spcPct val="100000"/>
-                        </a:lnSpc>
-                        <a:spcBef>
-                          <a:spcPts val="0"/>
-                        </a:spcBef>
-                        <a:spcAft>
-                          <a:spcPts val="0"/>
-                        </a:spcAft>
-                      </a:pPr>
-                      <a:r>
-                        <a:rPr sz="1300" b="0">
-                          <a:solidFill>
-                            <a:srgbClr val="1F1F1F"/>
-                          </a:solidFill>
-                          <a:latin typeface="Calibri"/>
-                        </a:rPr>
-                        <a:t>condições de cessão e</a:t>
-                      </a:r>
-                    </a:p>
-                    <a:p>
-                      <a:pPr algn="ctr">
-                        <a:lnSpc>
-                          <a:spcPct val="100000"/>
-                        </a:lnSpc>
-                        <a:spcBef>
-                          <a:spcPts val="0"/>
-                        </a:spcBef>
-                        <a:spcAft>
-                          <a:spcPts val="0"/>
-                        </a:spcAft>
-                      </a:pPr>
-                      <a:r>
-                        <a:rPr sz="1300" b="0">
-                          <a:solidFill>
-                            <a:srgbClr val="1F1F1F"/>
-                          </a:solidFill>
-                          <a:latin typeface="Calibri"/>
-                        </a:rPr>
-                        <a:t>integridade do lastro previstas</a:t>
-                      </a:r>
-                    </a:p>
-                    <a:p>
-                      <a:pPr algn="ctr">
-                        <a:lnSpc>
-                          <a:spcPct val="100000"/>
-                        </a:lnSpc>
-                        <a:spcBef>
-                          <a:spcPts val="0"/>
-                        </a:spcBef>
-                        <a:spcAft>
-                          <a:spcPts val="0"/>
-                        </a:spcAft>
-                      </a:pPr>
-                      <a:r>
-                        <a:rPr sz="1300" b="0">
-                          <a:solidFill>
-                            <a:srgbClr val="1F1F1F"/>
-                          </a:solidFill>
-                          <a:latin typeface="Calibri"/>
-                        </a:rPr>
-                        <a:t>no contrato.</a:t>
+                        <a:t>CCBs para sistemas solares</a:t>
                       </a:r>
                     </a:p>
                   </a:txBody>
@@ -30692,73 +27986,7 @@
                           </a:solidFill>
                           <a:latin typeface="Calibri"/>
                         </a:rPr>
-                        <a:t>Limites individuais/por grupo</a:t>
-                      </a:r>
-                    </a:p>
-                    <a:p>
-                      <a:pPr algn="ctr">
-                        <a:lnSpc>
-                          <a:spcPct val="100000"/>
-                        </a:lnSpc>
-                        <a:spcBef>
-                          <a:spcPts val="0"/>
-                        </a:spcBef>
-                        <a:spcAft>
-                          <a:spcPts val="0"/>
-                        </a:spcAft>
-                      </a:pPr>
-                      <a:r>
-                        <a:rPr sz="1300" b="0">
-                          <a:solidFill>
-                            <a:srgbClr val="1F1F1F"/>
-                          </a:solidFill>
-                          <a:latin typeface="Calibri"/>
-                        </a:rPr>
-                        <a:t>não transcritos sem</a:t>
-                      </a:r>
-                    </a:p>
-                    <a:p>
-                      <a:pPr algn="ctr">
-                        <a:lnSpc>
-                          <a:spcPct val="100000"/>
-                        </a:lnSpc>
-                        <a:spcBef>
-                          <a:spcPts val="0"/>
-                        </a:spcBef>
-                        <a:spcAft>
-                          <a:spcPts val="0"/>
-                        </a:spcAft>
-                      </a:pPr>
-                      <a:r>
-                        <a:rPr sz="1300" b="0">
-                          <a:solidFill>
-                            <a:srgbClr val="1F1F1F"/>
-                          </a:solidFill>
-                          <a:latin typeface="Calibri"/>
-                        </a:rPr>
-                        <a:t>reconciliação dos anexos da</a:t>
-                      </a:r>
-                    </a:p>
-                    <a:p>
-                      <a:pPr algn="ctr">
-                        <a:lnSpc>
-                          <a:spcPct val="100000"/>
-                        </a:lnSpc>
-                        <a:spcBef>
-                          <a:spcPts val="0"/>
-                        </a:spcBef>
-                        <a:spcAft>
-                          <a:spcPts val="0"/>
-                        </a:spcAft>
-                      </a:pPr>
-                      <a:r>
-                        <a:rPr sz="1300" b="0">
-                          <a:solidFill>
-                            <a:srgbClr val="1F1F1F"/>
-                          </a:solidFill>
-                          <a:latin typeface="Calibri"/>
-                        </a:rPr>
-                        <a:t>versão vigente.</a:t>
+                        <a:t>-</a:t>
                       </a:r>
                     </a:p>
                   </a:txBody>
@@ -30965,7 +28193,7 @@
                       <a:r>
                         <a:rPr sz="1300" b="1">
                           <a:solidFill>
-                            <a:srgbClr val="1F1F1F"/>
+                            <a:srgbClr val="FFFFFF"/>
                           </a:solidFill>
                           <a:latin typeface="Calibri"/>
                         </a:rPr>
@@ -30975,7 +28203,7 @@
                   </a:txBody>
                   <a:tcPr marL="91440" marR="91440" marT="41148" marB="41148" anchor="ctr">
                     <a:solidFill>
-                      <a:srgbClr val="EC7000"/>
+                      <a:srgbClr val="FF6200"/>
                     </a:solidFill>
                     <a:lnL>
                       <a:noFill/>
@@ -31014,7 +28242,7 @@
                       <a:r>
                         <a:rPr sz="1300" b="1">
                           <a:solidFill>
-                            <a:srgbClr val="1F1F1F"/>
+                            <a:srgbClr val="FFFFFF"/>
                           </a:solidFill>
                           <a:latin typeface="Calibri"/>
                         </a:rPr>
@@ -31024,7 +28252,7 @@
                   </a:txBody>
                   <a:tcPr marL="91440" marR="91440" marT="41148" marB="41148" anchor="ctr">
                     <a:solidFill>
-                      <a:srgbClr val="EC7000"/>
+                      <a:srgbClr val="FF6200"/>
                     </a:solidFill>
                     <a:lnL>
                       <a:noFill/>
@@ -31063,7 +28291,7 @@
                       <a:r>
                         <a:rPr sz="1300" b="1">
                           <a:solidFill>
-                            <a:srgbClr val="1F1F1F"/>
+                            <a:srgbClr val="FFFFFF"/>
                           </a:solidFill>
                           <a:latin typeface="Calibri"/>
                         </a:rPr>
@@ -31073,7 +28301,7 @@
                   </a:txBody>
                   <a:tcPr marL="91440" marR="91440" marT="41148" marB="41148" anchor="ctr">
                     <a:solidFill>
-                      <a:srgbClr val="EC7000"/>
+                      <a:srgbClr val="FF6200"/>
                     </a:solidFill>
                     <a:lnL>
                       <a:noFill/>
@@ -31112,7 +28340,7 @@
                       <a:r>
                         <a:rPr sz="1300" b="1">
                           <a:solidFill>
-                            <a:srgbClr val="1F1F1F"/>
+                            <a:srgbClr val="FFFFFF"/>
                           </a:solidFill>
                           <a:latin typeface="Calibri"/>
                         </a:rPr>
@@ -31122,7 +28350,7 @@
                   </a:txBody>
                   <a:tcPr marL="91440" marR="91440" marT="41148" marB="41148" anchor="ctr">
                     <a:solidFill>
-                      <a:srgbClr val="EC7000"/>
+                      <a:srgbClr val="FF6200"/>
                     </a:solidFill>
                     <a:lnL>
                       <a:noFill/>
@@ -31161,7 +28389,7 @@
                       <a:r>
                         <a:rPr sz="1300" b="1">
                           <a:solidFill>
-                            <a:srgbClr val="1F1F1F"/>
+                            <a:srgbClr val="FFFFFF"/>
                           </a:solidFill>
                           <a:latin typeface="Calibri"/>
                         </a:rPr>
@@ -31171,7 +28399,7 @@
                   </a:txBody>
                   <a:tcPr marL="91440" marR="91440" marT="41148" marB="41148" anchor="ctr">
                     <a:solidFill>
-                      <a:srgbClr val="EC7000"/>
+                      <a:srgbClr val="FF6200"/>
                     </a:solidFill>
                     <a:lnL>
                       <a:noFill/>
@@ -32523,7 +29751,7 @@
         </p:nvGraphicFramePr>
         <p:xfrm>
           <a:off x="438912" y="932688"/>
-          <a:ext cx="11313868" cy="3493006"/>
+          <a:ext cx="11313868" cy="3305555"/>
         </p:xfrm>
         <a:graphic>
           <a:graphicData uri="http://schemas.openxmlformats.org/drawingml/2006/table">
@@ -32560,7 +29788,7 @@
                       <a:r>
                         <a:rPr sz="1300" b="1">
                           <a:solidFill>
-                            <a:srgbClr val="1F1F1F"/>
+                            <a:srgbClr val="FFFFFF"/>
                           </a:solidFill>
                           <a:latin typeface="Calibri"/>
                         </a:rPr>
@@ -32570,7 +29798,7 @@
                   </a:txBody>
                   <a:tcPr marL="91440" marR="91440" marT="41148" marB="41148" anchor="ctr">
                     <a:solidFill>
-                      <a:srgbClr val="EC7000"/>
+                      <a:srgbClr val="FF6200"/>
                     </a:solidFill>
                     <a:lnL>
                       <a:noFill/>
@@ -32609,7 +29837,7 @@
                       <a:r>
                         <a:rPr sz="1300" b="1">
                           <a:solidFill>
-                            <a:srgbClr val="1F1F1F"/>
+                            <a:srgbClr val="FFFFFF"/>
                           </a:solidFill>
                           <a:latin typeface="Calibri"/>
                         </a:rPr>
@@ -32619,7 +29847,7 @@
                   </a:txBody>
                   <a:tcPr marL="91440" marR="91440" marT="41148" marB="41148" anchor="ctr">
                     <a:solidFill>
-                      <a:srgbClr val="EC7000"/>
+                      <a:srgbClr val="FF6200"/>
                     </a:solidFill>
                     <a:lnL>
                       <a:noFill/>
@@ -32658,7 +29886,7 @@
                       <a:r>
                         <a:rPr sz="1300" b="1">
                           <a:solidFill>
-                            <a:srgbClr val="1F1F1F"/>
+                            <a:srgbClr val="FFFFFF"/>
                           </a:solidFill>
                           <a:latin typeface="Calibri"/>
                         </a:rPr>
@@ -32668,7 +29896,7 @@
                   </a:txBody>
                   <a:tcPr marL="91440" marR="91440" marT="41148" marB="41148" anchor="ctr">
                     <a:solidFill>
-                      <a:srgbClr val="EC7000"/>
+                      <a:srgbClr val="FF6200"/>
                     </a:solidFill>
                     <a:lnL>
                       <a:noFill/>
@@ -32707,7 +29935,7 @@
                       <a:r>
                         <a:rPr sz="1300" b="1">
                           <a:solidFill>
-                            <a:srgbClr val="1F1F1F"/>
+                            <a:srgbClr val="FFFFFF"/>
                           </a:solidFill>
                           <a:latin typeface="Calibri"/>
                         </a:rPr>
@@ -32717,7 +29945,7 @@
                   </a:txBody>
                   <a:tcPr marL="91440" marR="91440" marT="41148" marB="41148" anchor="ctr">
                     <a:solidFill>
-                      <a:srgbClr val="EC7000"/>
+                      <a:srgbClr val="FF6200"/>
                     </a:solidFill>
                     <a:lnL>
                       <a:noFill/>
@@ -32756,7 +29984,7 @@
                       <a:r>
                         <a:rPr sz="1300" b="1">
                           <a:solidFill>
-                            <a:srgbClr val="1F1F1F"/>
+                            <a:srgbClr val="FFFFFF"/>
                           </a:solidFill>
                           <a:latin typeface="Calibri"/>
                         </a:rPr>
@@ -32766,7 +29994,7 @@
                   </a:txBody>
                   <a:tcPr marL="91440" marR="91440" marT="41148" marB="41148" anchor="ctr">
                     <a:solidFill>
-                      <a:srgbClr val="EC7000"/>
+                      <a:srgbClr val="FF6200"/>
                     </a:solidFill>
                     <a:lnL>
                       <a:noFill/>
@@ -33985,7 +31213,7 @@
                   </a:tcPr>
                 </a:tc>
               </a:tr>
-              <a:tr h="845819">
+              <a:tr h="658368">
                 <a:tc>
                   <a:txBody>
                     <a:bodyPr wrap="square">
@@ -34060,51 +31288,29 @@
                           </a:solidFill>
                           <a:latin typeface="Calibri"/>
                         </a:rPr>
-                        <a:t>Política de provisão em</a:t>
-                      </a:r>
-                    </a:p>
-                    <a:p>
-                      <a:pPr algn="ctr">
-                        <a:lnSpc>
-                          <a:spcPct val="100000"/>
-                        </a:lnSpc>
-                        <a:spcBef>
-                          <a:spcPts val="0"/>
-                        </a:spcBef>
-                        <a:spcAft>
-                          <a:spcPts val="0"/>
-                        </a:spcAft>
-                      </a:pPr>
-                      <a:r>
-                        <a:rPr sz="1300" b="0">
-                          <a:solidFill>
-                            <a:srgbClr val="1F1F1F"/>
-                          </a:solidFill>
-                          <a:latin typeface="Calibri"/>
-                        </a:rPr>
-                        <a:t>anexo; faixa por atraso</a:t>
-                      </a:r>
-                    </a:p>
-                    <a:p>
-                      <a:pPr algn="ctr">
-                        <a:lnSpc>
-                          <a:spcPct val="100000"/>
-                        </a:lnSpc>
-                        <a:spcBef>
-                          <a:spcPts val="0"/>
-                        </a:spcBef>
-                        <a:spcAft>
-                          <a:spcPts val="0"/>
-                        </a:spcAft>
-                      </a:pPr>
-                      <a:r>
-                        <a:rPr sz="1300" b="0">
-                          <a:solidFill>
-                            <a:srgbClr val="1F1F1F"/>
-                          </a:solidFill>
-                          <a:latin typeface="Calibri"/>
-                        </a:rPr>
-                        <a:t>e renegociação exige</a:t>
+                        <a:t>faixa por atraso e</a:t>
+                      </a:r>
+                    </a:p>
+                    <a:p>
+                      <a:pPr algn="ctr">
+                        <a:lnSpc>
+                          <a:spcPct val="100000"/>
+                        </a:lnSpc>
+                        <a:spcBef>
+                          <a:spcPts val="0"/>
+                        </a:spcBef>
+                        <a:spcAft>
+                          <a:spcPts val="0"/>
+                        </a:spcAft>
+                      </a:pPr>
+                      <a:r>
+                        <a:rPr sz="1300" b="0">
+                          <a:solidFill>
+                            <a:srgbClr val="1F1F1F"/>
+                          </a:solidFill>
+                          <a:latin typeface="Calibri"/>
+                        </a:rPr>
+                        <a:t>renegociação exige</a:t>
                       </a:r>
                     </a:p>
                     <a:p>
@@ -34175,51 +31381,29 @@
                           </a:solidFill>
                           <a:latin typeface="Calibri"/>
                         </a:rPr>
-                        <a:t>Política de provisão em</a:t>
-                      </a:r>
-                    </a:p>
-                    <a:p>
-                      <a:pPr algn="ctr">
-                        <a:lnSpc>
-                          <a:spcPct val="100000"/>
-                        </a:lnSpc>
-                        <a:spcBef>
-                          <a:spcPts val="0"/>
-                        </a:spcBef>
-                        <a:spcAft>
-                          <a:spcPts val="0"/>
-                        </a:spcAft>
-                      </a:pPr>
-                      <a:r>
-                        <a:rPr sz="1300" b="0">
-                          <a:solidFill>
-                            <a:srgbClr val="1F1F1F"/>
-                          </a:solidFill>
-                          <a:latin typeface="Calibri"/>
-                        </a:rPr>
-                        <a:t>anexo; faixa por atraso</a:t>
-                      </a:r>
-                    </a:p>
-                    <a:p>
-                      <a:pPr algn="ctr">
-                        <a:lnSpc>
-                          <a:spcPct val="100000"/>
-                        </a:lnSpc>
-                        <a:spcBef>
-                          <a:spcPts val="0"/>
-                        </a:spcBef>
-                        <a:spcAft>
-                          <a:spcPts val="0"/>
-                        </a:spcAft>
-                      </a:pPr>
-                      <a:r>
-                        <a:rPr sz="1300" b="0">
-                          <a:solidFill>
-                            <a:srgbClr val="1F1F1F"/>
-                          </a:solidFill>
-                          <a:latin typeface="Calibri"/>
-                        </a:rPr>
-                        <a:t>e renegociação exige</a:t>
+                        <a:t>faixa por atraso e</a:t>
+                      </a:r>
+                    </a:p>
+                    <a:p>
+                      <a:pPr algn="ctr">
+                        <a:lnSpc>
+                          <a:spcPct val="100000"/>
+                        </a:lnSpc>
+                        <a:spcBef>
+                          <a:spcPts val="0"/>
+                        </a:spcBef>
+                        <a:spcAft>
+                          <a:spcPts val="0"/>
+                        </a:spcAft>
+                      </a:pPr>
+                      <a:r>
+                        <a:rPr sz="1300" b="0">
+                          <a:solidFill>
+                            <a:srgbClr val="1F1F1F"/>
+                          </a:solidFill>
+                          <a:latin typeface="Calibri"/>
+                        </a:rPr>
+                        <a:t>renegociação exige</a:t>
                       </a:r>
                     </a:p>
                     <a:p>
@@ -34290,51 +31474,29 @@
                           </a:solidFill>
                           <a:latin typeface="Calibri"/>
                         </a:rPr>
-                        <a:t>Política de provisão em</a:t>
-                      </a:r>
-                    </a:p>
-                    <a:p>
-                      <a:pPr algn="ctr">
-                        <a:lnSpc>
-                          <a:spcPct val="100000"/>
-                        </a:lnSpc>
-                        <a:spcBef>
-                          <a:spcPts val="0"/>
-                        </a:spcBef>
-                        <a:spcAft>
-                          <a:spcPts val="0"/>
-                        </a:spcAft>
-                      </a:pPr>
-                      <a:r>
-                        <a:rPr sz="1300" b="0">
-                          <a:solidFill>
-                            <a:srgbClr val="1F1F1F"/>
-                          </a:solidFill>
-                          <a:latin typeface="Calibri"/>
-                        </a:rPr>
-                        <a:t>anexo; faixa por atraso</a:t>
-                      </a:r>
-                    </a:p>
-                    <a:p>
-                      <a:pPr algn="ctr">
-                        <a:lnSpc>
-                          <a:spcPct val="100000"/>
-                        </a:lnSpc>
-                        <a:spcBef>
-                          <a:spcPts val="0"/>
-                        </a:spcBef>
-                        <a:spcAft>
-                          <a:spcPts val="0"/>
-                        </a:spcAft>
-                      </a:pPr>
-                      <a:r>
-                        <a:rPr sz="1300" b="0">
-                          <a:solidFill>
-                            <a:srgbClr val="1F1F1F"/>
-                          </a:solidFill>
-                          <a:latin typeface="Calibri"/>
-                        </a:rPr>
-                        <a:t>e renegociação exige</a:t>
+                        <a:t>faixa por atraso e</a:t>
+                      </a:r>
+                    </a:p>
+                    <a:p>
+                      <a:pPr algn="ctr">
+                        <a:lnSpc>
+                          <a:spcPct val="100000"/>
+                        </a:lnSpc>
+                        <a:spcBef>
+                          <a:spcPts val="0"/>
+                        </a:spcBef>
+                        <a:spcAft>
+                          <a:spcPts val="0"/>
+                        </a:spcAft>
+                      </a:pPr>
+                      <a:r>
+                        <a:rPr sz="1300" b="0">
+                          <a:solidFill>
+                            <a:srgbClr val="1F1F1F"/>
+                          </a:solidFill>
+                          <a:latin typeface="Calibri"/>
+                        </a:rPr>
+                        <a:t>renegociação exige</a:t>
                       </a:r>
                     </a:p>
                     <a:p>
@@ -34405,51 +31567,29 @@
                           </a:solidFill>
                           <a:latin typeface="Calibri"/>
                         </a:rPr>
-                        <a:t>Política de provisão em</a:t>
-                      </a:r>
-                    </a:p>
-                    <a:p>
-                      <a:pPr algn="ctr">
-                        <a:lnSpc>
-                          <a:spcPct val="100000"/>
-                        </a:lnSpc>
-                        <a:spcBef>
-                          <a:spcPts val="0"/>
-                        </a:spcBef>
-                        <a:spcAft>
-                          <a:spcPts val="0"/>
-                        </a:spcAft>
-                      </a:pPr>
-                      <a:r>
-                        <a:rPr sz="1300" b="0">
-                          <a:solidFill>
-                            <a:srgbClr val="1F1F1F"/>
-                          </a:solidFill>
-                          <a:latin typeface="Calibri"/>
-                        </a:rPr>
-                        <a:t>anexo; faixa por atraso</a:t>
-                      </a:r>
-                    </a:p>
-                    <a:p>
-                      <a:pPr algn="ctr">
-                        <a:lnSpc>
-                          <a:spcPct val="100000"/>
-                        </a:lnSpc>
-                        <a:spcBef>
-                          <a:spcPts val="0"/>
-                        </a:spcBef>
-                        <a:spcAft>
-                          <a:spcPts val="0"/>
-                        </a:spcAft>
-                      </a:pPr>
-                      <a:r>
-                        <a:rPr sz="1300" b="0">
-                          <a:solidFill>
-                            <a:srgbClr val="1F1F1F"/>
-                          </a:solidFill>
-                          <a:latin typeface="Calibri"/>
-                        </a:rPr>
-                        <a:t>e renegociação exige</a:t>
+                        <a:t>faixa por atraso e</a:t>
+                      </a:r>
+                    </a:p>
+                    <a:p>
+                      <a:pPr algn="ctr">
+                        <a:lnSpc>
+                          <a:spcPct val="100000"/>
+                        </a:lnSpc>
+                        <a:spcBef>
+                          <a:spcPts val="0"/>
+                        </a:spcBef>
+                        <a:spcAft>
+                          <a:spcPts val="0"/>
+                        </a:spcAft>
+                      </a:pPr>
+                      <a:r>
+                        <a:rPr sz="1300" b="0">
+                          <a:solidFill>
+                            <a:srgbClr val="1F1F1F"/>
+                          </a:solidFill>
+                          <a:latin typeface="Calibri"/>
+                        </a:rPr>
+                        <a:t>renegociação exige</a:t>
                       </a:r>
                     </a:p>
                     <a:p>
@@ -34641,7 +31781,7 @@
         </p:nvGraphicFramePr>
         <p:xfrm>
           <a:off x="438912" y="932688"/>
-          <a:ext cx="11313870" cy="4434837"/>
+          <a:ext cx="11313870" cy="4247385"/>
         </p:xfrm>
         <a:graphic>
           <a:graphicData uri="http://schemas.openxmlformats.org/drawingml/2006/table">
@@ -34677,7 +31817,7 @@
                       <a:r>
                         <a:rPr sz="1300" b="1">
                           <a:solidFill>
-                            <a:srgbClr val="1F1F1F"/>
+                            <a:srgbClr val="FFFFFF"/>
                           </a:solidFill>
                           <a:latin typeface="Calibri"/>
                         </a:rPr>
@@ -34687,7 +31827,7 @@
                   </a:txBody>
                   <a:tcPr marL="91440" marR="91440" marT="41148" marB="41148" anchor="ctr">
                     <a:solidFill>
-                      <a:srgbClr val="EC7000"/>
+                      <a:srgbClr val="FF6200"/>
                     </a:solidFill>
                     <a:lnL>
                       <a:noFill/>
@@ -34726,7 +31866,7 @@
                       <a:r>
                         <a:rPr sz="1300" b="1">
                           <a:solidFill>
-                            <a:srgbClr val="1F1F1F"/>
+                            <a:srgbClr val="FFFFFF"/>
                           </a:solidFill>
                           <a:latin typeface="Calibri"/>
                         </a:rPr>
@@ -34736,7 +31876,7 @@
                   </a:txBody>
                   <a:tcPr marL="91440" marR="91440" marT="41148" marB="41148" anchor="ctr">
                     <a:solidFill>
-                      <a:srgbClr val="EC7000"/>
+                      <a:srgbClr val="FF6200"/>
                     </a:solidFill>
                     <a:lnL>
                       <a:noFill/>
@@ -34775,7 +31915,7 @@
                       <a:r>
                         <a:rPr sz="1300" b="1">
                           <a:solidFill>
-                            <a:srgbClr val="1F1F1F"/>
+                            <a:srgbClr val="FFFFFF"/>
                           </a:solidFill>
                           <a:latin typeface="Calibri"/>
                         </a:rPr>
@@ -34785,7 +31925,7 @@
                   </a:txBody>
                   <a:tcPr marL="91440" marR="91440" marT="41148" marB="41148" anchor="ctr">
                     <a:solidFill>
-                      <a:srgbClr val="EC7000"/>
+                      <a:srgbClr val="FF6200"/>
                     </a:solidFill>
                     <a:lnL>
                       <a:noFill/>
@@ -34824,7 +31964,7 @@
                       <a:r>
                         <a:rPr sz="1300" b="1">
                           <a:solidFill>
-                            <a:srgbClr val="1F1F1F"/>
+                            <a:srgbClr val="FFFFFF"/>
                           </a:solidFill>
                           <a:latin typeface="Calibri"/>
                         </a:rPr>
@@ -34834,7 +31974,7 @@
                   </a:txBody>
                   <a:tcPr marL="91440" marR="91440" marT="41148" marB="41148" anchor="ctr">
                     <a:solidFill>
-                      <a:srgbClr val="EC7000"/>
+                      <a:srgbClr val="FF6200"/>
                     </a:solidFill>
                     <a:lnL>
                       <a:noFill/>
@@ -35108,51 +32248,7 @@
                           </a:solidFill>
                           <a:latin typeface="Calibri"/>
                         </a:rPr>
-                        <a:t>Não localizado no corpus</a:t>
-                      </a:r>
-                    </a:p>
-                    <a:p>
-                      <a:pPr algn="ctr">
-                        <a:lnSpc>
-                          <a:spcPct val="100000"/>
-                        </a:lnSpc>
-                        <a:spcBef>
-                          <a:spcPts val="0"/>
-                        </a:spcBef>
-                        <a:spcAft>
-                          <a:spcPts val="0"/>
-                        </a:spcAft>
-                      </a:pPr>
-                      <a:r>
-                        <a:rPr sz="1300" b="0">
-                          <a:solidFill>
-                            <a:srgbClr val="1F1F1F"/>
-                          </a:solidFill>
-                          <a:latin typeface="Calibri"/>
-                        </a:rPr>
-                        <a:t>documental acessível desta</a:t>
-                      </a:r>
-                    </a:p>
-                    <a:p>
-                      <a:pPr algn="ctr">
-                        <a:lnSpc>
-                          <a:spcPct val="100000"/>
-                        </a:lnSpc>
-                        <a:spcBef>
-                          <a:spcPts val="0"/>
-                        </a:spcBef>
-                        <a:spcAft>
-                          <a:spcPts val="0"/>
-                        </a:spcAft>
-                      </a:pPr>
-                      <a:r>
-                        <a:rPr sz="1300" b="0">
-                          <a:solidFill>
-                            <a:srgbClr val="1F1F1F"/>
-                          </a:solidFill>
-                          <a:latin typeface="Calibri"/>
-                        </a:rPr>
-                        <a:t>revisão.</a:t>
+                        <a:t>-</a:t>
                       </a:r>
                     </a:p>
                   </a:txBody>
@@ -35496,51 +32592,7 @@
                           </a:solidFill>
                           <a:latin typeface="Calibri"/>
                         </a:rPr>
-                        <a:t>Não localizado no corpus</a:t>
-                      </a:r>
-                    </a:p>
-                    <a:p>
-                      <a:pPr algn="ctr">
-                        <a:lnSpc>
-                          <a:spcPct val="100000"/>
-                        </a:lnSpc>
-                        <a:spcBef>
-                          <a:spcPts val="0"/>
-                        </a:spcBef>
-                        <a:spcAft>
-                          <a:spcPts val="0"/>
-                        </a:spcAft>
-                      </a:pPr>
-                      <a:r>
-                        <a:rPr sz="1300" b="0">
-                          <a:solidFill>
-                            <a:srgbClr val="1F1F1F"/>
-                          </a:solidFill>
-                          <a:latin typeface="Calibri"/>
-                        </a:rPr>
-                        <a:t>documental acessível desta</a:t>
-                      </a:r>
-                    </a:p>
-                    <a:p>
-                      <a:pPr algn="ctr">
-                        <a:lnSpc>
-                          <a:spcPct val="100000"/>
-                        </a:lnSpc>
-                        <a:spcBef>
-                          <a:spcPts val="0"/>
-                        </a:spcBef>
-                        <a:spcAft>
-                          <a:spcPts val="0"/>
-                        </a:spcAft>
-                      </a:pPr>
-                      <a:r>
-                        <a:rPr sz="1300" b="0">
-                          <a:solidFill>
-                            <a:srgbClr val="1F1F1F"/>
-                          </a:solidFill>
-                          <a:latin typeface="Calibri"/>
-                        </a:rPr>
-                        <a:t>revisão.</a:t>
+                        <a:t>-</a:t>
                       </a:r>
                     </a:p>
                   </a:txBody>
@@ -36383,7 +33435,7 @@
                   </a:tcPr>
                 </a:tc>
               </a:tr>
-              <a:tr h="658368">
+              <a:tr h="470916">
                 <a:tc>
                   <a:txBody>
                     <a:bodyPr wrap="square">
@@ -36458,28 +33510,6 @@
                           </a:solidFill>
                           <a:latin typeface="Calibri"/>
                         </a:rPr>
-                        <a:t>Política de provisão em anexo;</a:t>
-                      </a:r>
-                    </a:p>
-                    <a:p>
-                      <a:pPr algn="ctr">
-                        <a:lnSpc>
-                          <a:spcPct val="100000"/>
-                        </a:lnSpc>
-                        <a:spcBef>
-                          <a:spcPts val="0"/>
-                        </a:spcBef>
-                        <a:spcAft>
-                          <a:spcPts val="0"/>
-                        </a:spcAft>
-                      </a:pPr>
-                      <a:r>
-                        <a:rPr sz="1300" b="0">
-                          <a:solidFill>
-                            <a:srgbClr val="1F1F1F"/>
-                          </a:solidFill>
-                          <a:latin typeface="Calibri"/>
-                        </a:rPr>
                         <a:t>faixa por atraso e renegociação</a:t>
                       </a:r>
                     </a:p>
@@ -36551,28 +33581,6 @@
                           </a:solidFill>
                           <a:latin typeface="Calibri"/>
                         </a:rPr>
-                        <a:t>Política de provisão em anexo;</a:t>
-                      </a:r>
-                    </a:p>
-                    <a:p>
-                      <a:pPr algn="ctr">
-                        <a:lnSpc>
-                          <a:spcPct val="100000"/>
-                        </a:lnSpc>
-                        <a:spcBef>
-                          <a:spcPts val="0"/>
-                        </a:spcBef>
-                        <a:spcAft>
-                          <a:spcPts val="0"/>
-                        </a:spcAft>
-                      </a:pPr>
-                      <a:r>
-                        <a:rPr sz="1300" b="0">
-                          <a:solidFill>
-                            <a:srgbClr val="1F1F1F"/>
-                          </a:solidFill>
-                          <a:latin typeface="Calibri"/>
-                        </a:rPr>
                         <a:t>faixa por atraso e renegociação</a:t>
                       </a:r>
                     </a:p>
@@ -36625,28 +33633,6 @@
                       <a:noAutofit/>
                     </a:bodyPr>
                     <a:lstStyle/>
-                    <a:p>
-                      <a:pPr algn="ctr">
-                        <a:lnSpc>
-                          <a:spcPct val="100000"/>
-                        </a:lnSpc>
-                        <a:spcBef>
-                          <a:spcPts val="0"/>
-                        </a:spcBef>
-                        <a:spcAft>
-                          <a:spcPts val="0"/>
-                        </a:spcAft>
-                      </a:pPr>
-                      <a:r>
-                        <a:rPr sz="1300" b="0">
-                          <a:solidFill>
-                            <a:srgbClr val="1F1F1F"/>
-                          </a:solidFill>
-                          <a:latin typeface="Calibri"/>
-                        </a:rPr>
-                        <a:t>Política de provisão em anexo;</a:t>
-                      </a:r>
-                    </a:p>
                     <a:p>
                       <a:pPr algn="ctr">
                         <a:lnSpc>
@@ -36895,7 +33881,7 @@
                       <a:r>
                         <a:rPr sz="1300" b="1">
                           <a:solidFill>
-                            <a:srgbClr val="1F1F1F"/>
+                            <a:srgbClr val="FFFFFF"/>
                           </a:solidFill>
                           <a:latin typeface="Calibri"/>
                         </a:rPr>
@@ -36905,7 +33891,7 @@
                   </a:txBody>
                   <a:tcPr marL="91440" marR="91440" marT="41148" marB="41148" anchor="ctr">
                     <a:solidFill>
-                      <a:srgbClr val="EC7000"/>
+                      <a:srgbClr val="FF6200"/>
                     </a:solidFill>
                     <a:lnL>
                       <a:noFill/>
@@ -36944,7 +33930,7 @@
                       <a:r>
                         <a:rPr sz="1300" b="1">
                           <a:solidFill>
-                            <a:srgbClr val="1F1F1F"/>
+                            <a:srgbClr val="FFFFFF"/>
                           </a:solidFill>
                           <a:latin typeface="Calibri"/>
                         </a:rPr>
@@ -36954,7 +33940,7 @@
                   </a:txBody>
                   <a:tcPr marL="91440" marR="91440" marT="41148" marB="41148" anchor="ctr">
                     <a:solidFill>
-                      <a:srgbClr val="EC7000"/>
+                      <a:srgbClr val="FF6200"/>
                     </a:solidFill>
                     <a:lnL>
                       <a:noFill/>
@@ -36993,7 +33979,7 @@
                       <a:r>
                         <a:rPr sz="1300" b="1">
                           <a:solidFill>
-                            <a:srgbClr val="1F1F1F"/>
+                            <a:srgbClr val="FFFFFF"/>
                           </a:solidFill>
                           <a:latin typeface="Calibri"/>
                         </a:rPr>
@@ -37003,7 +33989,7 @@
                   </a:txBody>
                   <a:tcPr marL="91440" marR="91440" marT="41148" marB="41148" anchor="ctr">
                     <a:solidFill>
-                      <a:srgbClr val="EC7000"/>
+                      <a:srgbClr val="FF6200"/>
                     </a:solidFill>
                     <a:lnL>
                       <a:noFill/>
@@ -37042,7 +34028,7 @@
                       <a:r>
                         <a:rPr sz="1300" b="1">
                           <a:solidFill>
-                            <a:srgbClr val="1F1F1F"/>
+                            <a:srgbClr val="FFFFFF"/>
                           </a:solidFill>
                           <a:latin typeface="Calibri"/>
                         </a:rPr>
@@ -37052,7 +34038,7 @@
                   </a:txBody>
                   <a:tcPr marL="91440" marR="91440" marT="41148" marB="41148" anchor="ctr">
                     <a:solidFill>
-                      <a:srgbClr val="EC7000"/>
+                      <a:srgbClr val="FF6200"/>
                     </a:solidFill>
                     <a:lnL>
                       <a:noFill/>
@@ -37091,7 +34077,7 @@
                       <a:r>
                         <a:rPr sz="1300" b="1">
                           <a:solidFill>
-                            <a:srgbClr val="1F1F1F"/>
+                            <a:srgbClr val="FFFFFF"/>
                           </a:solidFill>
                           <a:latin typeface="Calibri"/>
                         </a:rPr>
@@ -37101,7 +34087,7 @@
                   </a:txBody>
                   <a:tcPr marL="91440" marR="91440" marT="41148" marB="41148" anchor="ctr">
                     <a:solidFill>
-                      <a:srgbClr val="EC7000"/>
+                      <a:srgbClr val="FF6200"/>
                     </a:solidFill>
                     <a:lnL>
                       <a:noFill/>
@@ -37851,51 +34837,7 @@
                           </a:solidFill>
                           <a:latin typeface="Calibri"/>
                         </a:rPr>
-                        <a:t>ao waterfall; período</a:t>
-                      </a:r>
-                    </a:p>
-                    <a:p>
-                      <a:pPr algn="ctr">
-                        <a:lnSpc>
-                          <a:spcPct val="100000"/>
-                        </a:lnSpc>
-                        <a:spcBef>
-                          <a:spcPts val="0"/>
-                        </a:spcBef>
-                        <a:spcAft>
-                          <a:spcPts val="0"/>
-                        </a:spcAft>
-                      </a:pPr>
-                      <a:r>
-                        <a:rPr sz="1300" b="0">
-                          <a:solidFill>
-                            <a:srgbClr val="1F1F1F"/>
-                          </a:solidFill>
-                          <a:latin typeface="Calibri"/>
-                        </a:rPr>
-                        <a:t>por emissão não</a:t>
-                      </a:r>
-                    </a:p>
-                    <a:p>
-                      <a:pPr algn="ctr">
-                        <a:lnSpc>
-                          <a:spcPct val="100000"/>
-                        </a:lnSpc>
-                        <a:spcBef>
-                          <a:spcPts val="0"/>
-                        </a:spcBef>
-                        <a:spcAft>
-                          <a:spcPts val="0"/>
-                        </a:spcAft>
-                      </a:pPr>
-                      <a:r>
-                        <a:rPr sz="1300" b="0">
-                          <a:solidFill>
-                            <a:srgbClr val="1F1F1F"/>
-                          </a:solidFill>
-                          <a:latin typeface="Calibri"/>
-                        </a:rPr>
-                        <a:t>confirmado.</a:t>
+                        <a:t>ao waterfall</a:t>
                       </a:r>
                     </a:p>
                   </a:txBody>
@@ -38422,73 +35364,7 @@
                           </a:solidFill>
                           <a:latin typeface="Calibri"/>
                         </a:rPr>
-                        <a:t>Classe fechada; termos</a:t>
-                      </a:r>
-                    </a:p>
-                    <a:p>
-                      <a:pPr algn="ctr">
-                        <a:lnSpc>
-                          <a:spcPct val="100000"/>
-                        </a:lnSpc>
-                        <a:spcBef>
-                          <a:spcPts val="0"/>
-                        </a:spcBef>
-                        <a:spcAft>
-                          <a:spcPts val="0"/>
-                        </a:spcAft>
-                      </a:pPr>
-                      <a:r>
-                        <a:rPr sz="1300" b="0">
-                          <a:solidFill>
-                            <a:srgbClr val="1F1F1F"/>
-                          </a:solidFill>
-                          <a:latin typeface="Calibri"/>
-                        </a:rPr>
-                        <a:t>de duração e pagamentos</a:t>
-                      </a:r>
-                    </a:p>
-                    <a:p>
-                      <a:pPr algn="ctr">
-                        <a:lnSpc>
-                          <a:spcPct val="100000"/>
-                        </a:lnSpc>
-                        <a:spcBef>
-                          <a:spcPts val="0"/>
-                        </a:spcBef>
-                        <a:spcAft>
-                          <a:spcPts val="0"/>
-                        </a:spcAft>
-                      </a:pPr>
-                      <a:r>
-                        <a:rPr sz="1300" b="0">
-                          <a:solidFill>
-                            <a:srgbClr val="1F1F1F"/>
-                          </a:solidFill>
-                          <a:latin typeface="Calibri"/>
-                        </a:rPr>
-                        <a:t>por série nos</a:t>
-                      </a:r>
-                    </a:p>
-                    <a:p>
-                      <a:pPr algn="ctr">
-                        <a:lnSpc>
-                          <a:spcPct val="100000"/>
-                        </a:lnSpc>
-                        <a:spcBef>
-                          <a:spcPts val="0"/>
-                        </a:spcBef>
-                        <a:spcAft>
-                          <a:spcPts val="0"/>
-                        </a:spcAft>
-                      </a:pPr>
-                      <a:r>
-                        <a:rPr sz="1300" b="0">
-                          <a:solidFill>
-                            <a:srgbClr val="1F1F1F"/>
-                          </a:solidFill>
-                          <a:latin typeface="Calibri"/>
-                        </a:rPr>
-                        <a:t>suplementos.</a:t>
+                        <a:t>Classe fechada</a:t>
                       </a:r>
                     </a:p>
                   </a:txBody>
@@ -38537,73 +35413,7 @@
                           </a:solidFill>
                           <a:latin typeface="Calibri"/>
                         </a:rPr>
-                        <a:t>Classe fechada; prazo</a:t>
-                      </a:r>
-                    </a:p>
-                    <a:p>
-                      <a:pPr algn="ctr">
-                        <a:lnSpc>
-                          <a:spcPct val="100000"/>
-                        </a:lnSpc>
-                        <a:spcBef>
-                          <a:spcPts val="0"/>
-                        </a:spcBef>
-                        <a:spcAft>
-                          <a:spcPts val="0"/>
-                        </a:spcAft>
-                      </a:pPr>
-                      <a:r>
-                        <a:rPr sz="1300" b="0">
-                          <a:solidFill>
-                            <a:srgbClr val="1F1F1F"/>
-                          </a:solidFill>
-                          <a:latin typeface="Calibri"/>
-                        </a:rPr>
-                        <a:t>indeterminado da classe</a:t>
-                      </a:r>
-                    </a:p>
-                    <a:p>
-                      <a:pPr algn="ctr">
-                        <a:lnSpc>
-                          <a:spcPct val="100000"/>
-                        </a:lnSpc>
-                        <a:spcBef>
-                          <a:spcPts val="0"/>
-                        </a:spcBef>
-                        <a:spcAft>
-                          <a:spcPts val="0"/>
-                        </a:spcAft>
-                      </a:pPr>
-                      <a:r>
-                        <a:rPr sz="1300" b="0">
-                          <a:solidFill>
-                            <a:srgbClr val="1F1F1F"/>
-                          </a:solidFill>
-                          <a:latin typeface="Calibri"/>
-                        </a:rPr>
-                        <a:t>e prazos de séries nos</a:t>
-                      </a:r>
-                    </a:p>
-                    <a:p>
-                      <a:pPr algn="ctr">
-                        <a:lnSpc>
-                          <a:spcPct val="100000"/>
-                        </a:lnSpc>
-                        <a:spcBef>
-                          <a:spcPts val="0"/>
-                        </a:spcBef>
-                        <a:spcAft>
-                          <a:spcPts val="0"/>
-                        </a:spcAft>
-                      </a:pPr>
-                      <a:r>
-                        <a:rPr sz="1300" b="0">
-                          <a:solidFill>
-                            <a:srgbClr val="1F1F1F"/>
-                          </a:solidFill>
-                          <a:latin typeface="Calibri"/>
-                        </a:rPr>
-                        <a:t>apêndices.</a:t>
+                        <a:t>Classe fechada</a:t>
                       </a:r>
                     </a:p>
                   </a:txBody>
@@ -38947,7 +35757,7 @@
                       <a:r>
                         <a:rPr sz="1300" b="1">
                           <a:solidFill>
-                            <a:srgbClr val="1F1F1F"/>
+                            <a:srgbClr val="FFFFFF"/>
                           </a:solidFill>
                           <a:latin typeface="Calibri"/>
                         </a:rPr>
@@ -38957,7 +35767,7 @@
                   </a:txBody>
                   <a:tcPr marL="91440" marR="91440" marT="41148" marB="41148" anchor="ctr">
                     <a:solidFill>
-                      <a:srgbClr val="EC7000"/>
+                      <a:srgbClr val="FF6200"/>
                     </a:solidFill>
                     <a:lnL>
                       <a:noFill/>
@@ -38996,7 +35806,7 @@
                       <a:r>
                         <a:rPr sz="1300" b="1">
                           <a:solidFill>
-                            <a:srgbClr val="1F1F1F"/>
+                            <a:srgbClr val="FFFFFF"/>
                           </a:solidFill>
                           <a:latin typeface="Calibri"/>
                         </a:rPr>
@@ -39006,7 +35816,7 @@
                   </a:txBody>
                   <a:tcPr marL="91440" marR="91440" marT="41148" marB="41148" anchor="ctr">
                     <a:solidFill>
-                      <a:srgbClr val="EC7000"/>
+                      <a:srgbClr val="FF6200"/>
                     </a:solidFill>
                     <a:lnL>
                       <a:noFill/>
@@ -39045,7 +35855,7 @@
                       <a:r>
                         <a:rPr sz="1300" b="1">
                           <a:solidFill>
-                            <a:srgbClr val="1F1F1F"/>
+                            <a:srgbClr val="FFFFFF"/>
                           </a:solidFill>
                           <a:latin typeface="Calibri"/>
                         </a:rPr>
@@ -39055,7 +35865,7 @@
                   </a:txBody>
                   <a:tcPr marL="91440" marR="91440" marT="41148" marB="41148" anchor="ctr">
                     <a:solidFill>
-                      <a:srgbClr val="EC7000"/>
+                      <a:srgbClr val="FF6200"/>
                     </a:solidFill>
                     <a:lnL>
                       <a:noFill/>
@@ -39094,7 +35904,7 @@
                       <a:r>
                         <a:rPr sz="1300" b="1">
                           <a:solidFill>
-                            <a:srgbClr val="1F1F1F"/>
+                            <a:srgbClr val="FFFFFF"/>
                           </a:solidFill>
                           <a:latin typeface="Calibri"/>
                         </a:rPr>
@@ -39104,7 +35914,7 @@
                   </a:txBody>
                   <a:tcPr marL="91440" marR="91440" marT="41148" marB="41148" anchor="ctr">
                     <a:solidFill>
-                      <a:srgbClr val="EC7000"/>
+                      <a:srgbClr val="FF6200"/>
                     </a:solidFill>
                     <a:lnL>
                       <a:noFill/>
@@ -39143,7 +35953,7 @@
                       <a:r>
                         <a:rPr sz="1300" b="1">
                           <a:solidFill>
-                            <a:srgbClr val="1F1F1F"/>
+                            <a:srgbClr val="FFFFFF"/>
                           </a:solidFill>
                           <a:latin typeface="Calibri"/>
                         </a:rPr>
@@ -39153,7 +35963,7 @@
                   </a:txBody>
                   <a:tcPr marL="91440" marR="91440" marT="41148" marB="41148" anchor="ctr">
                     <a:solidFill>
-                      <a:srgbClr val="EC7000"/>
+                      <a:srgbClr val="FF6200"/>
                     </a:solidFill>
                     <a:lnL>
                       <a:noFill/>
@@ -41358,7 +38168,7 @@
         </p:nvGraphicFramePr>
         <p:xfrm>
           <a:off x="438912" y="932688"/>
-          <a:ext cx="11313870" cy="5280655"/>
+          <a:ext cx="11313870" cy="4718300"/>
         </p:xfrm>
         <a:graphic>
           <a:graphicData uri="http://schemas.openxmlformats.org/drawingml/2006/table">
@@ -41394,7 +38204,7 @@
                       <a:r>
                         <a:rPr sz="1300" b="1">
                           <a:solidFill>
-                            <a:srgbClr val="1F1F1F"/>
+                            <a:srgbClr val="FFFFFF"/>
                           </a:solidFill>
                           <a:latin typeface="Calibri"/>
                         </a:rPr>
@@ -41404,7 +38214,7 @@
                   </a:txBody>
                   <a:tcPr marL="91440" marR="91440" marT="41148" marB="41148" anchor="ctr">
                     <a:solidFill>
-                      <a:srgbClr val="EC7000"/>
+                      <a:srgbClr val="FF6200"/>
                     </a:solidFill>
                     <a:lnL>
                       <a:noFill/>
@@ -41443,7 +38253,7 @@
                       <a:r>
                         <a:rPr sz="1300" b="1">
                           <a:solidFill>
-                            <a:srgbClr val="1F1F1F"/>
+                            <a:srgbClr val="FFFFFF"/>
                           </a:solidFill>
                           <a:latin typeface="Calibri"/>
                         </a:rPr>
@@ -41453,7 +38263,7 @@
                   </a:txBody>
                   <a:tcPr marL="91440" marR="91440" marT="41148" marB="41148" anchor="ctr">
                     <a:solidFill>
-                      <a:srgbClr val="EC7000"/>
+                      <a:srgbClr val="FF6200"/>
                     </a:solidFill>
                     <a:lnL>
                       <a:noFill/>
@@ -41492,7 +38302,7 @@
                       <a:r>
                         <a:rPr sz="1300" b="1">
                           <a:solidFill>
-                            <a:srgbClr val="1F1F1F"/>
+                            <a:srgbClr val="FFFFFF"/>
                           </a:solidFill>
                           <a:latin typeface="Calibri"/>
                         </a:rPr>
@@ -41502,7 +38312,7 @@
                   </a:txBody>
                   <a:tcPr marL="91440" marR="91440" marT="41148" marB="41148" anchor="ctr">
                     <a:solidFill>
-                      <a:srgbClr val="EC7000"/>
+                      <a:srgbClr val="FF6200"/>
                     </a:solidFill>
                     <a:lnL>
                       <a:noFill/>
@@ -41541,7 +38351,7 @@
                       <a:r>
                         <a:rPr sz="1300" b="1">
                           <a:solidFill>
-                            <a:srgbClr val="1F1F1F"/>
+                            <a:srgbClr val="FFFFFF"/>
                           </a:solidFill>
                           <a:latin typeface="Calibri"/>
                         </a:rPr>
@@ -41551,7 +38361,7 @@
                   </a:txBody>
                   <a:tcPr marL="91440" marR="91440" marT="41148" marB="41148" anchor="ctr">
                     <a:solidFill>
-                      <a:srgbClr val="EC7000"/>
+                      <a:srgbClr val="FF6200"/>
                     </a:solidFill>
                     <a:lnL>
                       <a:noFill/>
@@ -41826,7 +38636,7 @@
                   </a:tcPr>
                 </a:tc>
               </a:tr>
-              <a:tr h="1033271">
+              <a:tr h="845819">
                 <a:tc>
                   <a:txBody>
                     <a:bodyPr wrap="square">
@@ -42056,51 +38866,7 @@
                           </a:solidFill>
                           <a:latin typeface="Calibri"/>
                         </a:rPr>
-                        <a:t>durante período de revolvência;</a:t>
-                      </a:r>
-                    </a:p>
-                    <a:p>
-                      <a:pPr algn="ctr">
-                        <a:lnSpc>
-                          <a:spcPct val="100000"/>
-                        </a:lnSpc>
-                        <a:spcBef>
-                          <a:spcPts val="0"/>
-                        </a:spcBef>
-                        <a:spcAft>
-                          <a:spcPts val="0"/>
-                        </a:spcAft>
-                      </a:pPr>
-                      <a:r>
-                        <a:rPr sz="1300" b="0">
-                          <a:solidFill>
-                            <a:srgbClr val="1F1F1F"/>
-                          </a:solidFill>
-                          <a:latin typeface="Calibri"/>
-                        </a:rPr>
-                        <a:t>duração por série não</a:t>
-                      </a:r>
-                    </a:p>
-                    <a:p>
-                      <a:pPr algn="ctr">
-                        <a:lnSpc>
-                          <a:spcPct val="100000"/>
-                        </a:lnSpc>
-                        <a:spcBef>
-                          <a:spcPts val="0"/>
-                        </a:spcBef>
-                        <a:spcAft>
-                          <a:spcPts val="0"/>
-                        </a:spcAft>
-                      </a:pPr>
-                      <a:r>
-                        <a:rPr sz="1300" b="0">
-                          <a:solidFill>
-                            <a:srgbClr val="1F1F1F"/>
-                          </a:solidFill>
-                          <a:latin typeface="Calibri"/>
-                        </a:rPr>
-                        <a:t>preenchida.</a:t>
+                        <a:t>durante período de revolvência</a:t>
                       </a:r>
                     </a:p>
                   </a:txBody>
@@ -42169,51 +38935,7 @@
                           </a:solidFill>
                           <a:latin typeface="Calibri"/>
                         </a:rPr>
-                        <a:t>reservas e condições</a:t>
-                      </a:r>
-                    </a:p>
-                    <a:p>
-                      <a:pPr algn="ctr">
-                        <a:lnSpc>
-                          <a:spcPct val="100000"/>
-                        </a:lnSpc>
-                        <a:spcBef>
-                          <a:spcPts val="0"/>
-                        </a:spcBef>
-                        <a:spcAft>
-                          <a:spcPts val="0"/>
-                        </a:spcAft>
-                      </a:pPr>
-                      <a:r>
-                        <a:rPr sz="1300" b="0">
-                          <a:solidFill>
-                            <a:srgbClr val="1F1F1F"/>
-                          </a:solidFill>
-                          <a:latin typeface="Calibri"/>
-                        </a:rPr>
-                        <a:t>contratuais; duração da</a:t>
-                      </a:r>
-                    </a:p>
-                    <a:p>
-                      <a:pPr algn="ctr">
-                        <a:lnSpc>
-                          <a:spcPct val="100000"/>
-                        </a:lnSpc>
-                        <a:spcBef>
-                          <a:spcPts val="0"/>
-                        </a:spcBef>
-                        <a:spcAft>
-                          <a:spcPts val="0"/>
-                        </a:spcAft>
-                      </a:pPr>
-                      <a:r>
-                        <a:rPr sz="1300" b="0">
-                          <a:solidFill>
-                            <a:srgbClr val="1F1F1F"/>
-                          </a:solidFill>
-                          <a:latin typeface="Calibri"/>
-                        </a:rPr>
-                        <a:t>revolvência não confirmada.</a:t>
+                        <a:t>reservas e condições contratuais</a:t>
                       </a:r>
                     </a:p>
                   </a:txBody>
@@ -42236,7 +38958,7 @@
                   </a:tcPr>
                 </a:tc>
               </a:tr>
-              <a:tr h="845819">
+              <a:tr h="470916">
                 <a:tc>
                   <a:txBody>
                     <a:bodyPr wrap="square">
@@ -42309,51 +39031,7 @@
                           </a:solidFill>
                           <a:latin typeface="Calibri"/>
                         </a:rPr>
-                        <a:t>Classe fechada; prazos e</a:t>
-                      </a:r>
-                    </a:p>
-                    <a:p>
-                      <a:pPr algn="ctr">
-                        <a:lnSpc>
-                          <a:spcPct val="100000"/>
-                        </a:lnSpc>
-                        <a:spcBef>
-                          <a:spcPts val="0"/>
-                        </a:spcBef>
-                        <a:spcAft>
-                          <a:spcPts val="0"/>
-                        </a:spcAft>
-                      </a:pPr>
-                      <a:r>
-                        <a:rPr sz="1300" b="0">
-                          <a:solidFill>
-                            <a:srgbClr val="1F1F1F"/>
-                          </a:solidFill>
-                          <a:latin typeface="Calibri"/>
-                        </a:rPr>
-                        <a:t>remuneração de séries nos</a:t>
-                      </a:r>
-                    </a:p>
-                    <a:p>
-                      <a:pPr algn="ctr">
-                        <a:lnSpc>
-                          <a:spcPct val="100000"/>
-                        </a:lnSpc>
-                        <a:spcBef>
-                          <a:spcPts val="0"/>
-                        </a:spcBef>
-                        <a:spcAft>
-                          <a:spcPts val="0"/>
-                        </a:spcAft>
-                      </a:pPr>
-                      <a:r>
-                        <a:rPr sz="1300" b="0">
-                          <a:solidFill>
-                            <a:srgbClr val="1F1F1F"/>
-                          </a:solidFill>
-                          <a:latin typeface="Calibri"/>
-                        </a:rPr>
-                        <a:t>apêndices; investidores</a:t>
+                        <a:t>Classe fechada; investidores</a:t>
                       </a:r>
                     </a:p>
                     <a:p>
@@ -42422,51 +39100,7 @@
                           </a:solidFill>
                           <a:latin typeface="Calibri"/>
                         </a:rPr>
-                        <a:t>Classe fechada; prazos e</a:t>
-                      </a:r>
-                    </a:p>
-                    <a:p>
-                      <a:pPr algn="ctr">
-                        <a:lnSpc>
-                          <a:spcPct val="100000"/>
-                        </a:lnSpc>
-                        <a:spcBef>
-                          <a:spcPts val="0"/>
-                        </a:spcBef>
-                        <a:spcAft>
-                          <a:spcPts val="0"/>
-                        </a:spcAft>
-                      </a:pPr>
-                      <a:r>
-                        <a:rPr sz="1300" b="0">
-                          <a:solidFill>
-                            <a:srgbClr val="1F1F1F"/>
-                          </a:solidFill>
-                          <a:latin typeface="Calibri"/>
-                        </a:rPr>
-                        <a:t>remuneração de séries nos</a:t>
-                      </a:r>
-                    </a:p>
-                    <a:p>
-                      <a:pPr algn="ctr">
-                        <a:lnSpc>
-                          <a:spcPct val="100000"/>
-                        </a:lnSpc>
-                        <a:spcBef>
-                          <a:spcPts val="0"/>
-                        </a:spcBef>
-                        <a:spcAft>
-                          <a:spcPts val="0"/>
-                        </a:spcAft>
-                      </a:pPr>
-                      <a:r>
-                        <a:rPr sz="1300" b="0">
-                          <a:solidFill>
-                            <a:srgbClr val="1F1F1F"/>
-                          </a:solidFill>
-                          <a:latin typeface="Calibri"/>
-                        </a:rPr>
-                        <a:t>apêndices; investidores</a:t>
+                        <a:t>Classe fechada; investidores</a:t>
                       </a:r>
                     </a:p>
                     <a:p>
@@ -42535,51 +39169,7 @@
                           </a:solidFill>
                           <a:latin typeface="Calibri"/>
                         </a:rPr>
-                        <a:t>Classe fechada; prazos e</a:t>
-                      </a:r>
-                    </a:p>
-                    <a:p>
-                      <a:pPr algn="ctr">
-                        <a:lnSpc>
-                          <a:spcPct val="100000"/>
-                        </a:lnSpc>
-                        <a:spcBef>
-                          <a:spcPts val="0"/>
-                        </a:spcBef>
-                        <a:spcAft>
-                          <a:spcPts val="0"/>
-                        </a:spcAft>
-                      </a:pPr>
-                      <a:r>
-                        <a:rPr sz="1300" b="0">
-                          <a:solidFill>
-                            <a:srgbClr val="1F1F1F"/>
-                          </a:solidFill>
-                          <a:latin typeface="Calibri"/>
-                        </a:rPr>
-                        <a:t>resgates dependem de</a:t>
-                      </a:r>
-                    </a:p>
-                    <a:p>
-                      <a:pPr algn="ctr">
-                        <a:lnSpc>
-                          <a:spcPct val="100000"/>
-                        </a:lnSpc>
-                        <a:spcBef>
-                          <a:spcPts val="0"/>
-                        </a:spcBef>
-                        <a:spcAft>
-                          <a:spcPts val="0"/>
-                        </a:spcAft>
-                      </a:pPr>
-                      <a:r>
-                        <a:rPr sz="1300" b="0">
-                          <a:solidFill>
-                            <a:srgbClr val="1F1F1F"/>
-                          </a:solidFill>
-                          <a:latin typeface="Calibri"/>
-                        </a:rPr>
-                        <a:t>suplementos.</a:t>
+                        <a:t>Classe fechada</a:t>
                       </a:r>
                     </a:p>
                   </a:txBody>
